--- a/docs/2_Value_Creation/2a_Product/2a_Product_Management_Plan.pptx
+++ b/docs/2_Value_Creation/2a_Product/2a_Product_Management_Plan.pptx
@@ -265,978 +265,50 @@
       <p15:sldGuideLst xmlns:p15="http://schemas.microsoft.com/office/powerpoint/2012/main"/>
     </p:ext>
     <p:ext uri="GoogleSlidesCustomDataVersion2">
-      <go:slidesCustomData xmlns="" xmlns:go="http://customooxmlschemas.google.com/" xmlns:ahyp="http://schemas.microsoft.com/office/drawing/2018/hyperlinkcolor" xmlns:p15="http://schemas.microsoft.com/office/powerpoint/2012/main" xmlns:p14="http://schemas.microsoft.com/office/powerpoint/2010/main" xmlns:com="http://schemas.openxmlformats.org/drawingml/2006/compatibility" xmlns:pvml="urn:schemas-microsoft-com:office:powerpoint" xmlns:v="urn:schemas-microsoft-com:vml" xmlns:o="urn:schemas-microsoft-com:office:office" xmlns:dgm="http://schemas.openxmlformats.org/drawingml/2006/diagram" xmlns:c="http://schemas.openxmlformats.org/drawingml/2006/chart" xmlns:mv="urn:schemas-microsoft-com:mac:vml" xmlns:mc="http://schemas.openxmlformats.org/markup-compatibility/2006" r:id="rId23" roundtripDataSignature="AMtx7mhwEp+Eio5qReXqYqUwMP31HB0A8A=="/>
+      <go:slidesCustomData xmlns:mc="http://schemas.openxmlformats.org/markup-compatibility/2006" xmlns:mv="urn:schemas-microsoft-com:mac:vml" xmlns:c="http://schemas.openxmlformats.org/drawingml/2006/chart" xmlns:dgm="http://schemas.openxmlformats.org/drawingml/2006/diagram" xmlns:o="urn:schemas-microsoft-com:office:office" xmlns:v="urn:schemas-microsoft-com:vml" xmlns:pvml="urn:schemas-microsoft-com:office:powerpoint" xmlns:com="http://schemas.openxmlformats.org/drawingml/2006/compatibility" xmlns:p14="http://schemas.microsoft.com/office/powerpoint/2010/main" xmlns:p15="http://schemas.microsoft.com/office/powerpoint/2012/main" xmlns:ahyp="http://schemas.microsoft.com/office/drawing/2018/hyperlinkcolor" xmlns:go="http://customooxmlschemas.google.com/" xmlns="" r:id="rId23" roundtripDataSignature="AMtx7mhwEp+Eio5qReXqYqUwMP31HB0A8A=="/>
     </p:ext>
   </p:extLst>
 </p:presentation>
 </file>
 
-<file path=ppt/revisionInfo.xml><?xml version="1.0" encoding="utf-8"?>
-<p1510:revInfo xmlns:a="http://schemas.openxmlformats.org/drawingml/2006/main" xmlns:r="http://schemas.openxmlformats.org/officeDocument/2006/relationships" xmlns:p1510="http://schemas.microsoft.com/office/powerpoint/2015/10/main">
-  <p1510:revLst>
-    <p1510:client id="{57218731-3F2E-3346-A56F-2F6940FBDC3C}" v="142" dt="2025-11-05T18:14:10.297"/>
-  </p1510:revLst>
-</p1510:revInfo>
-</file>
-
 <file path=ppt/changesInfos/changesInfo1.xml><?xml version="1.0" encoding="utf-8"?>
 <pc:chgInfo xmlns:a="http://schemas.openxmlformats.org/drawingml/2006/main" xmlns:r="http://schemas.openxmlformats.org/officeDocument/2006/relationships" xmlns:ac="http://schemas.microsoft.com/office/drawing/2013/main/command" xmlns:pc="http://schemas.microsoft.com/office/powerpoint/2013/main/command">
   <pc:docChgLst>
-    <pc:chgData name="Rich Reba" userId="8245d172-5b81-40f1-a13b-b71f02cd6700" providerId="ADAL" clId="{0E19DA16-244C-5B50-BE0F-52911DD4CA7E}"/>
-    <pc:docChg chg="undo custSel addSld delSld modSld sldOrd">
-      <pc:chgData name="Rich Reba" userId="8245d172-5b81-40f1-a13b-b71f02cd6700" providerId="ADAL" clId="{0E19DA16-244C-5B50-BE0F-52911DD4CA7E}" dt="2025-11-12T21:54:55.517" v="7166" actId="20577"/>
+    <pc:chgData name="Rich Reba" userId="55db41ab6eb3f845" providerId="LiveId" clId="{0E19DA16-244C-5B50-BE0F-52911DD4CA7E}"/>
+    <pc:docChg chg="custSel modSld">
+      <pc:chgData name="Rich Reba" userId="55db41ab6eb3f845" providerId="LiveId" clId="{0E19DA16-244C-5B50-BE0F-52911DD4CA7E}" dt="2026-08-05T20:16:55.074" v="1" actId="478"/>
       <pc:docMkLst>
         <pc:docMk/>
       </pc:docMkLst>
-      <pc:sldChg chg="addSp delSp modSp mod">
-        <pc:chgData name="Rich Reba" userId="8245d172-5b81-40f1-a13b-b71f02cd6700" providerId="ADAL" clId="{0E19DA16-244C-5B50-BE0F-52911DD4CA7E}" dt="2025-11-12T21:54:55.517" v="7166" actId="20577"/>
-        <pc:sldMkLst>
-          <pc:docMk/>
-          <pc:sldMk cId="0" sldId="256"/>
-        </pc:sldMkLst>
-        <pc:spChg chg="mod">
-          <ac:chgData name="Rich Reba" userId="8245d172-5b81-40f1-a13b-b71f02cd6700" providerId="ADAL" clId="{0E19DA16-244C-5B50-BE0F-52911DD4CA7E}" dt="2025-11-12T21:54:55.517" v="7166" actId="20577"/>
-          <ac:spMkLst>
-            <pc:docMk/>
-            <pc:sldMk cId="0" sldId="256"/>
-            <ac:spMk id="91" creationId="{00000000-0000-0000-0000-000000000000}"/>
-          </ac:spMkLst>
-        </pc:spChg>
-      </pc:sldChg>
-      <pc:sldChg chg="addSp delSp modSp mod ord modNotesTx">
-        <pc:chgData name="Rich Reba" userId="8245d172-5b81-40f1-a13b-b71f02cd6700" providerId="ADAL" clId="{0E19DA16-244C-5B50-BE0F-52911DD4CA7E}" dt="2025-10-27T12:00:33.731" v="6492" actId="313"/>
-        <pc:sldMkLst>
-          <pc:docMk/>
-          <pc:sldMk cId="1961190671" sldId="274"/>
-        </pc:sldMkLst>
-        <pc:spChg chg="mod">
-          <ac:chgData name="Rich Reba" userId="8245d172-5b81-40f1-a13b-b71f02cd6700" providerId="ADAL" clId="{0E19DA16-244C-5B50-BE0F-52911DD4CA7E}" dt="2025-10-26T03:35:03.386" v="6237" actId="20577"/>
-          <ac:spMkLst>
-            <pc:docMk/>
-            <pc:sldMk cId="1961190671" sldId="274"/>
-            <ac:spMk id="121" creationId="{D1FD5753-66B3-EA4B-4895-9891C1AB6723}"/>
-          </ac:spMkLst>
-        </pc:spChg>
-        <pc:picChg chg="add mod">
-          <ac:chgData name="Rich Reba" userId="8245d172-5b81-40f1-a13b-b71f02cd6700" providerId="ADAL" clId="{0E19DA16-244C-5B50-BE0F-52911DD4CA7E}" dt="2025-10-26T03:06:15.150" v="5654" actId="14100"/>
-          <ac:picMkLst>
-            <pc:docMk/>
-            <pc:sldMk cId="1961190671" sldId="274"/>
-            <ac:picMk id="10" creationId="{3FE8F92F-8E46-85DD-4116-26EF501AC202}"/>
-          </ac:picMkLst>
-        </pc:picChg>
-        <pc:picChg chg="add mod">
-          <ac:chgData name="Rich Reba" userId="8245d172-5b81-40f1-a13b-b71f02cd6700" providerId="ADAL" clId="{0E19DA16-244C-5B50-BE0F-52911DD4CA7E}" dt="2025-10-26T03:05:16.108" v="5648" actId="167"/>
-          <ac:picMkLst>
-            <pc:docMk/>
-            <pc:sldMk cId="1961190671" sldId="274"/>
-            <ac:picMk id="12" creationId="{3046D7FA-AC43-5B45-5C70-02617D0DD8A1}"/>
-          </ac:picMkLst>
-        </pc:picChg>
-      </pc:sldChg>
-      <pc:sldChg chg="addSp delSp modSp add mod ord modNotesTx">
-        <pc:chgData name="Rich Reba" userId="8245d172-5b81-40f1-a13b-b71f02cd6700" providerId="ADAL" clId="{0E19DA16-244C-5B50-BE0F-52911DD4CA7E}" dt="2025-11-05T17:41:02.641" v="6687" actId="20577"/>
+      <pc:sldChg chg="delSp mod">
+        <pc:chgData name="Rich Reba" userId="55db41ab6eb3f845" providerId="LiveId" clId="{0E19DA16-244C-5B50-BE0F-52911DD4CA7E}" dt="2026-08-05T20:16:51.271" v="0" actId="478"/>
         <pc:sldMkLst>
           <pc:docMk/>
           <pc:sldMk cId="4261285587" sldId="291"/>
         </pc:sldMkLst>
-        <pc:spChg chg="add mod">
-          <ac:chgData name="Rich Reba" userId="8245d172-5b81-40f1-a13b-b71f02cd6700" providerId="ADAL" clId="{0E19DA16-244C-5B50-BE0F-52911DD4CA7E}" dt="2025-10-26T01:08:23.322" v="983" actId="20577"/>
+        <pc:spChg chg="del">
+          <ac:chgData name="Rich Reba" userId="55db41ab6eb3f845" providerId="LiveId" clId="{0E19DA16-244C-5B50-BE0F-52911DD4CA7E}" dt="2026-08-05T20:16:51.271" v="0" actId="478"/>
           <ac:spMkLst>
             <pc:docMk/>
             <pc:sldMk cId="4261285587" sldId="291"/>
-            <ac:spMk id="6" creationId="{C57429A8-7BCA-FBE6-641C-A652B7FDAB01}"/>
-          </ac:spMkLst>
-        </pc:spChg>
-        <pc:spChg chg="mod">
-          <ac:chgData name="Rich Reba" userId="8245d172-5b81-40f1-a13b-b71f02cd6700" providerId="ADAL" clId="{0E19DA16-244C-5B50-BE0F-52911DD4CA7E}" dt="2025-11-05T17:41:02.641" v="6687" actId="20577"/>
-          <ac:spMkLst>
-            <pc:docMk/>
-            <pc:sldMk cId="4261285587" sldId="291"/>
-            <ac:spMk id="13" creationId="{FBC2FEAB-52D6-6904-21B2-9B30A2E34532}"/>
-          </ac:spMkLst>
-        </pc:spChg>
-        <pc:spChg chg="mod">
-          <ac:chgData name="Rich Reba" userId="8245d172-5b81-40f1-a13b-b71f02cd6700" providerId="ADAL" clId="{0E19DA16-244C-5B50-BE0F-52911DD4CA7E}" dt="2025-10-25T23:02:23.868" v="860" actId="20577"/>
-          <ac:spMkLst>
-            <pc:docMk/>
-            <pc:sldMk cId="4261285587" sldId="291"/>
-            <ac:spMk id="14" creationId="{CBC1E880-CB17-5519-EF06-355868FF7F38}"/>
+            <ac:spMk id="2" creationId="{CD994921-CA85-D524-D4AC-39A78EB65DD8}"/>
           </ac:spMkLst>
         </pc:spChg>
       </pc:sldChg>
-      <pc:sldChg chg="addSp delSp modSp mod ord modNotesTx">
-        <pc:chgData name="Rich Reba" userId="8245d172-5b81-40f1-a13b-b71f02cd6700" providerId="ADAL" clId="{0E19DA16-244C-5B50-BE0F-52911DD4CA7E}" dt="2025-10-27T12:00:45.581" v="6493" actId="20577"/>
-        <pc:sldMkLst>
-          <pc:docMk/>
-          <pc:sldMk cId="797649862" sldId="400"/>
-        </pc:sldMkLst>
-        <pc:spChg chg="mod">
-          <ac:chgData name="Rich Reba" userId="8245d172-5b81-40f1-a13b-b71f02cd6700" providerId="ADAL" clId="{0E19DA16-244C-5B50-BE0F-52911DD4CA7E}" dt="2025-10-26T03:22:04.787" v="5932" actId="20577"/>
-          <ac:spMkLst>
-            <pc:docMk/>
-            <pc:sldMk cId="797649862" sldId="400"/>
-            <ac:spMk id="96" creationId="{00000000-0000-0000-0000-000000000000}"/>
-          </ac:spMkLst>
-        </pc:spChg>
-        <pc:picChg chg="add mod">
-          <ac:chgData name="Rich Reba" userId="8245d172-5b81-40f1-a13b-b71f02cd6700" providerId="ADAL" clId="{0E19DA16-244C-5B50-BE0F-52911DD4CA7E}" dt="2025-10-26T03:06:01.908" v="5653" actId="167"/>
-          <ac:picMkLst>
-            <pc:docMk/>
-            <pc:sldMk cId="797649862" sldId="400"/>
-            <ac:picMk id="4" creationId="{17F858C6-D24B-275F-C277-0DF9F5D07742}"/>
-          </ac:picMkLst>
-        </pc:picChg>
-        <pc:picChg chg="add mod">
-          <ac:chgData name="Rich Reba" userId="8245d172-5b81-40f1-a13b-b71f02cd6700" providerId="ADAL" clId="{0E19DA16-244C-5B50-BE0F-52911DD4CA7E}" dt="2025-10-26T03:06:20.509" v="5656"/>
-          <ac:picMkLst>
-            <pc:docMk/>
-            <pc:sldMk cId="797649862" sldId="400"/>
-            <ac:picMk id="7" creationId="{11E7C6CA-1629-36F8-F9B9-6EA9D804C1B1}"/>
-          </ac:picMkLst>
-        </pc:picChg>
-      </pc:sldChg>
-      <pc:sldChg chg="addSp modSp mod modNotesTx">
-        <pc:chgData name="Rich Reba" userId="8245d172-5b81-40f1-a13b-b71f02cd6700" providerId="ADAL" clId="{0E19DA16-244C-5B50-BE0F-52911DD4CA7E}" dt="2025-10-27T12:03:03.030" v="6648" actId="20577"/>
-        <pc:sldMkLst>
-          <pc:docMk/>
-          <pc:sldMk cId="4204179867" sldId="401"/>
-        </pc:sldMkLst>
-        <pc:spChg chg="mod">
-          <ac:chgData name="Rich Reba" userId="8245d172-5b81-40f1-a13b-b71f02cd6700" providerId="ADAL" clId="{0E19DA16-244C-5B50-BE0F-52911DD4CA7E}" dt="2025-10-27T12:03:03.030" v="6648" actId="20577"/>
-          <ac:spMkLst>
-            <pc:docMk/>
-            <pc:sldMk cId="4204179867" sldId="401"/>
-            <ac:spMk id="96" creationId="{52522E90-5AE9-9FBE-04B3-D747C0792CCB}"/>
-          </ac:spMkLst>
-        </pc:spChg>
-        <pc:graphicFrameChg chg="mod modGraphic">
-          <ac:chgData name="Rich Reba" userId="8245d172-5b81-40f1-a13b-b71f02cd6700" providerId="ADAL" clId="{0E19DA16-244C-5B50-BE0F-52911DD4CA7E}" dt="2025-10-25T22:43:18.268" v="758" actId="1076"/>
-          <ac:graphicFrameMkLst>
-            <pc:docMk/>
-            <pc:sldMk cId="4204179867" sldId="401"/>
-            <ac:graphicFrameMk id="5" creationId="{4AE03268-FBA5-47E1-5FB7-A69965E75B13}"/>
-          </ac:graphicFrameMkLst>
-        </pc:graphicFrameChg>
-        <pc:picChg chg="add mod">
-          <ac:chgData name="Rich Reba" userId="8245d172-5b81-40f1-a13b-b71f02cd6700" providerId="ADAL" clId="{0E19DA16-244C-5B50-BE0F-52911DD4CA7E}" dt="2025-10-26T03:04:43.641" v="5646" actId="167"/>
-          <ac:picMkLst>
-            <pc:docMk/>
-            <pc:sldMk cId="4204179867" sldId="401"/>
-            <ac:picMk id="3" creationId="{7EEA8827-7200-657E-4854-70B29D615285}"/>
-          </ac:picMkLst>
-        </pc:picChg>
-      </pc:sldChg>
-      <pc:sldChg chg="addSp delSp modSp mod modNotesTx">
-        <pc:chgData name="Rich Reba" userId="8245d172-5b81-40f1-a13b-b71f02cd6700" providerId="ADAL" clId="{0E19DA16-244C-5B50-BE0F-52911DD4CA7E}" dt="2025-10-27T12:01:16.509" v="6584" actId="20577"/>
-        <pc:sldMkLst>
-          <pc:docMk/>
-          <pc:sldMk cId="401125609" sldId="409"/>
-        </pc:sldMkLst>
-        <pc:spChg chg="add mod">
-          <ac:chgData name="Rich Reba" userId="8245d172-5b81-40f1-a13b-b71f02cd6700" providerId="ADAL" clId="{0E19DA16-244C-5B50-BE0F-52911DD4CA7E}" dt="2025-10-26T03:14:06.388" v="5891" actId="1076"/>
-          <ac:spMkLst>
-            <pc:docMk/>
-            <pc:sldMk cId="401125609" sldId="409"/>
-            <ac:spMk id="8" creationId="{98161617-7B83-FBD0-E788-6EDFBDE6F761}"/>
-          </ac:spMkLst>
-        </pc:spChg>
-        <pc:spChg chg="mod">
-          <ac:chgData name="Rich Reba" userId="8245d172-5b81-40f1-a13b-b71f02cd6700" providerId="ADAL" clId="{0E19DA16-244C-5B50-BE0F-52911DD4CA7E}" dt="2025-10-25T22:34:43.546" v="696" actId="20577"/>
-          <ac:spMkLst>
-            <pc:docMk/>
-            <pc:sldMk cId="401125609" sldId="409"/>
-            <ac:spMk id="96" creationId="{213A3A61-4044-D39A-7839-F3AEFE0C296B}"/>
-          </ac:spMkLst>
-        </pc:spChg>
-        <pc:graphicFrameChg chg="modGraphic">
-          <ac:chgData name="Rich Reba" userId="8245d172-5b81-40f1-a13b-b71f02cd6700" providerId="ADAL" clId="{0E19DA16-244C-5B50-BE0F-52911DD4CA7E}" dt="2025-10-26T03:18:09.114" v="5893" actId="13926"/>
-          <ac:graphicFrameMkLst>
-            <pc:docMk/>
-            <pc:sldMk cId="401125609" sldId="409"/>
-            <ac:graphicFrameMk id="5" creationId="{5855B0BF-5869-4C17-DDB9-4330FF90D640}"/>
-          </ac:graphicFrameMkLst>
-        </pc:graphicFrameChg>
-        <pc:picChg chg="add mod">
-          <ac:chgData name="Rich Reba" userId="8245d172-5b81-40f1-a13b-b71f02cd6700" providerId="ADAL" clId="{0E19DA16-244C-5B50-BE0F-52911DD4CA7E}" dt="2025-10-26T03:04:34.483" v="5644" actId="14100"/>
-          <ac:picMkLst>
-            <pc:docMk/>
-            <pc:sldMk cId="401125609" sldId="409"/>
-            <ac:picMk id="3" creationId="{C734C8B3-CAA6-7C3E-29FF-A014181AB53A}"/>
-          </ac:picMkLst>
-        </pc:picChg>
-      </pc:sldChg>
-      <pc:sldChg chg="modSp mod modNotesTx">
-        <pc:chgData name="Rich Reba" userId="8245d172-5b81-40f1-a13b-b71f02cd6700" providerId="ADAL" clId="{0E19DA16-244C-5B50-BE0F-52911DD4CA7E}" dt="2025-10-26T03:22:26.162" v="5933" actId="20577"/>
-        <pc:sldMkLst>
-          <pc:docMk/>
-          <pc:sldMk cId="2377141767" sldId="417"/>
-        </pc:sldMkLst>
-        <pc:spChg chg="mod">
-          <ac:chgData name="Rich Reba" userId="8245d172-5b81-40f1-a13b-b71f02cd6700" providerId="ADAL" clId="{0E19DA16-244C-5B50-BE0F-52911DD4CA7E}" dt="2025-10-26T03:22:26.162" v="5933" actId="20577"/>
-          <ac:spMkLst>
-            <pc:docMk/>
-            <pc:sldMk cId="2377141767" sldId="417"/>
-            <ac:spMk id="22" creationId="{278CDA1C-9746-8737-E977-E13F1843DD8E}"/>
-          </ac:spMkLst>
-        </pc:spChg>
-        <pc:spChg chg="mod">
-          <ac:chgData name="Rich Reba" userId="8245d172-5b81-40f1-a13b-b71f02cd6700" providerId="ADAL" clId="{0E19DA16-244C-5B50-BE0F-52911DD4CA7E}" dt="2025-10-25T22:42:21.435" v="743" actId="14100"/>
-          <ac:spMkLst>
-            <pc:docMk/>
-            <pc:sldMk cId="2377141767" sldId="417"/>
-            <ac:spMk id="24" creationId="{E0E03ECB-0B31-BD76-EAF7-78F37688F172}"/>
-          </ac:spMkLst>
-        </pc:spChg>
-      </pc:sldChg>
-      <pc:sldChg chg="modSp mod ord modNotesTx">
-        <pc:chgData name="Rich Reba" userId="8245d172-5b81-40f1-a13b-b71f02cd6700" providerId="ADAL" clId="{0E19DA16-244C-5B50-BE0F-52911DD4CA7E}" dt="2025-10-26T03:21:46.539" v="5909" actId="20577"/>
-        <pc:sldMkLst>
-          <pc:docMk/>
-          <pc:sldMk cId="3955824805" sldId="418"/>
-        </pc:sldMkLst>
-        <pc:spChg chg="mod">
-          <ac:chgData name="Rich Reba" userId="8245d172-5b81-40f1-a13b-b71f02cd6700" providerId="ADAL" clId="{0E19DA16-244C-5B50-BE0F-52911DD4CA7E}" dt="2025-10-26T03:21:46.539" v="5909" actId="20577"/>
-          <ac:spMkLst>
-            <pc:docMk/>
-            <pc:sldMk cId="3955824805" sldId="418"/>
-            <ac:spMk id="22" creationId="{278CDA1C-9746-8737-E977-E13F1843DD8E}"/>
-          </ac:spMkLst>
-        </pc:spChg>
-      </pc:sldChg>
-      <pc:sldChg chg="modSp mod modNotesTx">
-        <pc:chgData name="Rich Reba" userId="8245d172-5b81-40f1-a13b-b71f02cd6700" providerId="ADAL" clId="{0E19DA16-244C-5B50-BE0F-52911DD4CA7E}" dt="2025-10-26T02:57:08.400" v="5594" actId="20577"/>
-        <pc:sldMkLst>
-          <pc:docMk/>
-          <pc:sldMk cId="1335389885" sldId="419"/>
-        </pc:sldMkLst>
-        <pc:spChg chg="mod">
-          <ac:chgData name="Rich Reba" userId="8245d172-5b81-40f1-a13b-b71f02cd6700" providerId="ADAL" clId="{0E19DA16-244C-5B50-BE0F-52911DD4CA7E}" dt="2025-10-17T21:05:09.577" v="149" actId="20577"/>
-          <ac:spMkLst>
-            <pc:docMk/>
-            <pc:sldMk cId="1335389885" sldId="419"/>
-            <ac:spMk id="7" creationId="{131AFC22-972B-FAE4-6629-D5F70FD66069}"/>
-          </ac:spMkLst>
-        </pc:spChg>
-        <pc:spChg chg="mod">
-          <ac:chgData name="Rich Reba" userId="8245d172-5b81-40f1-a13b-b71f02cd6700" providerId="ADAL" clId="{0E19DA16-244C-5B50-BE0F-52911DD4CA7E}" dt="2025-10-25T22:42:31.336" v="745" actId="14100"/>
-          <ac:spMkLst>
-            <pc:docMk/>
-            <pc:sldMk cId="1335389885" sldId="419"/>
-            <ac:spMk id="24" creationId="{4895E082-C5C9-F20C-887E-4A759FEE16EF}"/>
-          </ac:spMkLst>
-        </pc:spChg>
-      </pc:sldChg>
-      <pc:sldChg chg="addSp delSp modSp mod">
-        <pc:chgData name="Rich Reba" userId="8245d172-5b81-40f1-a13b-b71f02cd6700" providerId="ADAL" clId="{0E19DA16-244C-5B50-BE0F-52911DD4CA7E}" dt="2025-10-26T01:48:38.808" v="2356" actId="22"/>
-        <pc:sldMkLst>
-          <pc:docMk/>
-          <pc:sldMk cId="3537629373" sldId="422"/>
-        </pc:sldMkLst>
-        <pc:spChg chg="mod">
-          <ac:chgData name="Rich Reba" userId="8245d172-5b81-40f1-a13b-b71f02cd6700" providerId="ADAL" clId="{0E19DA16-244C-5B50-BE0F-52911DD4CA7E}" dt="2025-10-25T22:40:41.802" v="728" actId="1076"/>
-          <ac:spMkLst>
-            <pc:docMk/>
-            <pc:sldMk cId="3537629373" sldId="422"/>
-            <ac:spMk id="2" creationId="{77F55E2B-1F9C-81F4-1F77-F211046A93CA}"/>
-          </ac:spMkLst>
-        </pc:spChg>
-        <pc:spChg chg="mod">
-          <ac:chgData name="Rich Reba" userId="8245d172-5b81-40f1-a13b-b71f02cd6700" providerId="ADAL" clId="{0E19DA16-244C-5B50-BE0F-52911DD4CA7E}" dt="2025-10-26T01:24:55.374" v="1093" actId="14100"/>
-          <ac:spMkLst>
-            <pc:docMk/>
-            <pc:sldMk cId="3537629373" sldId="422"/>
-            <ac:spMk id="3" creationId="{55466601-328E-BCC0-4E22-3509C251095A}"/>
-          </ac:spMkLst>
-        </pc:spChg>
-        <pc:spChg chg="mod">
-          <ac:chgData name="Rich Reba" userId="8245d172-5b81-40f1-a13b-b71f02cd6700" providerId="ADAL" clId="{0E19DA16-244C-5B50-BE0F-52911DD4CA7E}" dt="2025-10-25T23:42:57.305" v="931" actId="1037"/>
-          <ac:spMkLst>
-            <pc:docMk/>
-            <pc:sldMk cId="3537629373" sldId="422"/>
-            <ac:spMk id="4" creationId="{93F316F0-5CB0-7C80-93A9-FFC2A3D3B1E1}"/>
-          </ac:spMkLst>
-        </pc:spChg>
-        <pc:spChg chg="mod">
-          <ac:chgData name="Rich Reba" userId="8245d172-5b81-40f1-a13b-b71f02cd6700" providerId="ADAL" clId="{0E19DA16-244C-5B50-BE0F-52911DD4CA7E}" dt="2025-10-26T01:24:10.442" v="1074" actId="14100"/>
-          <ac:spMkLst>
-            <pc:docMk/>
-            <pc:sldMk cId="3537629373" sldId="422"/>
-            <ac:spMk id="6" creationId="{2282B18D-09F7-D5BC-C673-074352DB3C55}"/>
-          </ac:spMkLst>
-        </pc:spChg>
-        <pc:spChg chg="add mod">
-          <ac:chgData name="Rich Reba" userId="8245d172-5b81-40f1-a13b-b71f02cd6700" providerId="ADAL" clId="{0E19DA16-244C-5B50-BE0F-52911DD4CA7E}" dt="2025-10-25T22:40:55.736" v="731" actId="14100"/>
-          <ac:spMkLst>
-            <pc:docMk/>
-            <pc:sldMk cId="3537629373" sldId="422"/>
-            <ac:spMk id="13" creationId="{06AA7B58-F3DE-C974-42F2-B7CAE661FBE9}"/>
-          </ac:spMkLst>
-        </pc:spChg>
-        <pc:spChg chg="add mod">
-          <ac:chgData name="Rich Reba" userId="8245d172-5b81-40f1-a13b-b71f02cd6700" providerId="ADAL" clId="{0E19DA16-244C-5B50-BE0F-52911DD4CA7E}" dt="2025-10-25T22:47:35.100" v="803" actId="1076"/>
-          <ac:spMkLst>
-            <pc:docMk/>
-            <pc:sldMk cId="3537629373" sldId="422"/>
-            <ac:spMk id="15" creationId="{C9941007-7B5F-9E9F-D1CB-17FB39E847F4}"/>
-          </ac:spMkLst>
-        </pc:spChg>
-        <pc:spChg chg="add mod">
-          <ac:chgData name="Rich Reba" userId="8245d172-5b81-40f1-a13b-b71f02cd6700" providerId="ADAL" clId="{0E19DA16-244C-5B50-BE0F-52911DD4CA7E}" dt="2025-10-25T22:48:00.048" v="813" actId="1038"/>
-          <ac:spMkLst>
-            <pc:docMk/>
-            <pc:sldMk cId="3537629373" sldId="422"/>
-            <ac:spMk id="16" creationId="{E00579F9-7F10-1D3A-290F-12DCE6EAB978}"/>
-          </ac:spMkLst>
-        </pc:spChg>
-        <pc:spChg chg="add mod">
-          <ac:chgData name="Rich Reba" userId="8245d172-5b81-40f1-a13b-b71f02cd6700" providerId="ADAL" clId="{0E19DA16-244C-5B50-BE0F-52911DD4CA7E}" dt="2025-10-25T23:42:09.654" v="924" actId="1037"/>
-          <ac:spMkLst>
-            <pc:docMk/>
-            <pc:sldMk cId="3537629373" sldId="422"/>
-            <ac:spMk id="17" creationId="{B03AD813-6EB3-B864-5263-883385DAA6B1}"/>
-          </ac:spMkLst>
-        </pc:spChg>
-        <pc:spChg chg="add mod">
-          <ac:chgData name="Rich Reba" userId="8245d172-5b81-40f1-a13b-b71f02cd6700" providerId="ADAL" clId="{0E19DA16-244C-5B50-BE0F-52911DD4CA7E}" dt="2025-10-25T23:42:09.654" v="924" actId="1037"/>
-          <ac:spMkLst>
-            <pc:docMk/>
-            <pc:sldMk cId="3537629373" sldId="422"/>
-            <ac:spMk id="18" creationId="{404495E4-340C-0E41-B5C6-99066DDE5EA9}"/>
-          </ac:spMkLst>
-        </pc:spChg>
-        <pc:spChg chg="mod">
-          <ac:chgData name="Rich Reba" userId="8245d172-5b81-40f1-a13b-b71f02cd6700" providerId="ADAL" clId="{0E19DA16-244C-5B50-BE0F-52911DD4CA7E}" dt="2025-10-26T01:11:44.527" v="1015" actId="20577"/>
-          <ac:spMkLst>
-            <pc:docMk/>
-            <pc:sldMk cId="3537629373" sldId="422"/>
-            <ac:spMk id="22" creationId="{ACF1CE4D-A8F0-F92F-49C6-774205D87F21}"/>
-          </ac:spMkLst>
-        </pc:spChg>
-        <pc:spChg chg="mod">
-          <ac:chgData name="Rich Reba" userId="8245d172-5b81-40f1-a13b-b71f02cd6700" providerId="ADAL" clId="{0E19DA16-244C-5B50-BE0F-52911DD4CA7E}" dt="2025-10-25T23:42:57.305" v="931" actId="1037"/>
-          <ac:spMkLst>
-            <pc:docMk/>
-            <pc:sldMk cId="3537629373" sldId="422"/>
-            <ac:spMk id="37" creationId="{07EC06D4-B255-8E94-0511-93249EF6D9D7}"/>
-          </ac:spMkLst>
-        </pc:spChg>
-        <pc:spChg chg="mod">
-          <ac:chgData name="Rich Reba" userId="8245d172-5b81-40f1-a13b-b71f02cd6700" providerId="ADAL" clId="{0E19DA16-244C-5B50-BE0F-52911DD4CA7E}" dt="2025-10-25T23:42:57.305" v="931" actId="1037"/>
-          <ac:spMkLst>
-            <pc:docMk/>
-            <pc:sldMk cId="3537629373" sldId="422"/>
-            <ac:spMk id="38" creationId="{FCF52444-0E3F-698B-317C-7E9EB265501A}"/>
-          </ac:spMkLst>
-        </pc:spChg>
-        <pc:spChg chg="mod">
-          <ac:chgData name="Rich Reba" userId="8245d172-5b81-40f1-a13b-b71f02cd6700" providerId="ADAL" clId="{0E19DA16-244C-5B50-BE0F-52911DD4CA7E}" dt="2025-10-25T23:42:57.305" v="931" actId="1037"/>
-          <ac:spMkLst>
-            <pc:docMk/>
-            <pc:sldMk cId="3537629373" sldId="422"/>
-            <ac:spMk id="39" creationId="{D809A082-6917-D3E5-4B6D-C4CF5BEED579}"/>
-          </ac:spMkLst>
-        </pc:spChg>
-        <pc:picChg chg="add mod">
-          <ac:chgData name="Rich Reba" userId="8245d172-5b81-40f1-a13b-b71f02cd6700" providerId="ADAL" clId="{0E19DA16-244C-5B50-BE0F-52911DD4CA7E}" dt="2025-10-25T22:40:41.802" v="728" actId="1076"/>
-          <ac:picMkLst>
-            <pc:docMk/>
-            <pc:sldMk cId="3537629373" sldId="422"/>
-            <ac:picMk id="7" creationId="{C4C071E3-A6CE-3739-FA64-1C35A296729A}"/>
-          </ac:picMkLst>
-        </pc:picChg>
-      </pc:sldChg>
-      <pc:sldChg chg="addSp delSp modSp mod modNotesTx">
-        <pc:chgData name="Rich Reba" userId="8245d172-5b81-40f1-a13b-b71f02cd6700" providerId="ADAL" clId="{0E19DA16-244C-5B50-BE0F-52911DD4CA7E}" dt="2025-10-26T03:29:10.287" v="6078" actId="20577"/>
-        <pc:sldMkLst>
-          <pc:docMk/>
-          <pc:sldMk cId="681584822" sldId="423"/>
-        </pc:sldMkLst>
-        <pc:spChg chg="mod">
-          <ac:chgData name="Rich Reba" userId="8245d172-5b81-40f1-a13b-b71f02cd6700" providerId="ADAL" clId="{0E19DA16-244C-5B50-BE0F-52911DD4CA7E}" dt="2025-10-17T21:04:29.774" v="108" actId="20577"/>
-          <ac:spMkLst>
-            <pc:docMk/>
-            <pc:sldMk cId="681584822" sldId="423"/>
-            <ac:spMk id="12" creationId="{23FF78B6-C76C-BEC1-BDE7-05FC857E92C8}"/>
-          </ac:spMkLst>
-        </pc:spChg>
-        <pc:spChg chg="mod">
-          <ac:chgData name="Rich Reba" userId="8245d172-5b81-40f1-a13b-b71f02cd6700" providerId="ADAL" clId="{0E19DA16-244C-5B50-BE0F-52911DD4CA7E}" dt="2025-10-26T01:25:20.129" v="1107" actId="14100"/>
-          <ac:spMkLst>
-            <pc:docMk/>
-            <pc:sldMk cId="681584822" sldId="423"/>
-            <ac:spMk id="18" creationId="{058FC9B5-79EB-BEF5-E61F-00FC88F2EDD0}"/>
-          </ac:spMkLst>
-        </pc:spChg>
-        <pc:spChg chg="mod">
-          <ac:chgData name="Rich Reba" userId="8245d172-5b81-40f1-a13b-b71f02cd6700" providerId="ADAL" clId="{0E19DA16-244C-5B50-BE0F-52911DD4CA7E}" dt="2025-10-26T01:15:41.537" v="1044" actId="20577"/>
-          <ac:spMkLst>
-            <pc:docMk/>
-            <pc:sldMk cId="681584822" sldId="423"/>
-            <ac:spMk id="22" creationId="{6A3CDC6B-B912-EF1F-0329-087BD8060A7C}"/>
-          </ac:spMkLst>
-        </pc:spChg>
-        <pc:spChg chg="mod">
-          <ac:chgData name="Rich Reba" userId="8245d172-5b81-40f1-a13b-b71f02cd6700" providerId="ADAL" clId="{0E19DA16-244C-5B50-BE0F-52911DD4CA7E}" dt="2025-10-26T01:20:41.936" v="1056" actId="20577"/>
-          <ac:spMkLst>
-            <pc:docMk/>
-            <pc:sldMk cId="681584822" sldId="423"/>
-            <ac:spMk id="23" creationId="{ADAEC1A0-F0F9-276F-4FED-9C588577EA79}"/>
-          </ac:spMkLst>
-        </pc:spChg>
-        <pc:spChg chg="add mod">
-          <ac:chgData name="Rich Reba" userId="8245d172-5b81-40f1-a13b-b71f02cd6700" providerId="ADAL" clId="{0E19DA16-244C-5B50-BE0F-52911DD4CA7E}" dt="2025-10-25T22:41:18.870" v="733"/>
-          <ac:spMkLst>
-            <pc:docMk/>
-            <pc:sldMk cId="681584822" sldId="423"/>
-            <ac:spMk id="27" creationId="{E5AA5939-9FA8-D48C-EDA6-E94679188133}"/>
-          </ac:spMkLst>
-        </pc:spChg>
-        <pc:spChg chg="add mod">
-          <ac:chgData name="Rich Reba" userId="8245d172-5b81-40f1-a13b-b71f02cd6700" providerId="ADAL" clId="{0E19DA16-244C-5B50-BE0F-52911DD4CA7E}" dt="2025-10-25T22:41:18.870" v="733"/>
-          <ac:spMkLst>
-            <pc:docMk/>
-            <pc:sldMk cId="681584822" sldId="423"/>
-            <ac:spMk id="28" creationId="{1A8EE265-8F95-7710-DF9C-104EC71F25ED}"/>
-          </ac:spMkLst>
-        </pc:spChg>
-        <pc:spChg chg="mod">
-          <ac:chgData name="Rich Reba" userId="8245d172-5b81-40f1-a13b-b71f02cd6700" providerId="ADAL" clId="{0E19DA16-244C-5B50-BE0F-52911DD4CA7E}" dt="2025-10-25T22:39:14.080" v="723" actId="14100"/>
-          <ac:spMkLst>
-            <pc:docMk/>
-            <pc:sldMk cId="681584822" sldId="423"/>
-            <ac:spMk id="30" creationId="{8899788A-8883-A8B7-F596-C3D22A193F0F}"/>
-          </ac:spMkLst>
-        </pc:spChg>
-        <pc:spChg chg="add mod">
-          <ac:chgData name="Rich Reba" userId="8245d172-5b81-40f1-a13b-b71f02cd6700" providerId="ADAL" clId="{0E19DA16-244C-5B50-BE0F-52911DD4CA7E}" dt="2025-10-25T22:48:06.156" v="814"/>
-          <ac:spMkLst>
-            <pc:docMk/>
-            <pc:sldMk cId="681584822" sldId="423"/>
-            <ac:spMk id="32" creationId="{B89BDC05-EAEB-87AC-829E-64C314AB16E3}"/>
-          </ac:spMkLst>
-        </pc:spChg>
-        <pc:spChg chg="add mod">
-          <ac:chgData name="Rich Reba" userId="8245d172-5b81-40f1-a13b-b71f02cd6700" providerId="ADAL" clId="{0E19DA16-244C-5B50-BE0F-52911DD4CA7E}" dt="2025-10-25T22:48:06.156" v="814"/>
-          <ac:spMkLst>
-            <pc:docMk/>
-            <pc:sldMk cId="681584822" sldId="423"/>
-            <ac:spMk id="34" creationId="{B03250F0-9A27-0A56-2403-58E565EF2009}"/>
-          </ac:spMkLst>
-        </pc:spChg>
-        <pc:spChg chg="mod">
-          <ac:chgData name="Rich Reba" userId="8245d172-5b81-40f1-a13b-b71f02cd6700" providerId="ADAL" clId="{0E19DA16-244C-5B50-BE0F-52911DD4CA7E}" dt="2025-10-25T22:39:14.080" v="723" actId="14100"/>
-          <ac:spMkLst>
-            <pc:docMk/>
-            <pc:sldMk cId="681584822" sldId="423"/>
-            <ac:spMk id="38" creationId="{1FB13028-69B0-DF1A-AE87-8E36D033DF39}"/>
-          </ac:spMkLst>
-        </pc:spChg>
-        <pc:spChg chg="mod">
-          <ac:chgData name="Rich Reba" userId="8245d172-5b81-40f1-a13b-b71f02cd6700" providerId="ADAL" clId="{0E19DA16-244C-5B50-BE0F-52911DD4CA7E}" dt="2025-10-26T01:20:50.837" v="1060" actId="20577"/>
-          <ac:spMkLst>
-            <pc:docMk/>
-            <pc:sldMk cId="681584822" sldId="423"/>
-            <ac:spMk id="41" creationId="{A605DAAF-0BA9-928A-AF9B-3F6F5FA8B4C7}"/>
-          </ac:spMkLst>
-        </pc:spChg>
-        <pc:spChg chg="mod">
-          <ac:chgData name="Rich Reba" userId="8245d172-5b81-40f1-a13b-b71f02cd6700" providerId="ADAL" clId="{0E19DA16-244C-5B50-BE0F-52911DD4CA7E}" dt="2025-10-25T22:39:14.080" v="723" actId="14100"/>
-          <ac:spMkLst>
-            <pc:docMk/>
-            <pc:sldMk cId="681584822" sldId="423"/>
-            <ac:spMk id="46" creationId="{54BADBF2-8DFF-AB75-1900-0016BE3E8F09}"/>
-          </ac:spMkLst>
-        </pc:spChg>
-        <pc:picChg chg="add mod">
-          <ac:chgData name="Rich Reba" userId="8245d172-5b81-40f1-a13b-b71f02cd6700" providerId="ADAL" clId="{0E19DA16-244C-5B50-BE0F-52911DD4CA7E}" dt="2025-10-25T22:41:18.870" v="733"/>
-          <ac:picMkLst>
-            <pc:docMk/>
-            <pc:sldMk cId="681584822" sldId="423"/>
-            <ac:picMk id="31" creationId="{4D21378A-E96B-2989-4A55-5733557681B5}"/>
-          </ac:picMkLst>
-        </pc:picChg>
-      </pc:sldChg>
-      <pc:sldChg chg="modSp mod modNotesTx">
-        <pc:chgData name="Rich Reba" userId="8245d172-5b81-40f1-a13b-b71f02cd6700" providerId="ADAL" clId="{0E19DA16-244C-5B50-BE0F-52911DD4CA7E}" dt="2025-10-26T02:17:54.563" v="4073" actId="20577"/>
-        <pc:sldMkLst>
-          <pc:docMk/>
-          <pc:sldMk cId="647313039" sldId="424"/>
-        </pc:sldMkLst>
-        <pc:spChg chg="mod">
-          <ac:chgData name="Rich Reba" userId="8245d172-5b81-40f1-a13b-b71f02cd6700" providerId="ADAL" clId="{0E19DA16-244C-5B50-BE0F-52911DD4CA7E}" dt="2025-10-17T21:04:47.860" v="141" actId="20577"/>
-          <ac:spMkLst>
-            <pc:docMk/>
-            <pc:sldMk cId="647313039" sldId="424"/>
-            <ac:spMk id="18" creationId="{90E29748-BCCD-E5CE-357B-5520EDCE566D}"/>
-          </ac:spMkLst>
-        </pc:spChg>
-        <pc:spChg chg="mod">
-          <ac:chgData name="Rich Reba" userId="8245d172-5b81-40f1-a13b-b71f02cd6700" providerId="ADAL" clId="{0E19DA16-244C-5B50-BE0F-52911DD4CA7E}" dt="2025-10-26T01:20:31.723" v="1051" actId="20577"/>
-          <ac:spMkLst>
-            <pc:docMk/>
-            <pc:sldMk cId="647313039" sldId="424"/>
-            <ac:spMk id="32" creationId="{1FCC3672-F296-5367-C617-B1A414BFE3B6}"/>
-          </ac:spMkLst>
-        </pc:spChg>
-        <pc:spChg chg="mod">
-          <ac:chgData name="Rich Reba" userId="8245d172-5b81-40f1-a13b-b71f02cd6700" providerId="ADAL" clId="{0E19DA16-244C-5B50-BE0F-52911DD4CA7E}" dt="2025-10-25T22:41:38.034" v="734" actId="20577"/>
-          <ac:spMkLst>
-            <pc:docMk/>
-            <pc:sldMk cId="647313039" sldId="424"/>
-            <ac:spMk id="37" creationId="{D9C1BC28-356A-7F0D-9596-7CC4021AC545}"/>
-          </ac:spMkLst>
-        </pc:spChg>
-        <pc:spChg chg="mod">
-          <ac:chgData name="Rich Reba" userId="8245d172-5b81-40f1-a13b-b71f02cd6700" providerId="ADAL" clId="{0E19DA16-244C-5B50-BE0F-52911DD4CA7E}" dt="2025-10-25T22:31:36.641" v="562" actId="1037"/>
-          <ac:spMkLst>
-            <pc:docMk/>
-            <pc:sldMk cId="647313039" sldId="424"/>
-            <ac:spMk id="49" creationId="{0A622FE4-6EF2-39B3-A4E3-7A63E9F05E4E}"/>
-          </ac:spMkLst>
-        </pc:spChg>
-      </pc:sldChg>
-      <pc:sldChg chg="addSp delSp modSp mod modNotesTx">
-        <pc:chgData name="Rich Reba" userId="8245d172-5b81-40f1-a13b-b71f02cd6700" providerId="ADAL" clId="{0E19DA16-244C-5B50-BE0F-52911DD4CA7E}" dt="2025-11-05T17:41:52.201" v="6694" actId="166"/>
-        <pc:sldMkLst>
-          <pc:docMk/>
-          <pc:sldMk cId="521678706" sldId="428"/>
-        </pc:sldMkLst>
-        <pc:spChg chg="mod">
-          <ac:chgData name="Rich Reba" userId="8245d172-5b81-40f1-a13b-b71f02cd6700" providerId="ADAL" clId="{0E19DA16-244C-5B50-BE0F-52911DD4CA7E}" dt="2025-10-25T22:40:22.351" v="726" actId="1076"/>
-          <ac:spMkLst>
-            <pc:docMk/>
-            <pc:sldMk cId="521678706" sldId="428"/>
-            <ac:spMk id="2" creationId="{113D85A5-E1E2-3876-B990-05B2FE7F918D}"/>
-          </ac:spMkLst>
-        </pc:spChg>
-        <pc:spChg chg="mod">
-          <ac:chgData name="Rich Reba" userId="8245d172-5b81-40f1-a13b-b71f02cd6700" providerId="ADAL" clId="{0E19DA16-244C-5B50-BE0F-52911DD4CA7E}" dt="2025-10-25T22:40:13.836" v="725" actId="14100"/>
-          <ac:spMkLst>
-            <pc:docMk/>
-            <pc:sldMk cId="521678706" sldId="428"/>
-            <ac:spMk id="81" creationId="{AF186FB3-F308-51BF-505D-1559D6AEDF25}"/>
-          </ac:spMkLst>
-        </pc:spChg>
-        <pc:picChg chg="add mod">
-          <ac:chgData name="Rich Reba" userId="8245d172-5b81-40f1-a13b-b71f02cd6700" providerId="ADAL" clId="{0E19DA16-244C-5B50-BE0F-52911DD4CA7E}" dt="2025-10-25T22:40:22.351" v="726" actId="1076"/>
-          <ac:picMkLst>
-            <pc:docMk/>
-            <pc:sldMk cId="521678706" sldId="428"/>
-            <ac:picMk id="4" creationId="{D22CFCA3-A334-83FA-FA8E-5579AA521B6B}"/>
-          </ac:picMkLst>
-        </pc:picChg>
-        <pc:picChg chg="add mod">
-          <ac:chgData name="Rich Reba" userId="8245d172-5b81-40f1-a13b-b71f02cd6700" providerId="ADAL" clId="{0E19DA16-244C-5B50-BE0F-52911DD4CA7E}" dt="2025-11-05T17:41:52.201" v="6694" actId="166"/>
-          <ac:picMkLst>
-            <pc:docMk/>
-            <pc:sldMk cId="521678706" sldId="428"/>
-            <ac:picMk id="16" creationId="{07DF95C1-8EC8-186E-0E76-EDC06B98F951}"/>
-          </ac:picMkLst>
-        </pc:picChg>
-        <pc:picChg chg="add mod">
-          <ac:chgData name="Rich Reba" userId="8245d172-5b81-40f1-a13b-b71f02cd6700" providerId="ADAL" clId="{0E19DA16-244C-5B50-BE0F-52911DD4CA7E}" dt="2025-11-05T17:41:46.824" v="6693"/>
-          <ac:picMkLst>
-            <pc:docMk/>
-            <pc:sldMk cId="521678706" sldId="428"/>
-            <ac:picMk id="18" creationId="{7860395F-E7D3-2302-21CA-18368B907DEA}"/>
-          </ac:picMkLst>
-        </pc:picChg>
-      </pc:sldChg>
-      <pc:sldChg chg="addSp delSp modSp add mod modNotesTx">
-        <pc:chgData name="Rich Reba" userId="8245d172-5b81-40f1-a13b-b71f02cd6700" providerId="ADAL" clId="{0E19DA16-244C-5B50-BE0F-52911DD4CA7E}" dt="2025-10-26T02:03:29.490" v="3007" actId="20577"/>
-        <pc:sldMkLst>
-          <pc:docMk/>
-          <pc:sldMk cId="1588215340" sldId="429"/>
-        </pc:sldMkLst>
-        <pc:spChg chg="add mod">
-          <ac:chgData name="Rich Reba" userId="8245d172-5b81-40f1-a13b-b71f02cd6700" providerId="ADAL" clId="{0E19DA16-244C-5B50-BE0F-52911DD4CA7E}" dt="2025-10-25T23:09:16.708" v="892" actId="113"/>
-          <ac:spMkLst>
-            <pc:docMk/>
-            <pc:sldMk cId="1588215340" sldId="429"/>
-            <ac:spMk id="2" creationId="{588C4B19-0952-AE5B-82AE-B331913C849B}"/>
-          </ac:spMkLst>
-        </pc:spChg>
-        <pc:spChg chg="add mod">
-          <ac:chgData name="Rich Reba" userId="8245d172-5b81-40f1-a13b-b71f02cd6700" providerId="ADAL" clId="{0E19DA16-244C-5B50-BE0F-52911DD4CA7E}" dt="2025-10-25T23:09:16.708" v="892" actId="113"/>
-          <ac:spMkLst>
-            <pc:docMk/>
-            <pc:sldMk cId="1588215340" sldId="429"/>
-            <ac:spMk id="3" creationId="{14EE40AE-CC93-DEB5-4744-F5B1E613A92B}"/>
-          </ac:spMkLst>
-        </pc:spChg>
-        <pc:spChg chg="add mod">
-          <ac:chgData name="Rich Reba" userId="8245d172-5b81-40f1-a13b-b71f02cd6700" providerId="ADAL" clId="{0E19DA16-244C-5B50-BE0F-52911DD4CA7E}" dt="2025-10-25T23:09:16.708" v="892" actId="113"/>
-          <ac:spMkLst>
-            <pc:docMk/>
-            <pc:sldMk cId="1588215340" sldId="429"/>
-            <ac:spMk id="4" creationId="{156E9716-29D3-F8E9-0ED9-5C8A1F6A0B80}"/>
-          </ac:spMkLst>
-        </pc:spChg>
-        <pc:spChg chg="add mod">
-          <ac:chgData name="Rich Reba" userId="8245d172-5b81-40f1-a13b-b71f02cd6700" providerId="ADAL" clId="{0E19DA16-244C-5B50-BE0F-52911DD4CA7E}" dt="2025-10-26T01:33:21.840" v="1197" actId="1076"/>
-          <ac:spMkLst>
-            <pc:docMk/>
-            <pc:sldMk cId="1588215340" sldId="429"/>
-            <ac:spMk id="7" creationId="{1C992BA6-8C0E-AA08-1282-E4537B328E65}"/>
-          </ac:spMkLst>
-        </pc:spChg>
-        <pc:spChg chg="add mod">
-          <ac:chgData name="Rich Reba" userId="8245d172-5b81-40f1-a13b-b71f02cd6700" providerId="ADAL" clId="{0E19DA16-244C-5B50-BE0F-52911DD4CA7E}" dt="2025-10-26T01:33:25.363" v="1198" actId="1076"/>
-          <ac:spMkLst>
-            <pc:docMk/>
-            <pc:sldMk cId="1588215340" sldId="429"/>
-            <ac:spMk id="9" creationId="{43799693-E480-E40E-D9BE-4CF8674A1C32}"/>
-          </ac:spMkLst>
-        </pc:spChg>
-        <pc:picChg chg="mod">
-          <ac:chgData name="Rich Reba" userId="8245d172-5b81-40f1-a13b-b71f02cd6700" providerId="ADAL" clId="{0E19DA16-244C-5B50-BE0F-52911DD4CA7E}" dt="2025-10-17T21:32:37.680" v="169" actId="1035"/>
-          <ac:picMkLst>
-            <pc:docMk/>
-            <pc:sldMk cId="1588215340" sldId="429"/>
-            <ac:picMk id="6" creationId="{32D25D34-D881-F4BE-DBB8-9B4E77AB3AFA}"/>
-          </ac:picMkLst>
-        </pc:picChg>
-        <pc:picChg chg="mod">
-          <ac:chgData name="Rich Reba" userId="8245d172-5b81-40f1-a13b-b71f02cd6700" providerId="ADAL" clId="{0E19DA16-244C-5B50-BE0F-52911DD4CA7E}" dt="2025-10-17T20:55:24.474" v="29" actId="1076"/>
-          <ac:picMkLst>
-            <pc:docMk/>
-            <pc:sldMk cId="1588215340" sldId="429"/>
-            <ac:picMk id="1026" creationId="{C5684B70-12FF-20FD-0C08-2DBB1D9DB348}"/>
-          </ac:picMkLst>
-        </pc:picChg>
-      </pc:sldChg>
-      <pc:sldChg chg="addSp delSp modSp add mod modNotesTx">
-        <pc:chgData name="Rich Reba" userId="8245d172-5b81-40f1-a13b-b71f02cd6700" providerId="ADAL" clId="{0E19DA16-244C-5B50-BE0F-52911DD4CA7E}" dt="2025-10-28T16:46:26.179" v="6676" actId="20577"/>
-        <pc:sldMkLst>
-          <pc:docMk/>
-          <pc:sldMk cId="1078706708" sldId="431"/>
-        </pc:sldMkLst>
-        <pc:spChg chg="mod">
-          <ac:chgData name="Rich Reba" userId="8245d172-5b81-40f1-a13b-b71f02cd6700" providerId="ADAL" clId="{0E19DA16-244C-5B50-BE0F-52911DD4CA7E}" dt="2025-10-25T22:59:54.464" v="854" actId="167"/>
-          <ac:spMkLst>
-            <pc:docMk/>
-            <pc:sldMk cId="1078706708" sldId="431"/>
-            <ac:spMk id="2" creationId="{8699CE88-A099-589B-765C-F0F2D06A291D}"/>
-          </ac:spMkLst>
-        </pc:spChg>
-        <pc:spChg chg="mod">
-          <ac:chgData name="Rich Reba" userId="8245d172-5b81-40f1-a13b-b71f02cd6700" providerId="ADAL" clId="{0E19DA16-244C-5B50-BE0F-52911DD4CA7E}" dt="2025-10-25T23:01:13.972" v="857" actId="1037"/>
-          <ac:spMkLst>
-            <pc:docMk/>
-            <pc:sldMk cId="1078706708" sldId="431"/>
-            <ac:spMk id="3" creationId="{1CE07D49-82AC-3A57-7945-2B6E9535879B}"/>
-          </ac:spMkLst>
-        </pc:spChg>
-        <pc:spChg chg="add mod">
-          <ac:chgData name="Rich Reba" userId="8245d172-5b81-40f1-a13b-b71f02cd6700" providerId="ADAL" clId="{0E19DA16-244C-5B50-BE0F-52911DD4CA7E}" dt="2025-10-25T22:58:48.887" v="849" actId="14100"/>
-          <ac:spMkLst>
-            <pc:docMk/>
-            <pc:sldMk cId="1078706708" sldId="431"/>
-            <ac:spMk id="5" creationId="{B3C265B6-6A1E-E4AF-3133-B1E453F35619}"/>
-          </ac:spMkLst>
-        </pc:spChg>
-        <pc:spChg chg="add mod">
-          <ac:chgData name="Rich Reba" userId="8245d172-5b81-40f1-a13b-b71f02cd6700" providerId="ADAL" clId="{0E19DA16-244C-5B50-BE0F-52911DD4CA7E}" dt="2025-10-25T22:59:54.464" v="854" actId="167"/>
-          <ac:spMkLst>
-            <pc:docMk/>
-            <pc:sldMk cId="1078706708" sldId="431"/>
-            <ac:spMk id="6" creationId="{3D906D2C-0F52-7E44-3BB0-A79BF1497A9D}"/>
-          </ac:spMkLst>
-        </pc:spChg>
-        <pc:spChg chg="add mod">
-          <ac:chgData name="Rich Reba" userId="8245d172-5b81-40f1-a13b-b71f02cd6700" providerId="ADAL" clId="{0E19DA16-244C-5B50-BE0F-52911DD4CA7E}" dt="2025-10-25T23:01:17.402" v="858" actId="1038"/>
-          <ac:spMkLst>
-            <pc:docMk/>
-            <pc:sldMk cId="1078706708" sldId="431"/>
-            <ac:spMk id="8" creationId="{6692CFF7-98E5-C894-5367-0472DF0C75A2}"/>
-          </ac:spMkLst>
-        </pc:spChg>
-        <pc:spChg chg="mod">
-          <ac:chgData name="Rich Reba" userId="8245d172-5b81-40f1-a13b-b71f02cd6700" providerId="ADAL" clId="{0E19DA16-244C-5B50-BE0F-52911DD4CA7E}" dt="2025-10-25T23:00:53.428" v="856" actId="166"/>
-          <ac:spMkLst>
-            <pc:docMk/>
-            <pc:sldMk cId="1078706708" sldId="431"/>
-            <ac:spMk id="9" creationId="{BE403CAF-C1E8-2238-290C-2EC232FEB7F4}"/>
-          </ac:spMkLst>
-        </pc:spChg>
-        <pc:spChg chg="mod">
-          <ac:chgData name="Rich Reba" userId="8245d172-5b81-40f1-a13b-b71f02cd6700" providerId="ADAL" clId="{0E19DA16-244C-5B50-BE0F-52911DD4CA7E}" dt="2025-10-25T23:00:53.428" v="856" actId="166"/>
-          <ac:spMkLst>
-            <pc:docMk/>
-            <pc:sldMk cId="1078706708" sldId="431"/>
-            <ac:spMk id="16" creationId="{50F6D062-3F63-05EE-CBC9-C37A687134AB}"/>
-          </ac:spMkLst>
-        </pc:spChg>
-        <pc:spChg chg="mod">
-          <ac:chgData name="Rich Reba" userId="8245d172-5b81-40f1-a13b-b71f02cd6700" providerId="ADAL" clId="{0E19DA16-244C-5B50-BE0F-52911DD4CA7E}" dt="2025-10-25T23:00:53.428" v="856" actId="166"/>
-          <ac:spMkLst>
-            <pc:docMk/>
-            <pc:sldMk cId="1078706708" sldId="431"/>
-            <ac:spMk id="21" creationId="{9B503109-8A9A-A4E9-F45B-5DB4B0A52761}"/>
-          </ac:spMkLst>
-        </pc:spChg>
-        <pc:spChg chg="mod">
-          <ac:chgData name="Rich Reba" userId="8245d172-5b81-40f1-a13b-b71f02cd6700" providerId="ADAL" clId="{0E19DA16-244C-5B50-BE0F-52911DD4CA7E}" dt="2025-10-26T01:15:51.049" v="1045"/>
-          <ac:spMkLst>
-            <pc:docMk/>
-            <pc:sldMk cId="1078706708" sldId="431"/>
-            <ac:spMk id="22" creationId="{4E21711C-E169-1371-36F5-F7F6D0D31CC0}"/>
-          </ac:spMkLst>
-        </pc:spChg>
-        <pc:spChg chg="mod">
-          <ac:chgData name="Rich Reba" userId="8245d172-5b81-40f1-a13b-b71f02cd6700" providerId="ADAL" clId="{0E19DA16-244C-5B50-BE0F-52911DD4CA7E}" dt="2025-10-25T23:01:13.972" v="857" actId="1037"/>
-          <ac:spMkLst>
-            <pc:docMk/>
-            <pc:sldMk cId="1078706708" sldId="431"/>
-            <ac:spMk id="23" creationId="{98DF3116-47A2-DABF-B1CD-0EAE4A9F19A3}"/>
-          </ac:spMkLst>
-        </pc:spChg>
-        <pc:spChg chg="mod">
-          <ac:chgData name="Rich Reba" userId="8245d172-5b81-40f1-a13b-b71f02cd6700" providerId="ADAL" clId="{0E19DA16-244C-5B50-BE0F-52911DD4CA7E}" dt="2025-10-25T23:01:17.402" v="858" actId="1038"/>
-          <ac:spMkLst>
-            <pc:docMk/>
-            <pc:sldMk cId="1078706708" sldId="431"/>
-            <ac:spMk id="25" creationId="{3B6E3BA0-6F49-AEB5-4061-C6D0AE3B34A8}"/>
-          </ac:spMkLst>
-        </pc:spChg>
-        <pc:spChg chg="mod">
-          <ac:chgData name="Rich Reba" userId="8245d172-5b81-40f1-a13b-b71f02cd6700" providerId="ADAL" clId="{0E19DA16-244C-5B50-BE0F-52911DD4CA7E}" dt="2025-10-25T23:00:53.428" v="856" actId="166"/>
-          <ac:spMkLst>
-            <pc:docMk/>
-            <pc:sldMk cId="1078706708" sldId="431"/>
-            <ac:spMk id="35" creationId="{5197BAC8-7C60-DD6D-5A88-4DC44D71772E}"/>
-          </ac:spMkLst>
-        </pc:spChg>
-        <pc:spChg chg="mod">
-          <ac:chgData name="Rich Reba" userId="8245d172-5b81-40f1-a13b-b71f02cd6700" providerId="ADAL" clId="{0E19DA16-244C-5B50-BE0F-52911DD4CA7E}" dt="2025-10-25T23:00:53.428" v="856" actId="166"/>
-          <ac:spMkLst>
-            <pc:docMk/>
-            <pc:sldMk cId="1078706708" sldId="431"/>
-            <ac:spMk id="54" creationId="{F977DF87-9F47-C143-347B-959B20C69BBF}"/>
-          </ac:spMkLst>
-        </pc:spChg>
-        <pc:spChg chg="mod">
-          <ac:chgData name="Rich Reba" userId="8245d172-5b81-40f1-a13b-b71f02cd6700" providerId="ADAL" clId="{0E19DA16-244C-5B50-BE0F-52911DD4CA7E}" dt="2025-10-25T23:00:53.428" v="856" actId="166"/>
-          <ac:spMkLst>
-            <pc:docMk/>
-            <pc:sldMk cId="1078706708" sldId="431"/>
-            <ac:spMk id="56" creationId="{83D44BC4-3BA7-CD3F-55FD-63AC0D43D60C}"/>
-          </ac:spMkLst>
-        </pc:spChg>
-        <pc:spChg chg="mod">
-          <ac:chgData name="Rich Reba" userId="8245d172-5b81-40f1-a13b-b71f02cd6700" providerId="ADAL" clId="{0E19DA16-244C-5B50-BE0F-52911DD4CA7E}" dt="2025-10-25T23:00:53.428" v="856" actId="166"/>
-          <ac:spMkLst>
-            <pc:docMk/>
-            <pc:sldMk cId="1078706708" sldId="431"/>
-            <ac:spMk id="57" creationId="{5D01C9F4-6A5D-285C-4B5C-A86D5DB92E8D}"/>
-          </ac:spMkLst>
-        </pc:spChg>
-        <pc:spChg chg="mod">
-          <ac:chgData name="Rich Reba" userId="8245d172-5b81-40f1-a13b-b71f02cd6700" providerId="ADAL" clId="{0E19DA16-244C-5B50-BE0F-52911DD4CA7E}" dt="2025-10-25T23:00:53.428" v="856" actId="166"/>
-          <ac:spMkLst>
-            <pc:docMk/>
-            <pc:sldMk cId="1078706708" sldId="431"/>
-            <ac:spMk id="58" creationId="{E84227A3-EED0-2DCF-7CD3-9202D60DC197}"/>
-          </ac:spMkLst>
-        </pc:spChg>
-        <pc:picChg chg="add mod">
-          <ac:chgData name="Rich Reba" userId="8245d172-5b81-40f1-a13b-b71f02cd6700" providerId="ADAL" clId="{0E19DA16-244C-5B50-BE0F-52911DD4CA7E}" dt="2025-10-25T23:00:04.619" v="855" actId="167"/>
-          <ac:picMkLst>
-            <pc:docMk/>
-            <pc:sldMk cId="1078706708" sldId="431"/>
-            <ac:picMk id="7" creationId="{F8FC10FC-4B78-8729-4C3D-3907B93FAFD3}"/>
-          </ac:picMkLst>
-        </pc:picChg>
-      </pc:sldChg>
-      <pc:sldChg chg="addSp delSp modSp add mod modNotesTx">
-        <pc:chgData name="Rich Reba" userId="8245d172-5b81-40f1-a13b-b71f02cd6700" providerId="ADAL" clId="{0E19DA16-244C-5B50-BE0F-52911DD4CA7E}" dt="2025-11-07T21:14:54.602" v="7155" actId="20577"/>
-        <pc:sldMkLst>
-          <pc:docMk/>
-          <pc:sldMk cId="2186535311" sldId="432"/>
-        </pc:sldMkLst>
-        <pc:picChg chg="add mod">
-          <ac:chgData name="Rich Reba" userId="8245d172-5b81-40f1-a13b-b71f02cd6700" providerId="ADAL" clId="{0E19DA16-244C-5B50-BE0F-52911DD4CA7E}" dt="2025-10-25T23:06:49.534" v="870" actId="1076"/>
-          <ac:picMkLst>
-            <pc:docMk/>
-            <pc:sldMk cId="2186535311" sldId="432"/>
-            <ac:picMk id="2" creationId="{5963BB86-EDFF-F012-7107-D715A7BAABC3}"/>
-          </ac:picMkLst>
-        </pc:picChg>
-        <pc:picChg chg="mod">
-          <ac:chgData name="Rich Reba" userId="8245d172-5b81-40f1-a13b-b71f02cd6700" providerId="ADAL" clId="{0E19DA16-244C-5B50-BE0F-52911DD4CA7E}" dt="2025-10-25T23:06:44.868" v="869" actId="14100"/>
-          <ac:picMkLst>
-            <pc:docMk/>
-            <pc:sldMk cId="2186535311" sldId="432"/>
-            <ac:picMk id="6" creationId="{AC044A8F-7D1B-924F-0693-7A1164003AFA}"/>
-          </ac:picMkLst>
-        </pc:picChg>
-      </pc:sldChg>
-      <pc:sldChg chg="addSp delSp modSp add mod modNotesTx">
-        <pc:chgData name="Rich Reba" userId="8245d172-5b81-40f1-a13b-b71f02cd6700" providerId="ADAL" clId="{0E19DA16-244C-5B50-BE0F-52911DD4CA7E}" dt="2025-11-05T17:42:11.086" v="6696"/>
-        <pc:sldMkLst>
-          <pc:docMk/>
-          <pc:sldMk cId="3013373299" sldId="433"/>
-        </pc:sldMkLst>
-        <pc:spChg chg="mod">
-          <ac:chgData name="Rich Reba" userId="8245d172-5b81-40f1-a13b-b71f02cd6700" providerId="ADAL" clId="{0E19DA16-244C-5B50-BE0F-52911DD4CA7E}" dt="2025-10-26T01:14:20.076" v="1022" actId="1076"/>
-          <ac:spMkLst>
-            <pc:docMk/>
-            <pc:sldMk cId="3013373299" sldId="433"/>
-            <ac:spMk id="4" creationId="{9E98CE80-F170-8D1D-2D02-499B56F03AB3}"/>
-          </ac:spMkLst>
-        </pc:spChg>
-        <pc:spChg chg="mod">
-          <ac:chgData name="Rich Reba" userId="8245d172-5b81-40f1-a13b-b71f02cd6700" providerId="ADAL" clId="{0E19DA16-244C-5B50-BE0F-52911DD4CA7E}" dt="2025-10-26T01:13:45.841" v="1018" actId="1076"/>
-          <ac:spMkLst>
-            <pc:docMk/>
-            <pc:sldMk cId="3013373299" sldId="433"/>
-            <ac:spMk id="5" creationId="{10530B86-1FA2-605D-0152-CC780DCE164D}"/>
-          </ac:spMkLst>
-        </pc:spChg>
-        <pc:spChg chg="mod">
-          <ac:chgData name="Rich Reba" userId="8245d172-5b81-40f1-a13b-b71f02cd6700" providerId="ADAL" clId="{0E19DA16-244C-5B50-BE0F-52911DD4CA7E}" dt="2025-10-26T01:13:45.841" v="1018" actId="1076"/>
-          <ac:spMkLst>
-            <pc:docMk/>
-            <pc:sldMk cId="3013373299" sldId="433"/>
-            <ac:spMk id="6" creationId="{C546FCEF-B520-A425-0EA6-262B3C49CC83}"/>
-          </ac:spMkLst>
-        </pc:spChg>
-        <pc:spChg chg="mod">
-          <ac:chgData name="Rich Reba" userId="8245d172-5b81-40f1-a13b-b71f02cd6700" providerId="ADAL" clId="{0E19DA16-244C-5B50-BE0F-52911DD4CA7E}" dt="2025-10-26T01:14:20.076" v="1022" actId="1076"/>
-          <ac:spMkLst>
-            <pc:docMk/>
-            <pc:sldMk cId="3013373299" sldId="433"/>
-            <ac:spMk id="37" creationId="{10D79E4F-A60F-415F-E28D-3AAA0AD5AE66}"/>
-          </ac:spMkLst>
-        </pc:spChg>
-        <pc:spChg chg="mod">
-          <ac:chgData name="Rich Reba" userId="8245d172-5b81-40f1-a13b-b71f02cd6700" providerId="ADAL" clId="{0E19DA16-244C-5B50-BE0F-52911DD4CA7E}" dt="2025-10-26T01:14:20.076" v="1022" actId="1076"/>
-          <ac:spMkLst>
-            <pc:docMk/>
-            <pc:sldMk cId="3013373299" sldId="433"/>
-            <ac:spMk id="38" creationId="{52E5C62B-1E1E-B686-9189-6FE808886219}"/>
-          </ac:spMkLst>
-        </pc:spChg>
-        <pc:spChg chg="mod">
-          <ac:chgData name="Rich Reba" userId="8245d172-5b81-40f1-a13b-b71f02cd6700" providerId="ADAL" clId="{0E19DA16-244C-5B50-BE0F-52911DD4CA7E}" dt="2025-10-26T01:14:20.076" v="1022" actId="1076"/>
-          <ac:spMkLst>
-            <pc:docMk/>
-            <pc:sldMk cId="3013373299" sldId="433"/>
-            <ac:spMk id="39" creationId="{D21D8D6D-CE0C-EE0C-7341-19929B87BCB6}"/>
-          </ac:spMkLst>
-        </pc:spChg>
-        <pc:picChg chg="add mod">
-          <ac:chgData name="Rich Reba" userId="8245d172-5b81-40f1-a13b-b71f02cd6700" providerId="ADAL" clId="{0E19DA16-244C-5B50-BE0F-52911DD4CA7E}" dt="2025-11-05T17:42:11.086" v="6696"/>
-          <ac:picMkLst>
-            <pc:docMk/>
-            <pc:sldMk cId="3013373299" sldId="433"/>
-            <ac:picMk id="14" creationId="{B8254B0F-DE95-89AF-B9E2-B719F31C54FB}"/>
-          </ac:picMkLst>
-        </pc:picChg>
-      </pc:sldChg>
-      <pc:sldChg chg="addSp delSp modSp add mod modNotesTx">
-        <pc:chgData name="Rich Reba" userId="8245d172-5b81-40f1-a13b-b71f02cd6700" providerId="ADAL" clId="{0E19DA16-244C-5B50-BE0F-52911DD4CA7E}" dt="2025-11-07T21:07:44.245" v="7073" actId="20577"/>
+      <pc:sldChg chg="delSp mod">
+        <pc:chgData name="Rich Reba" userId="55db41ab6eb3f845" providerId="LiveId" clId="{0E19DA16-244C-5B50-BE0F-52911DD4CA7E}" dt="2026-08-05T20:16:55.074" v="1" actId="478"/>
         <pc:sldMkLst>
           <pc:docMk/>
           <pc:sldMk cId="756971190" sldId="434"/>
         </pc:sldMkLst>
-        <pc:spChg chg="add mod">
-          <ac:chgData name="Rich Reba" userId="8245d172-5b81-40f1-a13b-b71f02cd6700" providerId="ADAL" clId="{0E19DA16-244C-5B50-BE0F-52911DD4CA7E}" dt="2025-11-05T18:13:11.826" v="6726" actId="1076"/>
+        <pc:spChg chg="del">
+          <ac:chgData name="Rich Reba" userId="55db41ab6eb3f845" providerId="LiveId" clId="{0E19DA16-244C-5B50-BE0F-52911DD4CA7E}" dt="2026-08-05T20:16:55.074" v="1" actId="478"/>
           <ac:spMkLst>
             <pc:docMk/>
             <pc:sldMk cId="756971190" sldId="434"/>
-            <ac:spMk id="5" creationId="{44C8FCA5-D722-4CAB-9ED4-9A53DFAFDA88}"/>
+            <ac:spMk id="2" creationId="{C9FBF93F-D84F-C8FE-0DF9-0956282C6C60}"/>
           </ac:spMkLst>
         </pc:spChg>
-        <pc:spChg chg="add mod">
-          <ac:chgData name="Rich Reba" userId="8245d172-5b81-40f1-a13b-b71f02cd6700" providerId="ADAL" clId="{0E19DA16-244C-5B50-BE0F-52911DD4CA7E}" dt="2025-11-05T18:14:36.676" v="6748" actId="1076"/>
-          <ac:spMkLst>
-            <pc:docMk/>
-            <pc:sldMk cId="756971190" sldId="434"/>
-            <ac:spMk id="7" creationId="{0F8B3289-5208-EA69-CB3F-21BA9C314877}"/>
-          </ac:spMkLst>
-        </pc:spChg>
-        <pc:spChg chg="add mod">
-          <ac:chgData name="Rich Reba" userId="8245d172-5b81-40f1-a13b-b71f02cd6700" providerId="ADAL" clId="{0E19DA16-244C-5B50-BE0F-52911DD4CA7E}" dt="2025-11-05T18:13:24.670" v="6730" actId="20577"/>
-          <ac:spMkLst>
-            <pc:docMk/>
-            <pc:sldMk cId="756971190" sldId="434"/>
-            <ac:spMk id="8" creationId="{DB2CF90E-C5F9-BB06-AE31-1EE850F93F72}"/>
-          </ac:spMkLst>
-        </pc:spChg>
-        <pc:spChg chg="add mod">
-          <ac:chgData name="Rich Reba" userId="8245d172-5b81-40f1-a13b-b71f02cd6700" providerId="ADAL" clId="{0E19DA16-244C-5B50-BE0F-52911DD4CA7E}" dt="2025-11-05T18:13:36.246" v="6733" actId="571"/>
-          <ac:spMkLst>
-            <pc:docMk/>
-            <pc:sldMk cId="756971190" sldId="434"/>
-            <ac:spMk id="9" creationId="{A6E31DEB-ACCF-D456-4997-60185675AB86}"/>
-          </ac:spMkLst>
-        </pc:spChg>
-        <pc:spChg chg="add mod">
-          <ac:chgData name="Rich Reba" userId="8245d172-5b81-40f1-a13b-b71f02cd6700" providerId="ADAL" clId="{0E19DA16-244C-5B50-BE0F-52911DD4CA7E}" dt="2025-11-05T18:13:44.080" v="6734" actId="571"/>
-          <ac:spMkLst>
-            <pc:docMk/>
-            <pc:sldMk cId="756971190" sldId="434"/>
-            <ac:spMk id="10" creationId="{759B8880-FD3E-750B-DFBF-E99DA0B85B0C}"/>
-          </ac:spMkLst>
-        </pc:spChg>
-        <pc:spChg chg="add mod">
-          <ac:chgData name="Rich Reba" userId="8245d172-5b81-40f1-a13b-b71f02cd6700" providerId="ADAL" clId="{0E19DA16-244C-5B50-BE0F-52911DD4CA7E}" dt="2025-11-05T18:13:52.517" v="6737" actId="1036"/>
-          <ac:spMkLst>
-            <pc:docMk/>
-            <pc:sldMk cId="756971190" sldId="434"/>
-            <ac:spMk id="12" creationId="{69A28434-139A-1AF8-B9A4-8159F4B75E74}"/>
-          </ac:spMkLst>
-        </pc:spChg>
-        <pc:spChg chg="add mod">
-          <ac:chgData name="Rich Reba" userId="8245d172-5b81-40f1-a13b-b71f02cd6700" providerId="ADAL" clId="{0E19DA16-244C-5B50-BE0F-52911DD4CA7E}" dt="2025-11-05T18:14:04.130" v="6738" actId="571"/>
-          <ac:spMkLst>
-            <pc:docMk/>
-            <pc:sldMk cId="756971190" sldId="434"/>
-            <ac:spMk id="21" creationId="{D85BF41E-EA5E-9CA3-CB6D-4D9072398B11}"/>
-          </ac:spMkLst>
-        </pc:spChg>
-        <pc:spChg chg="add mod">
-          <ac:chgData name="Rich Reba" userId="8245d172-5b81-40f1-a13b-b71f02cd6700" providerId="ADAL" clId="{0E19DA16-244C-5B50-BE0F-52911DD4CA7E}" dt="2025-11-05T18:14:12.421" v="6747" actId="1035"/>
-          <ac:spMkLst>
-            <pc:docMk/>
-            <pc:sldMk cId="756971190" sldId="434"/>
-            <ac:spMk id="22" creationId="{152C7EE3-D928-FD46-88D3-1A82CD25ED9A}"/>
-          </ac:spMkLst>
-        </pc:spChg>
-        <pc:picChg chg="add mod">
-          <ac:chgData name="Rich Reba" userId="8245d172-5b81-40f1-a13b-b71f02cd6700" providerId="ADAL" clId="{0E19DA16-244C-5B50-BE0F-52911DD4CA7E}" dt="2025-11-05T17:49:47.564" v="6708" actId="1076"/>
-          <ac:picMkLst>
-            <pc:docMk/>
-            <pc:sldMk cId="756971190" sldId="434"/>
-            <ac:picMk id="3" creationId="{0C0E4735-4211-31FF-5E41-3897D80F51EF}"/>
-          </ac:picMkLst>
-        </pc:picChg>
-        <pc:picChg chg="add mod">
-          <ac:chgData name="Rich Reba" userId="8245d172-5b81-40f1-a13b-b71f02cd6700" providerId="ADAL" clId="{0E19DA16-244C-5B50-BE0F-52911DD4CA7E}" dt="2025-11-05T18:12:39.575" v="6719" actId="1076"/>
-          <ac:picMkLst>
-            <pc:docMk/>
-            <pc:sldMk cId="756971190" sldId="434"/>
-            <ac:picMk id="4" creationId="{6D5FB49C-D5D5-92ED-BBB6-19FEA9DFB86C}"/>
-          </ac:picMkLst>
-        </pc:picChg>
-        <pc:picChg chg="add mod">
-          <ac:chgData name="Rich Reba" userId="8245d172-5b81-40f1-a13b-b71f02cd6700" providerId="ADAL" clId="{0E19DA16-244C-5B50-BE0F-52911DD4CA7E}" dt="2025-11-05T17:47:52.248" v="6702" actId="1076"/>
-          <ac:picMkLst>
-            <pc:docMk/>
-            <pc:sldMk cId="756971190" sldId="434"/>
-            <ac:picMk id="1026" creationId="{D037EDA1-BA56-4BF6-A7CF-3795E74F0300}"/>
-          </ac:picMkLst>
-        </pc:picChg>
-        <pc:picChg chg="add mod">
-          <ac:chgData name="Rich Reba" userId="8245d172-5b81-40f1-a13b-b71f02cd6700" providerId="ADAL" clId="{0E19DA16-244C-5B50-BE0F-52911DD4CA7E}" dt="2025-11-05T18:12:39.575" v="6719" actId="1076"/>
-          <ac:picMkLst>
-            <pc:docMk/>
-            <pc:sldMk cId="756971190" sldId="434"/>
-            <ac:picMk id="1028" creationId="{57EAEE5E-6DC0-F9E0-6A5D-0C0D54E6F938}"/>
-          </ac:picMkLst>
-        </pc:picChg>
       </pc:sldChg>
     </pc:docChg>
   </pc:docChgLst>
@@ -5731,7 +4803,7 @@
           <a:p>
             <a:fld id="{9DC09AF2-51A2-8243-A29F-680495D2BD2C}" type="datetimeFigureOut">
               <a:rPr lang="en-US" smtClean="0"/>
-              <a:t>11/12/25</a:t>
+              <a:t>8/5/26</a:t>
             </a:fld>
             <a:endParaRPr lang="en-US"/>
           </a:p>
@@ -32002,149 +31074,6 @@
       </p:sp>
       <p:sp>
         <p:nvSpPr>
-          <p:cNvPr id="2" name="Google Shape;18;p9">
-            <a:extLst>
-              <a:ext uri="{FF2B5EF4-FFF2-40B4-BE49-F238E27FC236}">
-                <a16:creationId xmlns:a16="http://schemas.microsoft.com/office/drawing/2014/main" id="{CD994921-CA85-D524-D4AC-39A78EB65DD8}"/>
-              </a:ext>
-            </a:extLst>
-          </p:cNvPr>
-          <p:cNvSpPr txBox="1">
-            <a:spLocks noGrp="1"/>
-          </p:cNvSpPr>
-          <p:nvPr>
-            <p:ph type="ftr" idx="11"/>
-          </p:nvPr>
-        </p:nvSpPr>
-        <p:spPr>
-          <a:xfrm>
-            <a:off x="4038600" y="6356350"/>
-            <a:ext cx="4114800" cy="365125"/>
-          </a:xfrm>
-          <a:prstGeom prst="rect">
-            <a:avLst/>
-          </a:prstGeom>
-          <a:noFill/>
-          <a:ln>
-            <a:noFill/>
-          </a:ln>
-        </p:spPr>
-        <p:txBody>
-          <a:bodyPr spcFirstLastPara="1" wrap="square" lIns="91425" tIns="45700" rIns="91425" bIns="45700" anchor="ctr" anchorCtr="0">
-            <a:noAutofit/>
-          </a:bodyPr>
-          <a:lstStyle>
-            <a:lvl1pPr lvl="0" algn="ctr">
-              <a:spcBef>
-                <a:spcPts val="0"/>
-              </a:spcBef>
-              <a:spcAft>
-                <a:spcPts val="0"/>
-              </a:spcAft>
-              <a:buSzPts val="1400"/>
-              <a:buNone/>
-              <a:defRPr/>
-            </a:lvl1pPr>
-            <a:lvl2pPr lvl="1" algn="l">
-              <a:spcBef>
-                <a:spcPts val="0"/>
-              </a:spcBef>
-              <a:spcAft>
-                <a:spcPts val="0"/>
-              </a:spcAft>
-              <a:buSzPts val="1400"/>
-              <a:buNone/>
-              <a:defRPr/>
-            </a:lvl2pPr>
-            <a:lvl3pPr lvl="2" algn="l">
-              <a:spcBef>
-                <a:spcPts val="0"/>
-              </a:spcBef>
-              <a:spcAft>
-                <a:spcPts val="0"/>
-              </a:spcAft>
-              <a:buSzPts val="1400"/>
-              <a:buNone/>
-              <a:defRPr/>
-            </a:lvl3pPr>
-            <a:lvl4pPr lvl="3" algn="l">
-              <a:spcBef>
-                <a:spcPts val="0"/>
-              </a:spcBef>
-              <a:spcAft>
-                <a:spcPts val="0"/>
-              </a:spcAft>
-              <a:buSzPts val="1400"/>
-              <a:buNone/>
-              <a:defRPr/>
-            </a:lvl4pPr>
-            <a:lvl5pPr lvl="4" algn="l">
-              <a:spcBef>
-                <a:spcPts val="0"/>
-              </a:spcBef>
-              <a:spcAft>
-                <a:spcPts val="0"/>
-              </a:spcAft>
-              <a:buSzPts val="1400"/>
-              <a:buNone/>
-              <a:defRPr/>
-            </a:lvl5pPr>
-            <a:lvl6pPr lvl="5" algn="l">
-              <a:spcBef>
-                <a:spcPts val="0"/>
-              </a:spcBef>
-              <a:spcAft>
-                <a:spcPts val="0"/>
-              </a:spcAft>
-              <a:buSzPts val="1400"/>
-              <a:buNone/>
-              <a:defRPr/>
-            </a:lvl6pPr>
-            <a:lvl7pPr lvl="6" algn="l">
-              <a:spcBef>
-                <a:spcPts val="0"/>
-              </a:spcBef>
-              <a:spcAft>
-                <a:spcPts val="0"/>
-              </a:spcAft>
-              <a:buSzPts val="1400"/>
-              <a:buNone/>
-              <a:defRPr/>
-            </a:lvl7pPr>
-            <a:lvl8pPr lvl="7" algn="l">
-              <a:spcBef>
-                <a:spcPts val="0"/>
-              </a:spcBef>
-              <a:spcAft>
-                <a:spcPts val="0"/>
-              </a:spcAft>
-              <a:buSzPts val="1400"/>
-              <a:buNone/>
-              <a:defRPr/>
-            </a:lvl8pPr>
-            <a:lvl9pPr lvl="8" algn="l">
-              <a:spcBef>
-                <a:spcPts val="0"/>
-              </a:spcBef>
-              <a:spcAft>
-                <a:spcPts val="0"/>
-              </a:spcAft>
-              <a:buSzPts val="1400"/>
-              <a:buNone/>
-              <a:defRPr/>
-            </a:lvl9pPr>
-          </a:lstStyle>
-          <a:p>
-            <a:r>
-              <a:rPr lang="en-US" dirty="0"/>
-              <a:t>Proprietary and Confidential Information</a:t>
-            </a:r>
-            <a:endParaRPr dirty="0"/>
-          </a:p>
-        </p:txBody>
-      </p:sp>
-      <p:sp>
-        <p:nvSpPr>
           <p:cNvPr id="11" name="Arc 10">
             <a:extLst>
               <a:ext uri="{FF2B5EF4-FFF2-40B4-BE49-F238E27FC236}">
@@ -32837,149 +31766,6 @@
                 <a:schemeClr val="tx1"/>
               </a:solidFill>
             </a:endParaRPr>
-          </a:p>
-        </p:txBody>
-      </p:sp>
-      <p:sp>
-        <p:nvSpPr>
-          <p:cNvPr id="2" name="Google Shape;18;p9">
-            <a:extLst>
-              <a:ext uri="{FF2B5EF4-FFF2-40B4-BE49-F238E27FC236}">
-                <a16:creationId xmlns:a16="http://schemas.microsoft.com/office/drawing/2014/main" id="{C9FBF93F-D84F-C8FE-0DF9-0956282C6C60}"/>
-              </a:ext>
-            </a:extLst>
-          </p:cNvPr>
-          <p:cNvSpPr txBox="1">
-            <a:spLocks noGrp="1"/>
-          </p:cNvSpPr>
-          <p:nvPr>
-            <p:ph type="ftr" idx="11"/>
-          </p:nvPr>
-        </p:nvSpPr>
-        <p:spPr>
-          <a:xfrm>
-            <a:off x="4038600" y="6356350"/>
-            <a:ext cx="4114800" cy="365125"/>
-          </a:xfrm>
-          <a:prstGeom prst="rect">
-            <a:avLst/>
-          </a:prstGeom>
-          <a:noFill/>
-          <a:ln>
-            <a:noFill/>
-          </a:ln>
-        </p:spPr>
-        <p:txBody>
-          <a:bodyPr spcFirstLastPara="1" wrap="square" lIns="91425" tIns="45700" rIns="91425" bIns="45700" anchor="ctr" anchorCtr="0">
-            <a:noAutofit/>
-          </a:bodyPr>
-          <a:lstStyle>
-            <a:lvl1pPr lvl="0" algn="ctr">
-              <a:spcBef>
-                <a:spcPts val="0"/>
-              </a:spcBef>
-              <a:spcAft>
-                <a:spcPts val="0"/>
-              </a:spcAft>
-              <a:buSzPts val="1400"/>
-              <a:buNone/>
-              <a:defRPr/>
-            </a:lvl1pPr>
-            <a:lvl2pPr lvl="1" algn="l">
-              <a:spcBef>
-                <a:spcPts val="0"/>
-              </a:spcBef>
-              <a:spcAft>
-                <a:spcPts val="0"/>
-              </a:spcAft>
-              <a:buSzPts val="1400"/>
-              <a:buNone/>
-              <a:defRPr/>
-            </a:lvl2pPr>
-            <a:lvl3pPr lvl="2" algn="l">
-              <a:spcBef>
-                <a:spcPts val="0"/>
-              </a:spcBef>
-              <a:spcAft>
-                <a:spcPts val="0"/>
-              </a:spcAft>
-              <a:buSzPts val="1400"/>
-              <a:buNone/>
-              <a:defRPr/>
-            </a:lvl3pPr>
-            <a:lvl4pPr lvl="3" algn="l">
-              <a:spcBef>
-                <a:spcPts val="0"/>
-              </a:spcBef>
-              <a:spcAft>
-                <a:spcPts val="0"/>
-              </a:spcAft>
-              <a:buSzPts val="1400"/>
-              <a:buNone/>
-              <a:defRPr/>
-            </a:lvl4pPr>
-            <a:lvl5pPr lvl="4" algn="l">
-              <a:spcBef>
-                <a:spcPts val="0"/>
-              </a:spcBef>
-              <a:spcAft>
-                <a:spcPts val="0"/>
-              </a:spcAft>
-              <a:buSzPts val="1400"/>
-              <a:buNone/>
-              <a:defRPr/>
-            </a:lvl5pPr>
-            <a:lvl6pPr lvl="5" algn="l">
-              <a:spcBef>
-                <a:spcPts val="0"/>
-              </a:spcBef>
-              <a:spcAft>
-                <a:spcPts val="0"/>
-              </a:spcAft>
-              <a:buSzPts val="1400"/>
-              <a:buNone/>
-              <a:defRPr/>
-            </a:lvl6pPr>
-            <a:lvl7pPr lvl="6" algn="l">
-              <a:spcBef>
-                <a:spcPts val="0"/>
-              </a:spcBef>
-              <a:spcAft>
-                <a:spcPts val="0"/>
-              </a:spcAft>
-              <a:buSzPts val="1400"/>
-              <a:buNone/>
-              <a:defRPr/>
-            </a:lvl7pPr>
-            <a:lvl8pPr lvl="7" algn="l">
-              <a:spcBef>
-                <a:spcPts val="0"/>
-              </a:spcBef>
-              <a:spcAft>
-                <a:spcPts val="0"/>
-              </a:spcAft>
-              <a:buSzPts val="1400"/>
-              <a:buNone/>
-              <a:defRPr/>
-            </a:lvl8pPr>
-            <a:lvl9pPr lvl="8" algn="l">
-              <a:spcBef>
-                <a:spcPts val="0"/>
-              </a:spcBef>
-              <a:spcAft>
-                <a:spcPts val="0"/>
-              </a:spcAft>
-              <a:buSzPts val="1400"/>
-              <a:buNone/>
-              <a:defRPr/>
-            </a:lvl9pPr>
-          </a:lstStyle>
-          <a:p>
-            <a:r>
-              <a:rPr lang="en-US" dirty="0"/>
-              <a:t>Proprietary and Confidential Information</a:t>
-            </a:r>
-            <a:endParaRPr dirty="0"/>
           </a:p>
         </p:txBody>
       </p:sp>

--- a/docs/2_Value_Creation/2a_Product/2a_Product_Management_Plan.pptx
+++ b/docs/2_Value_Creation/2a_Product/2a_Product_Management_Plan.pptx
@@ -254,7 +254,7 @@
       <p15:sldGuideLst xmlns:p15="http://schemas.microsoft.com/office/powerpoint/2012/main"/>
     </p:ext>
     <p:ext uri="GoogleSlidesCustomDataVersion2">
-      <go:slidesCustomData xmlns="" xmlns:go="http://customooxmlschemas.google.com/" xmlns:ahyp="http://schemas.microsoft.com/office/drawing/2018/hyperlinkcolor" xmlns:p15="http://schemas.microsoft.com/office/powerpoint/2012/main" xmlns:p14="http://schemas.microsoft.com/office/powerpoint/2010/main" xmlns:com="http://schemas.openxmlformats.org/drawingml/2006/compatibility" xmlns:pvml="urn:schemas-microsoft-com:office:powerpoint" xmlns:v="urn:schemas-microsoft-com:vml" xmlns:o="urn:schemas-microsoft-com:office:office" xmlns:dgm="http://schemas.openxmlformats.org/drawingml/2006/diagram" xmlns:c="http://schemas.openxmlformats.org/drawingml/2006/chart" xmlns:mv="urn:schemas-microsoft-com:mac:vml" xmlns:mc="http://schemas.openxmlformats.org/markup-compatibility/2006" r:id="rId23" roundtripDataSignature="AMtx7mhwEp+Eio5qReXqYqUwMP31HB0A8A=="/>
+      <go:slidesCustomData xmlns:mc="http://schemas.openxmlformats.org/markup-compatibility/2006" xmlns:mv="urn:schemas-microsoft-com:mac:vml" xmlns:c="http://schemas.openxmlformats.org/drawingml/2006/chart" xmlns:dgm="http://schemas.openxmlformats.org/drawingml/2006/diagram" xmlns:o="urn:schemas-microsoft-com:office:office" xmlns:v="urn:schemas-microsoft-com:vml" xmlns:pvml="urn:schemas-microsoft-com:office:powerpoint" xmlns:com="http://schemas.openxmlformats.org/drawingml/2006/compatibility" xmlns:p14="http://schemas.microsoft.com/office/powerpoint/2010/main" xmlns:p15="http://schemas.microsoft.com/office/powerpoint/2012/main" xmlns:ahyp="http://schemas.microsoft.com/office/drawing/2018/hyperlinkcolor" xmlns:go="http://customooxmlschemas.google.com/" xmlns="" r:id="rId23" roundtripDataSignature="AMtx7mhwEp+Eio5qReXqYqUwMP31HB0A8A=="/>
     </p:ext>
   </p:extLst>
 </p:presentation>
@@ -265,7 +265,7 @@
   <pc:docChgLst>
     <pc:chgData name="Rich Reba" userId="55db41ab6eb3f845" providerId="LiveId" clId="{0E19DA16-244C-5B50-BE0F-52911DD4CA7E}"/>
     <pc:docChg chg="custSel delSld modSld">
-      <pc:chgData name="Rich Reba" userId="55db41ab6eb3f845" providerId="LiveId" clId="{0E19DA16-244C-5B50-BE0F-52911DD4CA7E}" dt="2026-08-06T20:19:11.580" v="24" actId="2696"/>
+      <pc:chgData name="Rich Reba" userId="55db41ab6eb3f845" providerId="LiveId" clId="{0E19DA16-244C-5B50-BE0F-52911DD4CA7E}" dt="2026-08-06T20:27:05.955" v="29" actId="478"/>
       <pc:docMkLst>
         <pc:docMk/>
       </pc:docMkLst>
@@ -284,6 +284,36 @@
           </ac:spMkLst>
         </pc:spChg>
       </pc:sldChg>
+      <pc:sldChg chg="delSp mod">
+        <pc:chgData name="Rich Reba" userId="55db41ab6eb3f845" providerId="LiveId" clId="{0E19DA16-244C-5B50-BE0F-52911DD4CA7E}" dt="2026-08-06T20:27:05.955" v="29" actId="478"/>
+        <pc:sldMkLst>
+          <pc:docMk/>
+          <pc:sldMk cId="3601186110" sldId="273"/>
+        </pc:sldMkLst>
+        <pc:spChg chg="del">
+          <ac:chgData name="Rich Reba" userId="55db41ab6eb3f845" providerId="LiveId" clId="{0E19DA16-244C-5B50-BE0F-52911DD4CA7E}" dt="2026-08-06T20:27:05.955" v="29" actId="478"/>
+          <ac:spMkLst>
+            <pc:docMk/>
+            <pc:sldMk cId="3601186110" sldId="273"/>
+            <ac:spMk id="29" creationId="{CC6B3F18-B157-6C8F-94BB-433A9E2AAE5A}"/>
+          </ac:spMkLst>
+        </pc:spChg>
+      </pc:sldChg>
+      <pc:sldChg chg="delSp mod">
+        <pc:chgData name="Rich Reba" userId="55db41ab6eb3f845" providerId="LiveId" clId="{0E19DA16-244C-5B50-BE0F-52911DD4CA7E}" dt="2026-08-06T20:26:50.113" v="25" actId="478"/>
+        <pc:sldMkLst>
+          <pc:docMk/>
+          <pc:sldMk cId="1961190671" sldId="274"/>
+        </pc:sldMkLst>
+        <pc:spChg chg="del">
+          <ac:chgData name="Rich Reba" userId="55db41ab6eb3f845" providerId="LiveId" clId="{0E19DA16-244C-5B50-BE0F-52911DD4CA7E}" dt="2026-08-06T20:26:50.113" v="25" actId="478"/>
+          <ac:spMkLst>
+            <pc:docMk/>
+            <pc:sldMk cId="1961190671" sldId="274"/>
+            <ac:spMk id="29" creationId="{CC6B3F18-B157-6C8F-94BB-433A9E2AAE5A}"/>
+          </ac:spMkLst>
+        </pc:spChg>
+      </pc:sldChg>
       <pc:sldChg chg="delSp del mod">
         <pc:chgData name="Rich Reba" userId="55db41ab6eb3f845" providerId="LiveId" clId="{0E19DA16-244C-5B50-BE0F-52911DD4CA7E}" dt="2026-08-06T20:19:11.548" v="16" actId="2696"/>
         <pc:sldMkLst>
@@ -296,6 +326,51 @@
             <pc:docMk/>
             <pc:sldMk cId="4261285587" sldId="291"/>
             <ac:spMk id="2" creationId="{CD994921-CA85-D524-D4AC-39A78EB65DD8}"/>
+          </ac:spMkLst>
+        </pc:spChg>
+      </pc:sldChg>
+      <pc:sldChg chg="delSp mod">
+        <pc:chgData name="Rich Reba" userId="55db41ab6eb3f845" providerId="LiveId" clId="{0E19DA16-244C-5B50-BE0F-52911DD4CA7E}" dt="2026-08-06T20:26:53.708" v="26" actId="478"/>
+        <pc:sldMkLst>
+          <pc:docMk/>
+          <pc:sldMk cId="797649862" sldId="400"/>
+        </pc:sldMkLst>
+        <pc:spChg chg="del">
+          <ac:chgData name="Rich Reba" userId="55db41ab6eb3f845" providerId="LiveId" clId="{0E19DA16-244C-5B50-BE0F-52911DD4CA7E}" dt="2026-08-06T20:26:53.708" v="26" actId="478"/>
+          <ac:spMkLst>
+            <pc:docMk/>
+            <pc:sldMk cId="797649862" sldId="400"/>
+            <ac:spMk id="2" creationId="{FAEC2788-BD9D-9EED-BC5E-1AED8264C6F9}"/>
+          </ac:spMkLst>
+        </pc:spChg>
+      </pc:sldChg>
+      <pc:sldChg chg="delSp mod">
+        <pc:chgData name="Rich Reba" userId="55db41ab6eb3f845" providerId="LiveId" clId="{0E19DA16-244C-5B50-BE0F-52911DD4CA7E}" dt="2026-08-06T20:27:01.277" v="28" actId="478"/>
+        <pc:sldMkLst>
+          <pc:docMk/>
+          <pc:sldMk cId="4204179867" sldId="401"/>
+        </pc:sldMkLst>
+        <pc:spChg chg="del">
+          <ac:chgData name="Rich Reba" userId="55db41ab6eb3f845" providerId="LiveId" clId="{0E19DA16-244C-5B50-BE0F-52911DD4CA7E}" dt="2026-08-06T20:27:01.277" v="28" actId="478"/>
+          <ac:spMkLst>
+            <pc:docMk/>
+            <pc:sldMk cId="4204179867" sldId="401"/>
+            <ac:spMk id="2" creationId="{0568B886-68A7-D88F-D2EF-A93DC06210B0}"/>
+          </ac:spMkLst>
+        </pc:spChg>
+      </pc:sldChg>
+      <pc:sldChg chg="delSp mod">
+        <pc:chgData name="Rich Reba" userId="55db41ab6eb3f845" providerId="LiveId" clId="{0E19DA16-244C-5B50-BE0F-52911DD4CA7E}" dt="2026-08-06T20:26:57.007" v="27" actId="478"/>
+        <pc:sldMkLst>
+          <pc:docMk/>
+          <pc:sldMk cId="401125609" sldId="409"/>
+        </pc:sldMkLst>
+        <pc:spChg chg="del">
+          <ac:chgData name="Rich Reba" userId="55db41ab6eb3f845" providerId="LiveId" clId="{0E19DA16-244C-5B50-BE0F-52911DD4CA7E}" dt="2026-08-06T20:26:57.007" v="27" actId="478"/>
+          <ac:spMkLst>
+            <pc:docMk/>
+            <pc:sldMk cId="401125609" sldId="409"/>
+            <ac:spMk id="2" creationId="{E1AC71C2-3A98-1EDD-95E0-0996A2B53388}"/>
           </ac:spMkLst>
         </pc:spChg>
       </pc:sldChg>
@@ -17055,149 +17130,6 @@
           </a:p>
         </p:txBody>
       </p:sp>
-      <p:sp>
-        <p:nvSpPr>
-          <p:cNvPr id="29" name="Google Shape;18;p9">
-            <a:extLst>
-              <a:ext uri="{FF2B5EF4-FFF2-40B4-BE49-F238E27FC236}">
-                <a16:creationId xmlns:a16="http://schemas.microsoft.com/office/drawing/2014/main" id="{CC6B3F18-B157-6C8F-94BB-433A9E2AAE5A}"/>
-              </a:ext>
-            </a:extLst>
-          </p:cNvPr>
-          <p:cNvSpPr txBox="1">
-            <a:spLocks noGrp="1"/>
-          </p:cNvSpPr>
-          <p:nvPr>
-            <p:ph type="ftr" idx="11"/>
-          </p:nvPr>
-        </p:nvSpPr>
-        <p:spPr>
-          <a:xfrm>
-            <a:off x="4038600" y="6585100"/>
-            <a:ext cx="4114800" cy="365125"/>
-          </a:xfrm>
-          <a:prstGeom prst="rect">
-            <a:avLst/>
-          </a:prstGeom>
-          <a:noFill/>
-          <a:ln>
-            <a:noFill/>
-          </a:ln>
-        </p:spPr>
-        <p:txBody>
-          <a:bodyPr spcFirstLastPara="1" wrap="square" lIns="91425" tIns="45700" rIns="91425" bIns="45700" anchor="ctr" anchorCtr="0">
-            <a:noAutofit/>
-          </a:bodyPr>
-          <a:lstStyle>
-            <a:lvl1pPr lvl="0" algn="ctr">
-              <a:spcBef>
-                <a:spcPts val="0"/>
-              </a:spcBef>
-              <a:spcAft>
-                <a:spcPts val="0"/>
-              </a:spcAft>
-              <a:buSzPts val="1400"/>
-              <a:buNone/>
-              <a:defRPr/>
-            </a:lvl1pPr>
-            <a:lvl2pPr lvl="1" algn="l">
-              <a:spcBef>
-                <a:spcPts val="0"/>
-              </a:spcBef>
-              <a:spcAft>
-                <a:spcPts val="0"/>
-              </a:spcAft>
-              <a:buSzPts val="1400"/>
-              <a:buNone/>
-              <a:defRPr/>
-            </a:lvl2pPr>
-            <a:lvl3pPr lvl="2" algn="l">
-              <a:spcBef>
-                <a:spcPts val="0"/>
-              </a:spcBef>
-              <a:spcAft>
-                <a:spcPts val="0"/>
-              </a:spcAft>
-              <a:buSzPts val="1400"/>
-              <a:buNone/>
-              <a:defRPr/>
-            </a:lvl3pPr>
-            <a:lvl4pPr lvl="3" algn="l">
-              <a:spcBef>
-                <a:spcPts val="0"/>
-              </a:spcBef>
-              <a:spcAft>
-                <a:spcPts val="0"/>
-              </a:spcAft>
-              <a:buSzPts val="1400"/>
-              <a:buNone/>
-              <a:defRPr/>
-            </a:lvl4pPr>
-            <a:lvl5pPr lvl="4" algn="l">
-              <a:spcBef>
-                <a:spcPts val="0"/>
-              </a:spcBef>
-              <a:spcAft>
-                <a:spcPts val="0"/>
-              </a:spcAft>
-              <a:buSzPts val="1400"/>
-              <a:buNone/>
-              <a:defRPr/>
-            </a:lvl5pPr>
-            <a:lvl6pPr lvl="5" algn="l">
-              <a:spcBef>
-                <a:spcPts val="0"/>
-              </a:spcBef>
-              <a:spcAft>
-                <a:spcPts val="0"/>
-              </a:spcAft>
-              <a:buSzPts val="1400"/>
-              <a:buNone/>
-              <a:defRPr/>
-            </a:lvl6pPr>
-            <a:lvl7pPr lvl="6" algn="l">
-              <a:spcBef>
-                <a:spcPts val="0"/>
-              </a:spcBef>
-              <a:spcAft>
-                <a:spcPts val="0"/>
-              </a:spcAft>
-              <a:buSzPts val="1400"/>
-              <a:buNone/>
-              <a:defRPr/>
-            </a:lvl7pPr>
-            <a:lvl8pPr lvl="7" algn="l">
-              <a:spcBef>
-                <a:spcPts val="0"/>
-              </a:spcBef>
-              <a:spcAft>
-                <a:spcPts val="0"/>
-              </a:spcAft>
-              <a:buSzPts val="1400"/>
-              <a:buNone/>
-              <a:defRPr/>
-            </a:lvl8pPr>
-            <a:lvl9pPr lvl="8" algn="l">
-              <a:spcBef>
-                <a:spcPts val="0"/>
-              </a:spcBef>
-              <a:spcAft>
-                <a:spcPts val="0"/>
-              </a:spcAft>
-              <a:buSzPts val="1400"/>
-              <a:buNone/>
-              <a:defRPr/>
-            </a:lvl9pPr>
-          </a:lstStyle>
-          <a:p>
-            <a:r>
-              <a:rPr lang="en-US" dirty="0"/>
-              <a:t>Proprietary and Confidential Information</a:t>
-            </a:r>
-            <a:endParaRPr dirty="0"/>
-          </a:p>
-        </p:txBody>
-      </p:sp>
       <p:pic>
         <p:nvPicPr>
           <p:cNvPr id="32" name="Picture 31">
@@ -19199,194 +19131,6 @@
           </a:graphicData>
         </a:graphic>
       </p:graphicFrame>
-      <p:sp>
-        <p:nvSpPr>
-          <p:cNvPr id="2" name="Google Shape;18;p9">
-            <a:extLst>
-              <a:ext uri="{FF2B5EF4-FFF2-40B4-BE49-F238E27FC236}">
-                <a16:creationId xmlns:a16="http://schemas.microsoft.com/office/drawing/2014/main" id="{FAEC2788-BD9D-9EED-BC5E-1AED8264C6F9}"/>
-              </a:ext>
-            </a:extLst>
-          </p:cNvPr>
-          <p:cNvSpPr txBox="1">
-            <a:spLocks noGrp="1"/>
-          </p:cNvSpPr>
-          <p:nvPr>
-            <p:ph type="ftr" idx="11"/>
-          </p:nvPr>
-        </p:nvSpPr>
-        <p:spPr>
-          <a:xfrm>
-            <a:off x="4038600" y="6356350"/>
-            <a:ext cx="4114800" cy="365125"/>
-          </a:xfrm>
-          <a:prstGeom prst="rect">
-            <a:avLst/>
-          </a:prstGeom>
-          <a:noFill/>
-          <a:ln>
-            <a:noFill/>
-          </a:ln>
-        </p:spPr>
-        <p:txBody>
-          <a:bodyPr spcFirstLastPara="1" wrap="square" lIns="91425" tIns="45700" rIns="91425" bIns="45700" anchor="ctr" anchorCtr="0">
-            <a:noAutofit/>
-          </a:bodyPr>
-          <a:lstStyle>
-            <a:lvl1pPr lvl="0" algn="ctr">
-              <a:spcBef>
-                <a:spcPts val="0"/>
-              </a:spcBef>
-              <a:spcAft>
-                <a:spcPts val="0"/>
-              </a:spcAft>
-              <a:buSzPts val="1400"/>
-              <a:buNone/>
-              <a:defRPr/>
-            </a:lvl1pPr>
-            <a:lvl2pPr lvl="1" algn="l">
-              <a:spcBef>
-                <a:spcPts val="0"/>
-              </a:spcBef>
-              <a:spcAft>
-                <a:spcPts val="0"/>
-              </a:spcAft>
-              <a:buSzPts val="1400"/>
-              <a:buNone/>
-              <a:defRPr/>
-            </a:lvl2pPr>
-            <a:lvl3pPr lvl="2" algn="l">
-              <a:spcBef>
-                <a:spcPts val="0"/>
-              </a:spcBef>
-              <a:spcAft>
-                <a:spcPts val="0"/>
-              </a:spcAft>
-              <a:buSzPts val="1400"/>
-              <a:buNone/>
-              <a:defRPr/>
-            </a:lvl3pPr>
-            <a:lvl4pPr lvl="3" algn="l">
-              <a:spcBef>
-                <a:spcPts val="0"/>
-              </a:spcBef>
-              <a:spcAft>
-                <a:spcPts val="0"/>
-              </a:spcAft>
-              <a:buSzPts val="1400"/>
-              <a:buNone/>
-              <a:defRPr/>
-            </a:lvl4pPr>
-            <a:lvl5pPr lvl="4" algn="l">
-              <a:spcBef>
-                <a:spcPts val="0"/>
-              </a:spcBef>
-              <a:spcAft>
-                <a:spcPts val="0"/>
-              </a:spcAft>
-              <a:buSzPts val="1400"/>
-              <a:buNone/>
-              <a:defRPr/>
-            </a:lvl5pPr>
-            <a:lvl6pPr lvl="5" algn="l">
-              <a:spcBef>
-                <a:spcPts val="0"/>
-              </a:spcBef>
-              <a:spcAft>
-                <a:spcPts val="0"/>
-              </a:spcAft>
-              <a:buSzPts val="1400"/>
-              <a:buNone/>
-              <a:defRPr/>
-            </a:lvl6pPr>
-            <a:lvl7pPr lvl="6" algn="l">
-              <a:spcBef>
-                <a:spcPts val="0"/>
-              </a:spcBef>
-              <a:spcAft>
-                <a:spcPts val="0"/>
-              </a:spcAft>
-              <a:buSzPts val="1400"/>
-              <a:buNone/>
-              <a:defRPr/>
-            </a:lvl7pPr>
-            <a:lvl8pPr lvl="7" algn="l">
-              <a:spcBef>
-                <a:spcPts val="0"/>
-              </a:spcBef>
-              <a:spcAft>
-                <a:spcPts val="0"/>
-              </a:spcAft>
-              <a:buSzPts val="1400"/>
-              <a:buNone/>
-              <a:defRPr/>
-            </a:lvl8pPr>
-            <a:lvl9pPr lvl="8" algn="l">
-              <a:spcBef>
-                <a:spcPts val="0"/>
-              </a:spcBef>
-              <a:spcAft>
-                <a:spcPts val="0"/>
-              </a:spcAft>
-              <a:buSzPts val="1400"/>
-              <a:buNone/>
-              <a:defRPr/>
-            </a:lvl9pPr>
-          </a:lstStyle>
-          <a:p>
-            <a:pPr marL="0" marR="0" lvl="0" indent="0" algn="ctr" defTabSz="914400" rtl="0" eaLnBrk="1" fontAlgn="auto" latinLnBrk="0" hangingPunct="1">
-              <a:lnSpc>
-                <a:spcPct val="100000"/>
-              </a:lnSpc>
-              <a:spcBef>
-                <a:spcPts val="0"/>
-              </a:spcBef>
-              <a:spcAft>
-                <a:spcPts val="0"/>
-              </a:spcAft>
-              <a:buClr>
-                <a:srgbClr val="000000"/>
-              </a:buClr>
-              <a:buSzPts val="1400"/>
-              <a:buFont typeface="Arial"/>
-              <a:buNone/>
-              <a:tabLst/>
-              <a:defRPr/>
-            </a:pPr>
-            <a:r>
-              <a:rPr kumimoji="0" lang="en-US" sz="1200" b="0" i="0" u="none" strike="noStrike" kern="0" cap="none" spc="0" normalizeH="0" baseline="0" noProof="0" dirty="0">
-                <a:ln>
-                  <a:noFill/>
-                </a:ln>
-                <a:solidFill>
-                  <a:srgbClr val="888888"/>
-                </a:solidFill>
-                <a:effectLst/>
-                <a:uLnTx/>
-                <a:uFillTx/>
-                <a:latin typeface="Calibri"/>
-                <a:cs typeface="Calibri"/>
-                <a:sym typeface="Calibri"/>
-              </a:rPr>
-              <a:t>Proprietary and Confidential Information</a:t>
-            </a:r>
-            <a:endParaRPr kumimoji="0" sz="1200" b="0" i="0" u="none" strike="noStrike" kern="0" cap="none" spc="0" normalizeH="0" baseline="0" noProof="0" dirty="0">
-              <a:ln>
-                <a:noFill/>
-              </a:ln>
-              <a:solidFill>
-                <a:srgbClr val="888888"/>
-              </a:solidFill>
-              <a:effectLst/>
-              <a:uLnTx/>
-              <a:uFillTx/>
-              <a:latin typeface="Calibri"/>
-              <a:cs typeface="Calibri"/>
-              <a:sym typeface="Calibri"/>
-            </a:endParaRPr>
-          </a:p>
-        </p:txBody>
-      </p:sp>
       <p:pic>
         <p:nvPicPr>
           <p:cNvPr id="7" name="Picture 6">
@@ -21053,194 +20797,6 @@
       </p:graphicFrame>
       <p:sp>
         <p:nvSpPr>
-          <p:cNvPr id="2" name="Google Shape;18;p9">
-            <a:extLst>
-              <a:ext uri="{FF2B5EF4-FFF2-40B4-BE49-F238E27FC236}">
-                <a16:creationId xmlns:a16="http://schemas.microsoft.com/office/drawing/2014/main" id="{E1AC71C2-3A98-1EDD-95E0-0996A2B53388}"/>
-              </a:ext>
-            </a:extLst>
-          </p:cNvPr>
-          <p:cNvSpPr txBox="1">
-            <a:spLocks noGrp="1"/>
-          </p:cNvSpPr>
-          <p:nvPr>
-            <p:ph type="ftr" idx="11"/>
-          </p:nvPr>
-        </p:nvSpPr>
-        <p:spPr>
-          <a:xfrm>
-            <a:off x="4038600" y="6356350"/>
-            <a:ext cx="4114800" cy="365125"/>
-          </a:xfrm>
-          <a:prstGeom prst="rect">
-            <a:avLst/>
-          </a:prstGeom>
-          <a:noFill/>
-          <a:ln>
-            <a:noFill/>
-          </a:ln>
-        </p:spPr>
-        <p:txBody>
-          <a:bodyPr spcFirstLastPara="1" wrap="square" lIns="91425" tIns="45700" rIns="91425" bIns="45700" anchor="ctr" anchorCtr="0">
-            <a:noAutofit/>
-          </a:bodyPr>
-          <a:lstStyle>
-            <a:lvl1pPr lvl="0" algn="ctr">
-              <a:spcBef>
-                <a:spcPts val="0"/>
-              </a:spcBef>
-              <a:spcAft>
-                <a:spcPts val="0"/>
-              </a:spcAft>
-              <a:buSzPts val="1400"/>
-              <a:buNone/>
-              <a:defRPr/>
-            </a:lvl1pPr>
-            <a:lvl2pPr lvl="1" algn="l">
-              <a:spcBef>
-                <a:spcPts val="0"/>
-              </a:spcBef>
-              <a:spcAft>
-                <a:spcPts val="0"/>
-              </a:spcAft>
-              <a:buSzPts val="1400"/>
-              <a:buNone/>
-              <a:defRPr/>
-            </a:lvl2pPr>
-            <a:lvl3pPr lvl="2" algn="l">
-              <a:spcBef>
-                <a:spcPts val="0"/>
-              </a:spcBef>
-              <a:spcAft>
-                <a:spcPts val="0"/>
-              </a:spcAft>
-              <a:buSzPts val="1400"/>
-              <a:buNone/>
-              <a:defRPr/>
-            </a:lvl3pPr>
-            <a:lvl4pPr lvl="3" algn="l">
-              <a:spcBef>
-                <a:spcPts val="0"/>
-              </a:spcBef>
-              <a:spcAft>
-                <a:spcPts val="0"/>
-              </a:spcAft>
-              <a:buSzPts val="1400"/>
-              <a:buNone/>
-              <a:defRPr/>
-            </a:lvl4pPr>
-            <a:lvl5pPr lvl="4" algn="l">
-              <a:spcBef>
-                <a:spcPts val="0"/>
-              </a:spcBef>
-              <a:spcAft>
-                <a:spcPts val="0"/>
-              </a:spcAft>
-              <a:buSzPts val="1400"/>
-              <a:buNone/>
-              <a:defRPr/>
-            </a:lvl5pPr>
-            <a:lvl6pPr lvl="5" algn="l">
-              <a:spcBef>
-                <a:spcPts val="0"/>
-              </a:spcBef>
-              <a:spcAft>
-                <a:spcPts val="0"/>
-              </a:spcAft>
-              <a:buSzPts val="1400"/>
-              <a:buNone/>
-              <a:defRPr/>
-            </a:lvl6pPr>
-            <a:lvl7pPr lvl="6" algn="l">
-              <a:spcBef>
-                <a:spcPts val="0"/>
-              </a:spcBef>
-              <a:spcAft>
-                <a:spcPts val="0"/>
-              </a:spcAft>
-              <a:buSzPts val="1400"/>
-              <a:buNone/>
-              <a:defRPr/>
-            </a:lvl7pPr>
-            <a:lvl8pPr lvl="7" algn="l">
-              <a:spcBef>
-                <a:spcPts val="0"/>
-              </a:spcBef>
-              <a:spcAft>
-                <a:spcPts val="0"/>
-              </a:spcAft>
-              <a:buSzPts val="1400"/>
-              <a:buNone/>
-              <a:defRPr/>
-            </a:lvl8pPr>
-            <a:lvl9pPr lvl="8" algn="l">
-              <a:spcBef>
-                <a:spcPts val="0"/>
-              </a:spcBef>
-              <a:spcAft>
-                <a:spcPts val="0"/>
-              </a:spcAft>
-              <a:buSzPts val="1400"/>
-              <a:buNone/>
-              <a:defRPr/>
-            </a:lvl9pPr>
-          </a:lstStyle>
-          <a:p>
-            <a:pPr marL="0" marR="0" lvl="0" indent="0" algn="ctr" defTabSz="914400" rtl="0" eaLnBrk="1" fontAlgn="auto" latinLnBrk="0" hangingPunct="1">
-              <a:lnSpc>
-                <a:spcPct val="100000"/>
-              </a:lnSpc>
-              <a:spcBef>
-                <a:spcPts val="0"/>
-              </a:spcBef>
-              <a:spcAft>
-                <a:spcPts val="0"/>
-              </a:spcAft>
-              <a:buClr>
-                <a:srgbClr val="000000"/>
-              </a:buClr>
-              <a:buSzPts val="1400"/>
-              <a:buFont typeface="Arial"/>
-              <a:buNone/>
-              <a:tabLst/>
-              <a:defRPr/>
-            </a:pPr>
-            <a:r>
-              <a:rPr kumimoji="0" lang="en-US" sz="1200" b="0" i="0" u="none" strike="noStrike" kern="0" cap="none" spc="0" normalizeH="0" baseline="0" noProof="0" dirty="0">
-                <a:ln>
-                  <a:noFill/>
-                </a:ln>
-                <a:solidFill>
-                  <a:srgbClr val="888888"/>
-                </a:solidFill>
-                <a:effectLst/>
-                <a:uLnTx/>
-                <a:uFillTx/>
-                <a:latin typeface="Calibri"/>
-                <a:cs typeface="Calibri"/>
-                <a:sym typeface="Calibri"/>
-              </a:rPr>
-              <a:t>Proprietary and Confidential Information</a:t>
-            </a:r>
-            <a:endParaRPr kumimoji="0" sz="1200" b="0" i="0" u="none" strike="noStrike" kern="0" cap="none" spc="0" normalizeH="0" baseline="0" noProof="0" dirty="0">
-              <a:ln>
-                <a:noFill/>
-              </a:ln>
-              <a:solidFill>
-                <a:srgbClr val="888888"/>
-              </a:solidFill>
-              <a:effectLst/>
-              <a:uLnTx/>
-              <a:uFillTx/>
-              <a:latin typeface="Calibri"/>
-              <a:cs typeface="Calibri"/>
-              <a:sym typeface="Calibri"/>
-            </a:endParaRPr>
-          </a:p>
-        </p:txBody>
-      </p:sp>
-      <p:sp>
-        <p:nvSpPr>
           <p:cNvPr id="8" name="TextBox 7">
             <a:extLst>
               <a:ext uri="{FF2B5EF4-FFF2-40B4-BE49-F238E27FC236}">
@@ -22300,194 +21856,6 @@
           </a:graphicData>
         </a:graphic>
       </p:graphicFrame>
-      <p:sp>
-        <p:nvSpPr>
-          <p:cNvPr id="2" name="Google Shape;18;p9">
-            <a:extLst>
-              <a:ext uri="{FF2B5EF4-FFF2-40B4-BE49-F238E27FC236}">
-                <a16:creationId xmlns:a16="http://schemas.microsoft.com/office/drawing/2014/main" id="{0568B886-68A7-D88F-D2EF-A93DC06210B0}"/>
-              </a:ext>
-            </a:extLst>
-          </p:cNvPr>
-          <p:cNvSpPr txBox="1">
-            <a:spLocks noGrp="1"/>
-          </p:cNvSpPr>
-          <p:nvPr>
-            <p:ph type="ftr" idx="11"/>
-          </p:nvPr>
-        </p:nvSpPr>
-        <p:spPr>
-          <a:xfrm>
-            <a:off x="4038600" y="6356350"/>
-            <a:ext cx="4114800" cy="365125"/>
-          </a:xfrm>
-          <a:prstGeom prst="rect">
-            <a:avLst/>
-          </a:prstGeom>
-          <a:noFill/>
-          <a:ln>
-            <a:noFill/>
-          </a:ln>
-        </p:spPr>
-        <p:txBody>
-          <a:bodyPr spcFirstLastPara="1" wrap="square" lIns="91425" tIns="45700" rIns="91425" bIns="45700" anchor="ctr" anchorCtr="0">
-            <a:noAutofit/>
-          </a:bodyPr>
-          <a:lstStyle>
-            <a:lvl1pPr lvl="0" algn="ctr">
-              <a:spcBef>
-                <a:spcPts val="0"/>
-              </a:spcBef>
-              <a:spcAft>
-                <a:spcPts val="0"/>
-              </a:spcAft>
-              <a:buSzPts val="1400"/>
-              <a:buNone/>
-              <a:defRPr/>
-            </a:lvl1pPr>
-            <a:lvl2pPr lvl="1" algn="l">
-              <a:spcBef>
-                <a:spcPts val="0"/>
-              </a:spcBef>
-              <a:spcAft>
-                <a:spcPts val="0"/>
-              </a:spcAft>
-              <a:buSzPts val="1400"/>
-              <a:buNone/>
-              <a:defRPr/>
-            </a:lvl2pPr>
-            <a:lvl3pPr lvl="2" algn="l">
-              <a:spcBef>
-                <a:spcPts val="0"/>
-              </a:spcBef>
-              <a:spcAft>
-                <a:spcPts val="0"/>
-              </a:spcAft>
-              <a:buSzPts val="1400"/>
-              <a:buNone/>
-              <a:defRPr/>
-            </a:lvl3pPr>
-            <a:lvl4pPr lvl="3" algn="l">
-              <a:spcBef>
-                <a:spcPts val="0"/>
-              </a:spcBef>
-              <a:spcAft>
-                <a:spcPts val="0"/>
-              </a:spcAft>
-              <a:buSzPts val="1400"/>
-              <a:buNone/>
-              <a:defRPr/>
-            </a:lvl4pPr>
-            <a:lvl5pPr lvl="4" algn="l">
-              <a:spcBef>
-                <a:spcPts val="0"/>
-              </a:spcBef>
-              <a:spcAft>
-                <a:spcPts val="0"/>
-              </a:spcAft>
-              <a:buSzPts val="1400"/>
-              <a:buNone/>
-              <a:defRPr/>
-            </a:lvl5pPr>
-            <a:lvl6pPr lvl="5" algn="l">
-              <a:spcBef>
-                <a:spcPts val="0"/>
-              </a:spcBef>
-              <a:spcAft>
-                <a:spcPts val="0"/>
-              </a:spcAft>
-              <a:buSzPts val="1400"/>
-              <a:buNone/>
-              <a:defRPr/>
-            </a:lvl6pPr>
-            <a:lvl7pPr lvl="6" algn="l">
-              <a:spcBef>
-                <a:spcPts val="0"/>
-              </a:spcBef>
-              <a:spcAft>
-                <a:spcPts val="0"/>
-              </a:spcAft>
-              <a:buSzPts val="1400"/>
-              <a:buNone/>
-              <a:defRPr/>
-            </a:lvl7pPr>
-            <a:lvl8pPr lvl="7" algn="l">
-              <a:spcBef>
-                <a:spcPts val="0"/>
-              </a:spcBef>
-              <a:spcAft>
-                <a:spcPts val="0"/>
-              </a:spcAft>
-              <a:buSzPts val="1400"/>
-              <a:buNone/>
-              <a:defRPr/>
-            </a:lvl8pPr>
-            <a:lvl9pPr lvl="8" algn="l">
-              <a:spcBef>
-                <a:spcPts val="0"/>
-              </a:spcBef>
-              <a:spcAft>
-                <a:spcPts val="0"/>
-              </a:spcAft>
-              <a:buSzPts val="1400"/>
-              <a:buNone/>
-              <a:defRPr/>
-            </a:lvl9pPr>
-          </a:lstStyle>
-          <a:p>
-            <a:pPr marL="0" marR="0" lvl="0" indent="0" algn="ctr" defTabSz="914400" rtl="0" eaLnBrk="1" fontAlgn="auto" latinLnBrk="0" hangingPunct="1">
-              <a:lnSpc>
-                <a:spcPct val="100000"/>
-              </a:lnSpc>
-              <a:spcBef>
-                <a:spcPts val="0"/>
-              </a:spcBef>
-              <a:spcAft>
-                <a:spcPts val="0"/>
-              </a:spcAft>
-              <a:buClr>
-                <a:srgbClr val="000000"/>
-              </a:buClr>
-              <a:buSzPts val="1400"/>
-              <a:buFont typeface="Arial"/>
-              <a:buNone/>
-              <a:tabLst/>
-              <a:defRPr/>
-            </a:pPr>
-            <a:r>
-              <a:rPr kumimoji="0" lang="en-US" sz="1200" b="0" i="0" u="none" strike="noStrike" kern="0" cap="none" spc="0" normalizeH="0" baseline="0" noProof="0" dirty="0">
-                <a:ln>
-                  <a:noFill/>
-                </a:ln>
-                <a:solidFill>
-                  <a:srgbClr val="888888"/>
-                </a:solidFill>
-                <a:effectLst/>
-                <a:uLnTx/>
-                <a:uFillTx/>
-                <a:latin typeface="Calibri"/>
-                <a:cs typeface="Calibri"/>
-                <a:sym typeface="Calibri"/>
-              </a:rPr>
-              <a:t>Proprietary and Confidential Information</a:t>
-            </a:r>
-            <a:endParaRPr kumimoji="0" sz="1200" b="0" i="0" u="none" strike="noStrike" kern="0" cap="none" spc="0" normalizeH="0" baseline="0" noProof="0" dirty="0">
-              <a:ln>
-                <a:noFill/>
-              </a:ln>
-              <a:solidFill>
-                <a:srgbClr val="888888"/>
-              </a:solidFill>
-              <a:effectLst/>
-              <a:uLnTx/>
-              <a:uFillTx/>
-              <a:latin typeface="Calibri"/>
-              <a:cs typeface="Calibri"/>
-              <a:sym typeface="Calibri"/>
-            </a:endParaRPr>
-          </a:p>
-        </p:txBody>
-      </p:sp>
     </p:spTree>
     <p:extLst>
       <p:ext uri="{BB962C8B-B14F-4D97-AF65-F5344CB8AC3E}">
@@ -22637,149 +22005,6 @@
             <a:r>
               <a:rPr lang="en-US" dirty="0"/>
               <a:t>Portfolio Kanban Reference</a:t>
-            </a:r>
-            <a:endParaRPr dirty="0"/>
-          </a:p>
-        </p:txBody>
-      </p:sp>
-      <p:sp>
-        <p:nvSpPr>
-          <p:cNvPr id="29" name="Google Shape;18;p9">
-            <a:extLst>
-              <a:ext uri="{FF2B5EF4-FFF2-40B4-BE49-F238E27FC236}">
-                <a16:creationId xmlns:a16="http://schemas.microsoft.com/office/drawing/2014/main" id="{CC6B3F18-B157-6C8F-94BB-433A9E2AAE5A}"/>
-              </a:ext>
-            </a:extLst>
-          </p:cNvPr>
-          <p:cNvSpPr txBox="1">
-            <a:spLocks noGrp="1"/>
-          </p:cNvSpPr>
-          <p:nvPr>
-            <p:ph type="ftr" idx="11"/>
-          </p:nvPr>
-        </p:nvSpPr>
-        <p:spPr>
-          <a:xfrm>
-            <a:off x="4038600" y="6611811"/>
-            <a:ext cx="4114800" cy="365125"/>
-          </a:xfrm>
-          <a:prstGeom prst="rect">
-            <a:avLst/>
-          </a:prstGeom>
-          <a:noFill/>
-          <a:ln>
-            <a:noFill/>
-          </a:ln>
-        </p:spPr>
-        <p:txBody>
-          <a:bodyPr spcFirstLastPara="1" wrap="square" lIns="91425" tIns="45700" rIns="91425" bIns="45700" anchor="ctr" anchorCtr="0">
-            <a:noAutofit/>
-          </a:bodyPr>
-          <a:lstStyle>
-            <a:lvl1pPr lvl="0" algn="ctr">
-              <a:spcBef>
-                <a:spcPts val="0"/>
-              </a:spcBef>
-              <a:spcAft>
-                <a:spcPts val="0"/>
-              </a:spcAft>
-              <a:buSzPts val="1400"/>
-              <a:buNone/>
-              <a:defRPr/>
-            </a:lvl1pPr>
-            <a:lvl2pPr lvl="1" algn="l">
-              <a:spcBef>
-                <a:spcPts val="0"/>
-              </a:spcBef>
-              <a:spcAft>
-                <a:spcPts val="0"/>
-              </a:spcAft>
-              <a:buSzPts val="1400"/>
-              <a:buNone/>
-              <a:defRPr/>
-            </a:lvl2pPr>
-            <a:lvl3pPr lvl="2" algn="l">
-              <a:spcBef>
-                <a:spcPts val="0"/>
-              </a:spcBef>
-              <a:spcAft>
-                <a:spcPts val="0"/>
-              </a:spcAft>
-              <a:buSzPts val="1400"/>
-              <a:buNone/>
-              <a:defRPr/>
-            </a:lvl3pPr>
-            <a:lvl4pPr lvl="3" algn="l">
-              <a:spcBef>
-                <a:spcPts val="0"/>
-              </a:spcBef>
-              <a:spcAft>
-                <a:spcPts val="0"/>
-              </a:spcAft>
-              <a:buSzPts val="1400"/>
-              <a:buNone/>
-              <a:defRPr/>
-            </a:lvl4pPr>
-            <a:lvl5pPr lvl="4" algn="l">
-              <a:spcBef>
-                <a:spcPts val="0"/>
-              </a:spcBef>
-              <a:spcAft>
-                <a:spcPts val="0"/>
-              </a:spcAft>
-              <a:buSzPts val="1400"/>
-              <a:buNone/>
-              <a:defRPr/>
-            </a:lvl5pPr>
-            <a:lvl6pPr lvl="5" algn="l">
-              <a:spcBef>
-                <a:spcPts val="0"/>
-              </a:spcBef>
-              <a:spcAft>
-                <a:spcPts val="0"/>
-              </a:spcAft>
-              <a:buSzPts val="1400"/>
-              <a:buNone/>
-              <a:defRPr/>
-            </a:lvl6pPr>
-            <a:lvl7pPr lvl="6" algn="l">
-              <a:spcBef>
-                <a:spcPts val="0"/>
-              </a:spcBef>
-              <a:spcAft>
-                <a:spcPts val="0"/>
-              </a:spcAft>
-              <a:buSzPts val="1400"/>
-              <a:buNone/>
-              <a:defRPr/>
-            </a:lvl7pPr>
-            <a:lvl8pPr lvl="7" algn="l">
-              <a:spcBef>
-                <a:spcPts val="0"/>
-              </a:spcBef>
-              <a:spcAft>
-                <a:spcPts val="0"/>
-              </a:spcAft>
-              <a:buSzPts val="1400"/>
-              <a:buNone/>
-              <a:defRPr/>
-            </a:lvl8pPr>
-            <a:lvl9pPr lvl="8" algn="l">
-              <a:spcBef>
-                <a:spcPts val="0"/>
-              </a:spcBef>
-              <a:spcAft>
-                <a:spcPts val="0"/>
-              </a:spcAft>
-              <a:buSzPts val="1400"/>
-              <a:buNone/>
-              <a:defRPr/>
-            </a:lvl9pPr>
-          </a:lstStyle>
-          <a:p>
-            <a:r>
-              <a:rPr lang="en-US" dirty="0"/>
-              <a:t>Proprietary and Confidential Information</a:t>
             </a:r>
             <a:endParaRPr dirty="0"/>
           </a:p>

--- a/docs/2_Value_Creation/2a_Product/2a_Product_Management_Plan.pptx
+++ b/docs/2_Value_Creation/2a_Product/2a_Product_Management_Plan.pptx
@@ -5,7 +5,7 @@
     <p:sldMasterId id="2147483661" r:id="rId1"/>
   </p:sldMasterIdLst>
   <p:notesMasterIdLst>
-    <p:notesMasterId r:id="rId11"/>
+    <p:notesMasterId r:id="rId12"/>
   </p:notesMasterIdLst>
   <p:sldIdLst>
     <p:sldId id="256" r:id="rId2"/>
@@ -13,10 +13,11 @@
     <p:sldId id="418" r:id="rId4"/>
     <p:sldId id="274" r:id="rId5"/>
     <p:sldId id="400" r:id="rId6"/>
-    <p:sldId id="409" r:id="rId7"/>
-    <p:sldId id="401" r:id="rId8"/>
-    <p:sldId id="275" r:id="rId9"/>
-    <p:sldId id="273" r:id="rId10"/>
+    <p:sldId id="419" r:id="rId7"/>
+    <p:sldId id="409" r:id="rId8"/>
+    <p:sldId id="401" r:id="rId9"/>
+    <p:sldId id="275" r:id="rId10"/>
+    <p:sldId id="273" r:id="rId11"/>
   </p:sldIdLst>
   <p:sldSz cx="12192000" cy="6858000"/>
   <p:notesSz cx="6858000" cy="9144000"/>
@@ -254,18 +255,26 @@
       <p15:sldGuideLst xmlns:p15="http://schemas.microsoft.com/office/powerpoint/2012/main"/>
     </p:ext>
     <p:ext uri="GoogleSlidesCustomDataVersion2">
-      <go:slidesCustomData xmlns:mc="http://schemas.openxmlformats.org/markup-compatibility/2006" xmlns:mv="urn:schemas-microsoft-com:mac:vml" xmlns:c="http://schemas.openxmlformats.org/drawingml/2006/chart" xmlns:dgm="http://schemas.openxmlformats.org/drawingml/2006/diagram" xmlns:o="urn:schemas-microsoft-com:office:office" xmlns:v="urn:schemas-microsoft-com:vml" xmlns:pvml="urn:schemas-microsoft-com:office:powerpoint" xmlns:com="http://schemas.openxmlformats.org/drawingml/2006/compatibility" xmlns:p14="http://schemas.microsoft.com/office/powerpoint/2010/main" xmlns:p15="http://schemas.microsoft.com/office/powerpoint/2012/main" xmlns:ahyp="http://schemas.microsoft.com/office/drawing/2018/hyperlinkcolor" xmlns:go="http://customooxmlschemas.google.com/" xmlns="" r:id="rId23" roundtripDataSignature="AMtx7mhwEp+Eio5qReXqYqUwMP31HB0A8A=="/>
+      <go:slidesCustomData xmlns="" xmlns:go="http://customooxmlschemas.google.com/" xmlns:ahyp="http://schemas.microsoft.com/office/drawing/2018/hyperlinkcolor" xmlns:p15="http://schemas.microsoft.com/office/powerpoint/2012/main" xmlns:p14="http://schemas.microsoft.com/office/powerpoint/2010/main" xmlns:com="http://schemas.openxmlformats.org/drawingml/2006/compatibility" xmlns:pvml="urn:schemas-microsoft-com:office:powerpoint" xmlns:v="urn:schemas-microsoft-com:vml" xmlns:o="urn:schemas-microsoft-com:office:office" xmlns:dgm="http://schemas.openxmlformats.org/drawingml/2006/diagram" xmlns:c="http://schemas.openxmlformats.org/drawingml/2006/chart" xmlns:mv="urn:schemas-microsoft-com:mac:vml" xmlns:mc="http://schemas.openxmlformats.org/markup-compatibility/2006" r:id="rId23" roundtripDataSignature="AMtx7mhwEp+Eio5qReXqYqUwMP31HB0A8A=="/>
     </p:ext>
   </p:extLst>
 </p:presentation>
+</file>
+
+<file path=ppt/revisionInfo.xml><?xml version="1.0" encoding="utf-8"?>
+<p1510:revInfo xmlns:a="http://schemas.openxmlformats.org/drawingml/2006/main" xmlns:r="http://schemas.openxmlformats.org/officeDocument/2006/relationships" xmlns:p1510="http://schemas.microsoft.com/office/powerpoint/2015/10/main">
+  <p1510:revLst>
+    <p1510:client id="{B143809C-D10A-264C-B7BA-94778C12E332}" v="2" dt="2026-08-09T15:50:30.793"/>
+  </p1510:revLst>
+</p1510:revInfo>
 </file>
 
 <file path=ppt/changesInfos/changesInfo1.xml><?xml version="1.0" encoding="utf-8"?>
 <pc:chgInfo xmlns:a="http://schemas.openxmlformats.org/drawingml/2006/main" xmlns:r="http://schemas.openxmlformats.org/officeDocument/2006/relationships" xmlns:ac="http://schemas.microsoft.com/office/drawing/2013/main/command" xmlns:pc="http://schemas.microsoft.com/office/powerpoint/2013/main/command">
   <pc:docChgLst>
     <pc:chgData name="Rich Reba" userId="55db41ab6eb3f845" providerId="LiveId" clId="{0E19DA16-244C-5B50-BE0F-52911DD4CA7E}"/>
-    <pc:docChg chg="custSel delSld modSld">
-      <pc:chgData name="Rich Reba" userId="55db41ab6eb3f845" providerId="LiveId" clId="{0E19DA16-244C-5B50-BE0F-52911DD4CA7E}" dt="2026-08-06T20:27:05.955" v="29" actId="478"/>
+    <pc:docChg chg="custSel addSld delSld modSld">
+      <pc:chgData name="Rich Reba" userId="55db41ab6eb3f845" providerId="LiveId" clId="{0E19DA16-244C-5B50-BE0F-52911DD4CA7E}" dt="2026-08-09T15:53:38.015" v="264" actId="20577"/>
       <pc:docMkLst>
         <pc:docMk/>
       </pc:docMkLst>
@@ -290,14 +299,6 @@
           <pc:docMk/>
           <pc:sldMk cId="3601186110" sldId="273"/>
         </pc:sldMkLst>
-        <pc:spChg chg="del">
-          <ac:chgData name="Rich Reba" userId="55db41ab6eb3f845" providerId="LiveId" clId="{0E19DA16-244C-5B50-BE0F-52911DD4CA7E}" dt="2026-08-06T20:27:05.955" v="29" actId="478"/>
-          <ac:spMkLst>
-            <pc:docMk/>
-            <pc:sldMk cId="3601186110" sldId="273"/>
-            <ac:spMk id="29" creationId="{CC6B3F18-B157-6C8F-94BB-433A9E2AAE5A}"/>
-          </ac:spMkLst>
-        </pc:spChg>
       </pc:sldChg>
       <pc:sldChg chg="delSp mod">
         <pc:chgData name="Rich Reba" userId="55db41ab6eb3f845" providerId="LiveId" clId="{0E19DA16-244C-5B50-BE0F-52911DD4CA7E}" dt="2026-08-06T20:26:50.113" v="25" actId="478"/>
@@ -305,29 +306,6 @@
           <pc:docMk/>
           <pc:sldMk cId="1961190671" sldId="274"/>
         </pc:sldMkLst>
-        <pc:spChg chg="del">
-          <ac:chgData name="Rich Reba" userId="55db41ab6eb3f845" providerId="LiveId" clId="{0E19DA16-244C-5B50-BE0F-52911DD4CA7E}" dt="2026-08-06T20:26:50.113" v="25" actId="478"/>
-          <ac:spMkLst>
-            <pc:docMk/>
-            <pc:sldMk cId="1961190671" sldId="274"/>
-            <ac:spMk id="29" creationId="{CC6B3F18-B157-6C8F-94BB-433A9E2AAE5A}"/>
-          </ac:spMkLst>
-        </pc:spChg>
-      </pc:sldChg>
-      <pc:sldChg chg="delSp del mod">
-        <pc:chgData name="Rich Reba" userId="55db41ab6eb3f845" providerId="LiveId" clId="{0E19DA16-244C-5B50-BE0F-52911DD4CA7E}" dt="2026-08-06T20:19:11.548" v="16" actId="2696"/>
-        <pc:sldMkLst>
-          <pc:docMk/>
-          <pc:sldMk cId="4261285587" sldId="291"/>
-        </pc:sldMkLst>
-        <pc:spChg chg="del">
-          <ac:chgData name="Rich Reba" userId="55db41ab6eb3f845" providerId="LiveId" clId="{0E19DA16-244C-5B50-BE0F-52911DD4CA7E}" dt="2026-08-05T20:16:51.271" v="0" actId="478"/>
-          <ac:spMkLst>
-            <pc:docMk/>
-            <pc:sldMk cId="4261285587" sldId="291"/>
-            <ac:spMk id="2" creationId="{CD994921-CA85-D524-D4AC-39A78EB65DD8}"/>
-          </ac:spMkLst>
-        </pc:spChg>
       </pc:sldChg>
       <pc:sldChg chg="delSp mod">
         <pc:chgData name="Rich Reba" userId="55db41ab6eb3f845" providerId="LiveId" clId="{0E19DA16-244C-5B50-BE0F-52911DD4CA7E}" dt="2026-08-06T20:26:53.708" v="26" actId="478"/>
@@ -335,14 +313,6 @@
           <pc:docMk/>
           <pc:sldMk cId="797649862" sldId="400"/>
         </pc:sldMkLst>
-        <pc:spChg chg="del">
-          <ac:chgData name="Rich Reba" userId="55db41ab6eb3f845" providerId="LiveId" clId="{0E19DA16-244C-5B50-BE0F-52911DD4CA7E}" dt="2026-08-06T20:26:53.708" v="26" actId="478"/>
-          <ac:spMkLst>
-            <pc:docMk/>
-            <pc:sldMk cId="797649862" sldId="400"/>
-            <ac:spMk id="2" creationId="{FAEC2788-BD9D-9EED-BC5E-1AED8264C6F9}"/>
-          </ac:spMkLst>
-        </pc:spChg>
       </pc:sldChg>
       <pc:sldChg chg="delSp mod">
         <pc:chgData name="Rich Reba" userId="55db41ab6eb3f845" providerId="LiveId" clId="{0E19DA16-244C-5B50-BE0F-52911DD4CA7E}" dt="2026-08-06T20:27:01.277" v="28" actId="478"/>
@@ -350,107 +320,68 @@
           <pc:docMk/>
           <pc:sldMk cId="4204179867" sldId="401"/>
         </pc:sldMkLst>
-        <pc:spChg chg="del">
-          <ac:chgData name="Rich Reba" userId="55db41ab6eb3f845" providerId="LiveId" clId="{0E19DA16-244C-5B50-BE0F-52911DD4CA7E}" dt="2026-08-06T20:27:01.277" v="28" actId="478"/>
-          <ac:spMkLst>
-            <pc:docMk/>
-            <pc:sldMk cId="4204179867" sldId="401"/>
-            <ac:spMk id="2" creationId="{0568B886-68A7-D88F-D2EF-A93DC06210B0}"/>
-          </ac:spMkLst>
-        </pc:spChg>
       </pc:sldChg>
-      <pc:sldChg chg="delSp mod">
-        <pc:chgData name="Rich Reba" userId="55db41ab6eb3f845" providerId="LiveId" clId="{0E19DA16-244C-5B50-BE0F-52911DD4CA7E}" dt="2026-08-06T20:26:57.007" v="27" actId="478"/>
+      <pc:sldChg chg="delSp modSp mod">
+        <pc:chgData name="Rich Reba" userId="55db41ab6eb3f845" providerId="LiveId" clId="{0E19DA16-244C-5B50-BE0F-52911DD4CA7E}" dt="2026-08-09T15:53:38.015" v="264" actId="20577"/>
         <pc:sldMkLst>
           <pc:docMk/>
           <pc:sldMk cId="401125609" sldId="409"/>
         </pc:sldMkLst>
         <pc:spChg chg="del">
-          <ac:chgData name="Rich Reba" userId="55db41ab6eb3f845" providerId="LiveId" clId="{0E19DA16-244C-5B50-BE0F-52911DD4CA7E}" dt="2026-08-06T20:26:57.007" v="27" actId="478"/>
+          <ac:chgData name="Rich Reba" userId="55db41ab6eb3f845" providerId="LiveId" clId="{0E19DA16-244C-5B50-BE0F-52911DD4CA7E}" dt="2026-08-09T15:47:07.266" v="52" actId="478"/>
           <ac:spMkLst>
             <pc:docMk/>
             <pc:sldMk cId="401125609" sldId="409"/>
-            <ac:spMk id="2" creationId="{E1AC71C2-3A98-1EDD-95E0-0996A2B53388}"/>
+            <ac:spMk id="8" creationId="{98161617-7B83-FBD0-E788-6EDFBDE6F761}"/>
           </ac:spMkLst>
         </pc:spChg>
+        <pc:spChg chg="mod">
+          <ac:chgData name="Rich Reba" userId="55db41ab6eb3f845" providerId="LiveId" clId="{0E19DA16-244C-5B50-BE0F-52911DD4CA7E}" dt="2026-08-09T15:53:38.015" v="264" actId="20577"/>
+          <ac:spMkLst>
+            <pc:docMk/>
+            <pc:sldMk cId="401125609" sldId="409"/>
+            <ac:spMk id="96" creationId="{213A3A61-4044-D39A-7839-F3AEFE0C296B}"/>
+          </ac:spMkLst>
+        </pc:spChg>
+        <pc:graphicFrameChg chg="mod modGraphic">
+          <ac:chgData name="Rich Reba" userId="55db41ab6eb3f845" providerId="LiveId" clId="{0E19DA16-244C-5B50-BE0F-52911DD4CA7E}" dt="2026-08-09T15:49:44.453" v="132" actId="12"/>
+          <ac:graphicFrameMkLst>
+            <pc:docMk/>
+            <pc:sldMk cId="401125609" sldId="409"/>
+            <ac:graphicFrameMk id="5" creationId="{5855B0BF-5869-4C17-DDB9-4330FF90D640}"/>
+          </ac:graphicFrameMkLst>
+        </pc:graphicFrameChg>
+        <pc:picChg chg="del mod">
+          <ac:chgData name="Rich Reba" userId="55db41ab6eb3f845" providerId="LiveId" clId="{0E19DA16-244C-5B50-BE0F-52911DD4CA7E}" dt="2026-08-09T15:47:07.266" v="52" actId="478"/>
+          <ac:picMkLst>
+            <pc:docMk/>
+            <pc:sldMk cId="401125609" sldId="409"/>
+            <ac:picMk id="3" creationId="{C734C8B3-CAA6-7C3E-29FF-A014181AB53A}"/>
+          </ac:picMkLst>
+        </pc:picChg>
       </pc:sldChg>
-      <pc:sldChg chg="del">
-        <pc:chgData name="Rich Reba" userId="55db41ab6eb3f845" providerId="LiveId" clId="{0E19DA16-244C-5B50-BE0F-52911DD4CA7E}" dt="2026-08-06T20:19:11.544" v="14" actId="2696"/>
+      <pc:sldChg chg="modSp add mod">
+        <pc:chgData name="Rich Reba" userId="55db41ab6eb3f845" providerId="LiveId" clId="{0E19DA16-244C-5B50-BE0F-52911DD4CA7E}" dt="2026-08-09T15:51:46.495" v="223" actId="20577"/>
         <pc:sldMkLst>
           <pc:docMk/>
-          <pc:sldMk cId="1335389885" sldId="419"/>
+          <pc:sldMk cId="2470097404" sldId="419"/>
         </pc:sldMkLst>
-      </pc:sldChg>
-      <pc:sldChg chg="del">
-        <pc:chgData name="Rich Reba" userId="55db41ab6eb3f845" providerId="LiveId" clId="{0E19DA16-244C-5B50-BE0F-52911DD4CA7E}" dt="2026-08-06T20:19:11.568" v="22" actId="2696"/>
-        <pc:sldMkLst>
-          <pc:docMk/>
-          <pc:sldMk cId="3537629373" sldId="422"/>
-        </pc:sldMkLst>
-      </pc:sldChg>
-      <pc:sldChg chg="del">
-        <pc:chgData name="Rich Reba" userId="55db41ab6eb3f845" providerId="LiveId" clId="{0E19DA16-244C-5B50-BE0F-52911DD4CA7E}" dt="2026-08-06T20:19:11.560" v="19" actId="2696"/>
-        <pc:sldMkLst>
-          <pc:docMk/>
-          <pc:sldMk cId="681584822" sldId="423"/>
-        </pc:sldMkLst>
-      </pc:sldChg>
-      <pc:sldChg chg="del">
-        <pc:chgData name="Rich Reba" userId="55db41ab6eb3f845" providerId="LiveId" clId="{0E19DA16-244C-5B50-BE0F-52911DD4CA7E}" dt="2026-08-06T20:19:11.567" v="21" actId="2696"/>
-        <pc:sldMkLst>
-          <pc:docMk/>
-          <pc:sldMk cId="647313039" sldId="424"/>
-        </pc:sldMkLst>
-      </pc:sldChg>
-      <pc:sldChg chg="del">
-        <pc:chgData name="Rich Reba" userId="55db41ab6eb3f845" providerId="LiveId" clId="{0E19DA16-244C-5B50-BE0F-52911DD4CA7E}" dt="2026-08-06T20:19:11.575" v="23" actId="2696"/>
-        <pc:sldMkLst>
-          <pc:docMk/>
-          <pc:sldMk cId="521678706" sldId="428"/>
-        </pc:sldMkLst>
-      </pc:sldChg>
-      <pc:sldChg chg="del">
-        <pc:chgData name="Rich Reba" userId="55db41ab6eb3f845" providerId="LiveId" clId="{0E19DA16-244C-5B50-BE0F-52911DD4CA7E}" dt="2026-08-06T20:19:11.558" v="18" actId="2696"/>
-        <pc:sldMkLst>
-          <pc:docMk/>
-          <pc:sldMk cId="1588215340" sldId="429"/>
-        </pc:sldMkLst>
-      </pc:sldChg>
-      <pc:sldChg chg="del">
-        <pc:chgData name="Rich Reba" userId="55db41ab6eb3f845" providerId="LiveId" clId="{0E19DA16-244C-5B50-BE0F-52911DD4CA7E}" dt="2026-08-06T20:19:11.561" v="20" actId="2696"/>
-        <pc:sldMkLst>
-          <pc:docMk/>
-          <pc:sldMk cId="1078706708" sldId="431"/>
-        </pc:sldMkLst>
-      </pc:sldChg>
-      <pc:sldChg chg="del">
-        <pc:chgData name="Rich Reba" userId="55db41ab6eb3f845" providerId="LiveId" clId="{0E19DA16-244C-5B50-BE0F-52911DD4CA7E}" dt="2026-08-06T20:19:11.580" v="24" actId="2696"/>
-        <pc:sldMkLst>
-          <pc:docMk/>
-          <pc:sldMk cId="2186535311" sldId="432"/>
-        </pc:sldMkLst>
-      </pc:sldChg>
-      <pc:sldChg chg="del">
-        <pc:chgData name="Rich Reba" userId="55db41ab6eb3f845" providerId="LiveId" clId="{0E19DA16-244C-5B50-BE0F-52911DD4CA7E}" dt="2026-08-06T20:19:11.552" v="17" actId="2696"/>
-        <pc:sldMkLst>
-          <pc:docMk/>
-          <pc:sldMk cId="3013373299" sldId="433"/>
-        </pc:sldMkLst>
-      </pc:sldChg>
-      <pc:sldChg chg="delSp del mod">
-        <pc:chgData name="Rich Reba" userId="55db41ab6eb3f845" providerId="LiveId" clId="{0E19DA16-244C-5B50-BE0F-52911DD4CA7E}" dt="2026-08-06T20:19:11.546" v="15" actId="2696"/>
-        <pc:sldMkLst>
-          <pc:docMk/>
-          <pc:sldMk cId="756971190" sldId="434"/>
-        </pc:sldMkLst>
-        <pc:spChg chg="del">
-          <ac:chgData name="Rich Reba" userId="55db41ab6eb3f845" providerId="LiveId" clId="{0E19DA16-244C-5B50-BE0F-52911DD4CA7E}" dt="2026-08-05T20:16:55.074" v="1" actId="478"/>
+        <pc:spChg chg="mod">
+          <ac:chgData name="Rich Reba" userId="55db41ab6eb3f845" providerId="LiveId" clId="{0E19DA16-244C-5B50-BE0F-52911DD4CA7E}" dt="2026-08-09T15:51:46.495" v="223" actId="20577"/>
           <ac:spMkLst>
             <pc:docMk/>
-            <pc:sldMk cId="756971190" sldId="434"/>
-            <ac:spMk id="2" creationId="{C9FBF93F-D84F-C8FE-0DF9-0956282C6C60}"/>
+            <pc:sldMk cId="2470097404" sldId="419"/>
+            <ac:spMk id="96" creationId="{5BB72075-6DCE-1BA7-0DFB-18E282181700}"/>
           </ac:spMkLst>
         </pc:spChg>
+        <pc:graphicFrameChg chg="modGraphic">
+          <ac:chgData name="Rich Reba" userId="55db41ab6eb3f845" providerId="LiveId" clId="{0E19DA16-244C-5B50-BE0F-52911DD4CA7E}" dt="2026-08-09T15:51:15.273" v="214" actId="12"/>
+          <ac:graphicFrameMkLst>
+            <pc:docMk/>
+            <pc:sldMk cId="2470097404" sldId="419"/>
+            <ac:graphicFrameMk id="5" creationId="{0204BFE6-DD22-5495-F04C-8E7063C6DE71}"/>
+          </ac:graphicFrameMkLst>
+        </pc:graphicFrameChg>
       </pc:sldChg>
     </pc:docChg>
   </pc:docChgLst>
@@ -1607,6 +1538,407 @@
         <p:cNvPr id="1" name="Shape 92">
           <a:extLst>
             <a:ext uri="{FF2B5EF4-FFF2-40B4-BE49-F238E27FC236}">
+              <a16:creationId xmlns:a16="http://schemas.microsoft.com/office/drawing/2014/main" id="{C475177C-B137-6FF5-FED4-0934F4B85DEB}"/>
+            </a:ext>
+          </a:extLst>
+        </p:cNvPr>
+        <p:cNvGrpSpPr/>
+        <p:nvPr/>
+      </p:nvGrpSpPr>
+      <p:grpSpPr>
+        <a:xfrm>
+          <a:off x="0" y="0"/>
+          <a:ext cx="0" cy="0"/>
+          <a:chOff x="0" y="0"/>
+          <a:chExt cx="0" cy="0"/>
+        </a:xfrm>
+      </p:grpSpPr>
+      <p:sp>
+        <p:nvSpPr>
+          <p:cNvPr id="93" name="Google Shape;93;p2:notes">
+            <a:extLst>
+              <a:ext uri="{FF2B5EF4-FFF2-40B4-BE49-F238E27FC236}">
+                <a16:creationId xmlns:a16="http://schemas.microsoft.com/office/drawing/2014/main" id="{F678E11F-61A9-C022-26CC-D38B3F55B18B}"/>
+              </a:ext>
+            </a:extLst>
+          </p:cNvPr>
+          <p:cNvSpPr txBox="1">
+            <a:spLocks noGrp="1"/>
+          </p:cNvSpPr>
+          <p:nvPr>
+            <p:ph type="body" idx="1"/>
+          </p:nvPr>
+        </p:nvSpPr>
+        <p:spPr>
+          <a:xfrm>
+            <a:off x="685800" y="4343400"/>
+            <a:ext cx="5486400" cy="4114800"/>
+          </a:xfrm>
+          <a:prstGeom prst="rect">
+            <a:avLst/>
+          </a:prstGeom>
+        </p:spPr>
+        <p:txBody>
+          <a:bodyPr spcFirstLastPara="1" wrap="square" lIns="91425" tIns="91425" rIns="91425" bIns="91425" anchor="t" anchorCtr="0">
+            <a:noAutofit/>
+          </a:bodyPr>
+          <a:lstStyle/>
+          <a:p>
+            <a:pPr marL="0" lvl="0" indent="0" algn="l" rtl="0">
+              <a:spcBef>
+                <a:spcPts val="0"/>
+              </a:spcBef>
+              <a:spcAft>
+                <a:spcPts val="0"/>
+              </a:spcAft>
+              <a:buNone/>
+            </a:pPr>
+            <a:r>
+              <a:rPr lang="en-US" dirty="0"/>
+              <a:t>These are specific actions we are taking for our Services during the Launch Stage.  Actions aligned to our Consortium’s priorities are highlighted in yellow.</a:t>
+            </a:r>
+          </a:p>
+          <a:p>
+            <a:pPr marL="0" marR="0" lvl="0" indent="0" algn="l" defTabSz="914400" rtl="0" eaLnBrk="1" fontAlgn="auto" latinLnBrk="0" hangingPunct="1">
+              <a:lnSpc>
+                <a:spcPct val="100000"/>
+              </a:lnSpc>
+              <a:spcBef>
+                <a:spcPts val="0"/>
+              </a:spcBef>
+              <a:spcAft>
+                <a:spcPts val="0"/>
+              </a:spcAft>
+              <a:buClr>
+                <a:srgbClr val="000000"/>
+              </a:buClr>
+              <a:buSzPts val="1100"/>
+              <a:buFont typeface="Arial"/>
+              <a:buNone/>
+              <a:tabLst/>
+              <a:defRPr/>
+            </a:pPr>
+            <a:r>
+              <a:rPr lang="en-US" dirty="0"/>
+              <a:t>We have made progress on our top two Product priorities:  using LPM, and identifying the right Collaboration Platforms </a:t>
+            </a:r>
+            <a:r>
+              <a:rPr kumimoji="0" lang="en-US" sz="1100" b="0" i="0" u="none" strike="noStrike" kern="1200" cap="none" spc="0" normalizeH="0" baseline="0" noProof="0" dirty="0">
+                <a:ln>
+                  <a:noFill/>
+                </a:ln>
+                <a:solidFill>
+                  <a:schemeClr val="tx1"/>
+                </a:solidFill>
+                <a:effectLst/>
+                <a:uLnTx/>
+                <a:uFillTx/>
+                <a:latin typeface="Aptos" panose="02110004020202020204"/>
+                <a:cs typeface="Arial"/>
+                <a:sym typeface="Arial"/>
+              </a:rPr>
+              <a:t>t</a:t>
+            </a:r>
+            <a:r>
+              <a:rPr kumimoji="0" lang="en-US" sz="1100" b="0" i="0" u="none" strike="noStrike" kern="1200" cap="none" spc="0" normalizeH="0" baseline="0" noProof="0" dirty="0">
+                <a:ln>
+                  <a:noFill/>
+                </a:ln>
+                <a:solidFill>
+                  <a:schemeClr val="tx1"/>
+                </a:solidFill>
+                <a:effectLst/>
+                <a:uLnTx/>
+                <a:uFillTx/>
+                <a:latin typeface="Aptos" panose="02110004020202020204"/>
+                <a:ea typeface="Arial"/>
+                <a:cs typeface="Arial"/>
+                <a:sym typeface="Arial"/>
+              </a:rPr>
+              <a:t>o connect our network and be credible</a:t>
+            </a:r>
+          </a:p>
+          <a:p>
+            <a:pPr marL="0" marR="0" lvl="0" indent="0" algn="l" defTabSz="914400" rtl="0" eaLnBrk="1" fontAlgn="auto" latinLnBrk="0" hangingPunct="1">
+              <a:lnSpc>
+                <a:spcPct val="100000"/>
+              </a:lnSpc>
+              <a:spcBef>
+                <a:spcPts val="0"/>
+              </a:spcBef>
+              <a:spcAft>
+                <a:spcPts val="0"/>
+              </a:spcAft>
+              <a:buClr>
+                <a:srgbClr val="000000"/>
+              </a:buClr>
+              <a:buSzPts val="1100"/>
+              <a:buFont typeface="Arial"/>
+              <a:buNone/>
+              <a:tabLst/>
+              <a:defRPr/>
+            </a:pPr>
+            <a:r>
+              <a:rPr kumimoji="0" lang="en-US" sz="1100" b="0" i="0" u="none" strike="noStrike" kern="1200" cap="none" spc="0" normalizeH="0" baseline="0" noProof="0" dirty="0">
+                <a:ln>
+                  <a:noFill/>
+                </a:ln>
+                <a:solidFill>
+                  <a:schemeClr val="tx1"/>
+                </a:solidFill>
+                <a:effectLst/>
+                <a:uLnTx/>
+                <a:uFillTx/>
+                <a:latin typeface="Aptos" panose="02110004020202020204"/>
+                <a:ea typeface="Arial"/>
+                <a:cs typeface="Arial"/>
+                <a:sym typeface="Arial"/>
+              </a:rPr>
+              <a:t>To win advocacy from credible industry influencers and go viral, we must hone our messages and launch a campaign</a:t>
+            </a:r>
+          </a:p>
+          <a:p>
+            <a:pPr marL="0" marR="0" lvl="0" indent="0" algn="l" defTabSz="914400" rtl="0" eaLnBrk="1" fontAlgn="auto" latinLnBrk="0" hangingPunct="1">
+              <a:lnSpc>
+                <a:spcPct val="100000"/>
+              </a:lnSpc>
+              <a:spcBef>
+                <a:spcPts val="0"/>
+              </a:spcBef>
+              <a:spcAft>
+                <a:spcPts val="0"/>
+              </a:spcAft>
+              <a:buClr>
+                <a:srgbClr val="000000"/>
+              </a:buClr>
+              <a:buSzPts val="1100"/>
+              <a:buFont typeface="Arial"/>
+              <a:buNone/>
+              <a:tabLst/>
+              <a:defRPr/>
+            </a:pPr>
+            <a:r>
+              <a:rPr kumimoji="0" lang="en-US" sz="1100" b="0" i="0" u="none" strike="noStrike" kern="1200" cap="none" spc="0" normalizeH="0" baseline="0" noProof="0" dirty="0">
+                <a:ln>
+                  <a:noFill/>
+                </a:ln>
+                <a:solidFill>
+                  <a:schemeClr val="tx1"/>
+                </a:solidFill>
+                <a:effectLst/>
+                <a:uLnTx/>
+                <a:uFillTx/>
+                <a:latin typeface="Aptos" panose="02110004020202020204"/>
+                <a:ea typeface="Arial"/>
+                <a:cs typeface="Arial"/>
+                <a:sym typeface="Arial"/>
+              </a:rPr>
+              <a:t>To scale quickly, we must learn from leaders experienced in similar non-profits, especially ASUG and the Bender Leadership Academy</a:t>
+            </a:r>
+          </a:p>
+          <a:p>
+            <a:pPr marL="0" marR="0" lvl="0" indent="0" algn="l" defTabSz="914400" rtl="0" eaLnBrk="1" fontAlgn="auto" latinLnBrk="0" hangingPunct="1">
+              <a:lnSpc>
+                <a:spcPct val="100000"/>
+              </a:lnSpc>
+              <a:spcBef>
+                <a:spcPts val="0"/>
+              </a:spcBef>
+              <a:spcAft>
+                <a:spcPts val="0"/>
+              </a:spcAft>
+              <a:buClr>
+                <a:srgbClr val="000000"/>
+              </a:buClr>
+              <a:buSzPts val="1100"/>
+              <a:buFont typeface="Arial"/>
+              <a:buNone/>
+              <a:tabLst/>
+              <a:defRPr/>
+            </a:pPr>
+            <a:r>
+              <a:rPr lang="en-US" sz="1100" b="0" i="0" u="none" strike="noStrike" kern="1200" cap="none" dirty="0">
+                <a:solidFill>
+                  <a:schemeClr val="tx1"/>
+                </a:solidFill>
+                <a:latin typeface="Aptos" panose="02110004020202020204"/>
+                <a:ea typeface="Arial"/>
+                <a:cs typeface="Arial"/>
+                <a:sym typeface="Arial"/>
+              </a:rPr>
+              <a:t>To help us scale and be credible, we must experiment with and practice using AI for all of these activities</a:t>
+            </a:r>
+            <a:endParaRPr lang="en-US" dirty="0">
+              <a:solidFill>
+                <a:schemeClr val="tx1"/>
+              </a:solidFill>
+            </a:endParaRPr>
+          </a:p>
+          <a:p>
+            <a:pPr marL="0" marR="0" lvl="0" indent="0" algn="l" defTabSz="914400" rtl="0" eaLnBrk="1" fontAlgn="auto" latinLnBrk="0" hangingPunct="1">
+              <a:lnSpc>
+                <a:spcPct val="100000"/>
+              </a:lnSpc>
+              <a:spcBef>
+                <a:spcPts val="0"/>
+              </a:spcBef>
+              <a:spcAft>
+                <a:spcPts val="0"/>
+              </a:spcAft>
+              <a:buClr>
+                <a:srgbClr val="000000"/>
+              </a:buClr>
+              <a:buSzPts val="1100"/>
+              <a:buFont typeface="Arial"/>
+              <a:buNone/>
+              <a:tabLst/>
+              <a:defRPr/>
+            </a:pPr>
+            <a:endParaRPr lang="en-US" dirty="0">
+              <a:solidFill>
+                <a:schemeClr val="tx1"/>
+              </a:solidFill>
+            </a:endParaRPr>
+          </a:p>
+          <a:p>
+            <a:pPr marL="0" marR="0" lvl="0" indent="0" algn="l" defTabSz="914400" rtl="0" eaLnBrk="1" fontAlgn="auto" latinLnBrk="0" hangingPunct="1">
+              <a:lnSpc>
+                <a:spcPct val="100000"/>
+              </a:lnSpc>
+              <a:spcBef>
+                <a:spcPts val="0"/>
+              </a:spcBef>
+              <a:spcAft>
+                <a:spcPts val="0"/>
+              </a:spcAft>
+              <a:buClr>
+                <a:srgbClr val="000000"/>
+              </a:buClr>
+              <a:buSzPts val="1100"/>
+              <a:buFont typeface="Arial"/>
+              <a:buNone/>
+              <a:tabLst/>
+              <a:defRPr/>
+            </a:pPr>
+            <a:endParaRPr lang="en-US" dirty="0">
+              <a:solidFill>
+                <a:schemeClr val="tx1"/>
+              </a:solidFill>
+            </a:endParaRPr>
+          </a:p>
+          <a:p>
+            <a:pPr marL="0" marR="0" lvl="0" indent="0" algn="l" defTabSz="914400" rtl="0" eaLnBrk="1" fontAlgn="auto" latinLnBrk="0" hangingPunct="1">
+              <a:lnSpc>
+                <a:spcPct val="100000"/>
+              </a:lnSpc>
+              <a:spcBef>
+                <a:spcPts val="0"/>
+              </a:spcBef>
+              <a:spcAft>
+                <a:spcPts val="0"/>
+              </a:spcAft>
+              <a:buClr>
+                <a:srgbClr val="000000"/>
+              </a:buClr>
+              <a:buSzPts val="1100"/>
+              <a:buFont typeface="Arial"/>
+              <a:buNone/>
+              <a:tabLst/>
+              <a:defRPr/>
+            </a:pPr>
+            <a:endParaRPr kumimoji="0" lang="en-US" sz="1100" b="0" i="0" u="none" strike="noStrike" kern="1200" cap="none" spc="0" normalizeH="0" baseline="0" noProof="0" dirty="0">
+              <a:ln>
+                <a:noFill/>
+              </a:ln>
+              <a:solidFill>
+                <a:schemeClr val="tx1"/>
+              </a:solidFill>
+              <a:effectLst/>
+              <a:uLnTx/>
+              <a:uFillTx/>
+              <a:latin typeface="Aptos" panose="02110004020202020204"/>
+              <a:ea typeface="Arial"/>
+              <a:cs typeface="Arial"/>
+              <a:sym typeface="Arial"/>
+            </a:endParaRPr>
+          </a:p>
+        </p:txBody>
+      </p:sp>
+      <p:sp>
+        <p:nvSpPr>
+          <p:cNvPr id="94" name="Google Shape;94;p2:notes">
+            <a:extLst>
+              <a:ext uri="{FF2B5EF4-FFF2-40B4-BE49-F238E27FC236}">
+                <a16:creationId xmlns:a16="http://schemas.microsoft.com/office/drawing/2014/main" id="{E21D8678-910C-3FFB-BE6D-C6AF4F27C994}"/>
+              </a:ext>
+            </a:extLst>
+          </p:cNvPr>
+          <p:cNvSpPr>
+            <a:spLocks noGrp="1" noRot="1" noChangeAspect="1"/>
+          </p:cNvSpPr>
+          <p:nvPr>
+            <p:ph type="sldImg" idx="2"/>
+          </p:nvPr>
+        </p:nvSpPr>
+        <p:spPr>
+          <a:xfrm>
+            <a:off x="381000" y="685800"/>
+            <a:ext cx="6096000" cy="3429000"/>
+          </a:xfrm>
+          <a:custGeom>
+            <a:avLst/>
+            <a:gdLst/>
+            <a:ahLst/>
+            <a:cxnLst/>
+            <a:rect l="l" t="t" r="r" b="b"/>
+            <a:pathLst>
+              <a:path w="120000" h="120000" extrusionOk="0">
+                <a:moveTo>
+                  <a:pt x="0" y="0"/>
+                </a:moveTo>
+                <a:lnTo>
+                  <a:pt x="120000" y="0"/>
+                </a:lnTo>
+                <a:lnTo>
+                  <a:pt x="120000" y="120000"/>
+                </a:lnTo>
+                <a:lnTo>
+                  <a:pt x="0" y="120000"/>
+                </a:lnTo>
+                <a:close/>
+              </a:path>
+            </a:pathLst>
+          </a:custGeom>
+        </p:spPr>
+        <p:txBody>
+          <a:bodyPr/>
+          <a:lstStyle/>
+          <a:p>
+            <a:endParaRPr lang="en-US"/>
+          </a:p>
+        </p:txBody>
+      </p:sp>
+    </p:spTree>
+    <p:extLst>
+      <p:ext uri="{BB962C8B-B14F-4D97-AF65-F5344CB8AC3E}">
+        <p14:creationId xmlns:p14="http://schemas.microsoft.com/office/powerpoint/2010/main" val="2995733651"/>
+      </p:ext>
+    </p:extLst>
+  </p:cSld>
+  <p:clrMapOvr>
+    <a:masterClrMapping/>
+  </p:clrMapOvr>
+</p:notes>
+</file>
+
+<file path=ppt/notesSlides/notesSlide7.xml><?xml version="1.0" encoding="utf-8"?>
+<p:notes xmlns:a="http://schemas.openxmlformats.org/drawingml/2006/main" xmlns:r="http://schemas.openxmlformats.org/officeDocument/2006/relationships" xmlns:p="http://schemas.openxmlformats.org/presentationml/2006/main" showMasterSp="0" showMasterPhAnim="0">
+  <p:cSld>
+    <p:spTree>
+      <p:nvGrpSpPr>
+        <p:cNvPr id="1" name="Shape 92">
+          <a:extLst>
+            <a:ext uri="{FF2B5EF4-FFF2-40B4-BE49-F238E27FC236}">
               <a16:creationId xmlns:a16="http://schemas.microsoft.com/office/drawing/2014/main" id="{FEE2389B-20BC-28BE-17DD-C7442B7B6342}"/>
             </a:ext>
           </a:extLst>
@@ -2000,7 +2332,7 @@
 </p:notes>
 </file>
 
-<file path=ppt/notesSlides/notesSlide7.xml><?xml version="1.0" encoding="utf-8"?>
+<file path=ppt/notesSlides/notesSlide8.xml><?xml version="1.0" encoding="utf-8"?>
 <p:notes xmlns:a="http://schemas.openxmlformats.org/drawingml/2006/main" xmlns:r="http://schemas.openxmlformats.org/officeDocument/2006/relationships" xmlns:p="http://schemas.openxmlformats.org/presentationml/2006/main" showMasterSp="0" showMasterPhAnim="0">
   <p:cSld>
     <p:spTree>
@@ -2138,7 +2470,7 @@
 </p:notes>
 </file>
 
-<file path=ppt/notesSlides/notesSlide8.xml><?xml version="1.0" encoding="utf-8"?>
+<file path=ppt/notesSlides/notesSlide9.xml><?xml version="1.0" encoding="utf-8"?>
 <p:notes xmlns:a="http://schemas.openxmlformats.org/drawingml/2006/main" xmlns:r="http://schemas.openxmlformats.org/officeDocument/2006/relationships" xmlns:p="http://schemas.openxmlformats.org/presentationml/2006/main" showMasterSp="0" showMasterPhAnim="0">
   <p:cSld>
     <p:spTree>
@@ -3704,7 +4036,7 @@
           <a:p>
             <a:fld id="{9DC09AF2-51A2-8243-A29F-680495D2BD2C}" type="datetimeFigureOut">
               <a:rPr lang="en-US" smtClean="0"/>
-              <a:t>8/6/26</a:t>
+              <a:t>8/9/26</a:t>
             </a:fld>
             <a:endParaRPr lang="en-US"/>
           </a:p>
@@ -12680,6 +13012,174 @@
         </p:txBody>
       </p:sp>
     </p:spTree>
+  </p:cSld>
+  <p:clrMapOvr>
+    <a:masterClrMapping/>
+  </p:clrMapOvr>
+</p:sld>
+</file>
+
+<file path=ppt/slides/slide10.xml><?xml version="1.0" encoding="utf-8"?>
+<p:sld xmlns:a="http://schemas.openxmlformats.org/drawingml/2006/main" xmlns:r="http://schemas.openxmlformats.org/officeDocument/2006/relationships" xmlns:p="http://schemas.openxmlformats.org/presentationml/2006/main">
+  <p:cSld>
+    <p:spTree>
+      <p:nvGrpSpPr>
+        <p:cNvPr id="1" name="Shape 120">
+          <a:extLst>
+            <a:ext uri="{FF2B5EF4-FFF2-40B4-BE49-F238E27FC236}">
+              <a16:creationId xmlns:a16="http://schemas.microsoft.com/office/drawing/2014/main" id="{ECDE25D5-7ABB-9ADA-350B-500231E65541}"/>
+            </a:ext>
+          </a:extLst>
+        </p:cNvPr>
+        <p:cNvGrpSpPr/>
+        <p:nvPr/>
+      </p:nvGrpSpPr>
+      <p:grpSpPr>
+        <a:xfrm>
+          <a:off x="0" y="0"/>
+          <a:ext cx="0" cy="0"/>
+          <a:chOff x="0" y="0"/>
+          <a:chExt cx="0" cy="0"/>
+        </a:xfrm>
+      </p:grpSpPr>
+      <p:sp>
+        <p:nvSpPr>
+          <p:cNvPr id="121" name="Google Shape;121;p5">
+            <a:extLst>
+              <a:ext uri="{FF2B5EF4-FFF2-40B4-BE49-F238E27FC236}">
+                <a16:creationId xmlns:a16="http://schemas.microsoft.com/office/drawing/2014/main" id="{D1FD5753-66B3-EA4B-4895-9891C1AB6723}"/>
+              </a:ext>
+            </a:extLst>
+          </p:cNvPr>
+          <p:cNvSpPr txBox="1">
+            <a:spLocks noGrp="1"/>
+          </p:cNvSpPr>
+          <p:nvPr>
+            <p:ph type="title"/>
+          </p:nvPr>
+        </p:nvSpPr>
+        <p:spPr>
+          <a:xfrm>
+            <a:off x="838199" y="365125"/>
+            <a:ext cx="8950569" cy="1325563"/>
+          </a:xfrm>
+          <a:prstGeom prst="rect">
+            <a:avLst/>
+          </a:prstGeom>
+          <a:noFill/>
+          <a:ln>
+            <a:noFill/>
+          </a:ln>
+        </p:spPr>
+        <p:txBody>
+          <a:bodyPr spcFirstLastPara="1" wrap="square" lIns="91425" tIns="45700" rIns="91425" bIns="45700" anchor="ctr" anchorCtr="0">
+            <a:normAutofit/>
+          </a:bodyPr>
+          <a:lstStyle/>
+          <a:p>
+            <a:pPr marL="0" lvl="0" indent="0" algn="l" rtl="0">
+              <a:lnSpc>
+                <a:spcPct val="90000"/>
+              </a:lnSpc>
+              <a:spcBef>
+                <a:spcPts val="0"/>
+              </a:spcBef>
+              <a:spcAft>
+                <a:spcPts val="0"/>
+              </a:spcAft>
+              <a:buClr>
+                <a:schemeClr val="dk1"/>
+              </a:buClr>
+              <a:buSzPts val="4400"/>
+              <a:buFont typeface="Calibri"/>
+              <a:buNone/>
+            </a:pPr>
+            <a:r>
+              <a:rPr lang="en-US" dirty="0"/>
+              <a:t>Portfolio Kanban Reference</a:t>
+            </a:r>
+            <a:endParaRPr dirty="0"/>
+          </a:p>
+        </p:txBody>
+      </p:sp>
+      <p:pic>
+        <p:nvPicPr>
+          <p:cNvPr id="32" name="Picture 31">
+            <a:extLst>
+              <a:ext uri="{FF2B5EF4-FFF2-40B4-BE49-F238E27FC236}">
+                <a16:creationId xmlns:a16="http://schemas.microsoft.com/office/drawing/2014/main" id="{D3616900-0C58-1E90-22AE-07E41FA90C5C}"/>
+              </a:ext>
+            </a:extLst>
+          </p:cNvPr>
+          <p:cNvPicPr>
+            <a:picLocks noChangeAspect="1"/>
+          </p:cNvPicPr>
+          <p:nvPr/>
+        </p:nvPicPr>
+        <p:blipFill>
+          <a:blip r:embed="rId3"/>
+          <a:stretch>
+            <a:fillRect/>
+          </a:stretch>
+        </p:blipFill>
+        <p:spPr>
+          <a:xfrm>
+            <a:off x="116361" y="1609391"/>
+            <a:ext cx="11959278" cy="4748877"/>
+          </a:xfrm>
+          <a:prstGeom prst="rect">
+            <a:avLst/>
+          </a:prstGeom>
+        </p:spPr>
+      </p:pic>
+      <p:sp>
+        <p:nvSpPr>
+          <p:cNvPr id="2" name="TextBox 1">
+            <a:extLst>
+              <a:ext uri="{FF2B5EF4-FFF2-40B4-BE49-F238E27FC236}">
+                <a16:creationId xmlns:a16="http://schemas.microsoft.com/office/drawing/2014/main" id="{FA549193-7BF6-72BD-7395-1DB5F0173929}"/>
+              </a:ext>
+            </a:extLst>
+          </p:cNvPr>
+          <p:cNvSpPr txBox="1"/>
+          <p:nvPr/>
+        </p:nvSpPr>
+        <p:spPr>
+          <a:xfrm>
+            <a:off x="385763" y="6050491"/>
+            <a:ext cx="5867312" cy="307777"/>
+          </a:xfrm>
+          <a:prstGeom prst="rect">
+            <a:avLst/>
+          </a:prstGeom>
+          <a:noFill/>
+        </p:spPr>
+        <p:txBody>
+          <a:bodyPr wrap="none" rtlCol="0">
+            <a:spAutoFit/>
+          </a:bodyPr>
+          <a:lstStyle/>
+          <a:p>
+            <a:r>
+              <a:rPr lang="en-US" dirty="0"/>
+              <a:t>To learn more, visit the </a:t>
+            </a:r>
+            <a:r>
+              <a:rPr lang="en-US" dirty="0">
+                <a:hlinkClick r:id="rId4"/>
+              </a:rPr>
+              <a:t>Scaled Agile Framework Portfolio Backlog article</a:t>
+            </a:r>
+            <a:endParaRPr lang="en-US" dirty="0"/>
+          </a:p>
+        </p:txBody>
+      </p:sp>
+    </p:spTree>
+    <p:extLst>
+      <p:ext uri="{BB962C8B-B14F-4D97-AF65-F5344CB8AC3E}">
+        <p14:creationId xmlns:p14="http://schemas.microsoft.com/office/powerpoint/2010/main" val="3601186110"/>
+      </p:ext>
+    </p:extLst>
   </p:cSld>
   <p:clrMapOvr>
     <a:masterClrMapping/>
@@ -19182,7 +19682,7 @@
         <p:cNvPr id="1" name="Shape 95">
           <a:extLst>
             <a:ext uri="{FF2B5EF4-FFF2-40B4-BE49-F238E27FC236}">
-              <a16:creationId xmlns:a16="http://schemas.microsoft.com/office/drawing/2014/main" id="{9CF0030E-C778-6057-7F00-D64497814302}"/>
+              <a16:creationId xmlns:a16="http://schemas.microsoft.com/office/drawing/2014/main" id="{22D3A38C-4689-0FCF-EAD8-339EAB86A977}"/>
             </a:ext>
           </a:extLst>
         </p:cNvPr>
@@ -19197,42 +19697,12 @@
           <a:chExt cx="0" cy="0"/>
         </a:xfrm>
       </p:grpSpPr>
-      <p:pic>
-        <p:nvPicPr>
-          <p:cNvPr id="3" name="Picture 2">
-            <a:extLst>
-              <a:ext uri="{FF2B5EF4-FFF2-40B4-BE49-F238E27FC236}">
-                <a16:creationId xmlns:a16="http://schemas.microsoft.com/office/drawing/2014/main" id="{C734C8B3-CAA6-7C3E-29FF-A014181AB53A}"/>
-              </a:ext>
-            </a:extLst>
-          </p:cNvPr>
-          <p:cNvPicPr>
-            <a:picLocks noChangeAspect="1"/>
-          </p:cNvPicPr>
-          <p:nvPr/>
-        </p:nvPicPr>
-        <p:blipFill>
-          <a:blip r:embed="rId3"/>
-          <a:stretch>
-            <a:fillRect/>
-          </a:stretch>
-        </p:blipFill>
-        <p:spPr>
-          <a:xfrm>
-            <a:off x="0" y="-7948"/>
-            <a:ext cx="1586753" cy="892549"/>
-          </a:xfrm>
-          <a:prstGeom prst="rect">
-            <a:avLst/>
-          </a:prstGeom>
-        </p:spPr>
-      </p:pic>
       <p:sp>
         <p:nvSpPr>
           <p:cNvPr id="96" name="Google Shape;96;p2">
             <a:extLst>
               <a:ext uri="{FF2B5EF4-FFF2-40B4-BE49-F238E27FC236}">
-                <a16:creationId xmlns:a16="http://schemas.microsoft.com/office/drawing/2014/main" id="{213A3A61-4044-D39A-7839-F3AEFE0C296B}"/>
+                <a16:creationId xmlns:a16="http://schemas.microsoft.com/office/drawing/2014/main" id="{5BB72075-6DCE-1BA7-0DFB-18E282181700}"/>
               </a:ext>
             </a:extLst>
           </p:cNvPr>
@@ -19277,7 +19747,14 @@
             </a:pPr>
             <a:r>
               <a:rPr lang="en-US" dirty="0"/>
-              <a:t>Roadmap to Launch (v1 Services)</a:t>
+              <a:t>Roadmap to Launch (Horizon 1)</a:t>
+            </a:r>
+            <a:br>
+              <a:rPr lang="en-US" dirty="0"/>
+            </a:br>
+            <a:r>
+              <a:rPr lang="en-US" dirty="0"/>
+              <a:t>Baseline</a:t>
             </a:r>
             <a:endParaRPr dirty="0"/>
           </a:p>
@@ -19288,7 +19765,7 @@
           <p:cNvPr id="5" name="Table 4">
             <a:extLst>
               <a:ext uri="{FF2B5EF4-FFF2-40B4-BE49-F238E27FC236}">
-                <a16:creationId xmlns:a16="http://schemas.microsoft.com/office/drawing/2014/main" id="{5855B0BF-5869-4C17-DDB9-4330FF90D640}"/>
+                <a16:creationId xmlns:a16="http://schemas.microsoft.com/office/drawing/2014/main" id="{0204BFE6-DD22-5495-F04C-8E7063C6DE71}"/>
               </a:ext>
             </a:extLst>
           </p:cNvPr>
@@ -19298,14 +19775,14 @@
           <p:nvPr>
             <p:extLst>
               <p:ext uri="{D42A27DB-BD31-4B8C-83A1-F6EECF244321}">
-                <p14:modId xmlns:p14="http://schemas.microsoft.com/office/powerpoint/2010/main" val="617839243"/>
+                <p14:modId xmlns:p14="http://schemas.microsoft.com/office/powerpoint/2010/main" val="4152647132"/>
               </p:ext>
             </p:extLst>
           </p:nvPr>
         </p:nvGraphicFramePr>
         <p:xfrm>
           <a:off x="410934" y="1560399"/>
-          <a:ext cx="11370132" cy="4851554"/>
+          <a:ext cx="11370132" cy="5025887"/>
         </p:xfrm>
         <a:graphic>
           <a:graphicData uri="http://schemas.openxmlformats.org/drawingml/2006/table">
@@ -19463,7 +19940,7 @@
                   </a:ext>
                 </a:extLst>
               </a:tr>
-              <a:tr h="900682">
+              <a:tr h="723820">
                 <a:tc>
                   <a:txBody>
                     <a:bodyPr/>
@@ -19471,7 +19948,7 @@
                     <a:p>
                       <a:r>
                         <a:rPr lang="en-US" sz="2000" b="1" dirty="0"/>
-                        <a:t>All Services</a:t>
+                        <a:t>Professional Networking</a:t>
                       </a:r>
                     </a:p>
                   </a:txBody>
@@ -19520,72 +19997,108 @@
                     <a:lstStyle/>
                     <a:p>
                       <a:pPr marL="171450" lvl="2" indent="-171450">
-                        <a:buFont typeface="Wingdings" pitchFamily="2" charset="2"/>
-                        <a:buChar char="q"/>
+                        <a:buFont typeface="Arial" panose="020B0604020202020204" pitchFamily="34" charset="0"/>
+                        <a:buChar char="•"/>
                         <a:tabLst/>
                       </a:pPr>
                       <a:r>
-                        <a:rPr lang="en-US" sz="1200" b="0" dirty="0">
+                        <a:rPr lang="en-US" sz="1200" b="0" i="0" u="none" strike="noStrike" cap="none" dirty="0">
                           <a:solidFill>
                             <a:schemeClr val="tx1"/>
                           </a:solidFill>
-                          <a:highlight>
-                            <a:srgbClr val="FFFF00"/>
-                          </a:highlight>
+                          <a:effectLst/>
+                          <a:latin typeface="+mn-lt"/>
+                          <a:ea typeface="+mn-ea"/>
+                          <a:cs typeface="+mn-cs"/>
+                          <a:sym typeface="Arial"/>
                         </a:rPr>
-                        <a:t>Use Lean Product Management to publish Services info on our LinkedIn page</a:t>
+                        <a:t>Learn from ASUG, Toastmasters, and PMI leaders how they grew their networks</a:t>
                       </a:r>
                     </a:p>
                     <a:p>
                       <a:pPr marL="171450" lvl="2" indent="-171450">
-                        <a:buFont typeface="Wingdings" pitchFamily="2" charset="2"/>
-                        <a:buChar char="ü"/>
+                        <a:buFont typeface="Arial" panose="020B0604020202020204" pitchFamily="34" charset="0"/>
+                        <a:buChar char="•"/>
                         <a:tabLst/>
                       </a:pPr>
                       <a:r>
-                        <a:rPr lang="en-US" sz="1200" b="0" dirty="0">
+                        <a:rPr lang="en-US" sz="1200" b="0" i="0" u="none" strike="noStrike" cap="none" dirty="0">
                           <a:solidFill>
                             <a:schemeClr val="tx1"/>
                           </a:solidFill>
-                          <a:highlight>
-                            <a:srgbClr val="FFFF00"/>
-                          </a:highlight>
+                          <a:effectLst/>
+                          <a:latin typeface="+mn-lt"/>
+                          <a:ea typeface="+mn-ea"/>
+                          <a:cs typeface="+mn-cs"/>
+                          <a:sym typeface="Arial"/>
                         </a:rPr>
-                        <a:t>Explore low-cost options for setting up a website (e.g., Wordpress)</a:t>
+                        <a:t>Grow the number of Subscribers to 100 via the Board of Directors</a:t>
                       </a:r>
                     </a:p>
                     <a:p>
                       <a:pPr marL="171450" lvl="2" indent="-171450">
-                        <a:buFont typeface="Wingdings" pitchFamily="2" charset="2"/>
-                        <a:buChar char="q"/>
+                        <a:buFont typeface="Arial" panose="020B0604020202020204" pitchFamily="34" charset="0"/>
+                        <a:buChar char="•"/>
                         <a:tabLst/>
                       </a:pPr>
                       <a:r>
-                        <a:rPr lang="en-US" sz="1200" b="0" dirty="0">
+                        <a:rPr lang="en-US" sz="1200" b="0" i="0" u="none" strike="noStrike" cap="none" dirty="0">
                           <a:solidFill>
                             <a:schemeClr val="tx1"/>
                           </a:solidFill>
-                          <a:highlight>
-                            <a:srgbClr val="FFFF00"/>
-                          </a:highlight>
+                          <a:effectLst/>
+                          <a:latin typeface="+mn-lt"/>
+                          <a:ea typeface="+mn-ea"/>
+                          <a:cs typeface="+mn-cs"/>
+                          <a:sym typeface="Arial"/>
                         </a:rPr>
-                        <a:t>Experiment with and practice using AI to help our Consortium scale</a:t>
+                        <a:t>Explore platforms to enhance collaboration (e.g., LinkedIn Groups, Discord)</a:t>
                       </a:r>
                     </a:p>
                     <a:p>
                       <a:pPr marL="171450" lvl="2" indent="-171450">
-                        <a:buFont typeface="Wingdings" pitchFamily="2" charset="2"/>
-                        <a:buChar char="q"/>
+                        <a:buFont typeface="Arial" panose="020B0604020202020204" pitchFamily="34" charset="0"/>
+                        <a:buChar char="•"/>
                         <a:tabLst/>
                       </a:pPr>
                       <a:r>
-                        <a:rPr lang="en-US" sz="1200" b="0" dirty="0">
+                        <a:rPr lang="en-US" sz="1200" b="0" i="0" u="none" strike="noStrike" cap="none" dirty="0">
                           <a:solidFill>
                             <a:schemeClr val="tx1"/>
                           </a:solidFill>
+                          <a:effectLst/>
+                          <a:latin typeface="+mn-lt"/>
+                          <a:ea typeface="+mn-ea"/>
+                          <a:cs typeface="+mn-cs"/>
+                          <a:sym typeface="Arial"/>
                         </a:rPr>
-                        <a:t>Explore ideas for raising seed money (donations and grants)</a:t>
+                        <a:t>Prepare a campaign to grow the number of Subscribers to 300</a:t>
                       </a:r>
+                    </a:p>
+                    <a:p>
+                      <a:pPr marL="171450" lvl="2" indent="-171450">
+                        <a:buFont typeface="Arial" panose="020B0604020202020204" pitchFamily="34" charset="0"/>
+                        <a:buChar char="•"/>
+                        <a:tabLst/>
+                      </a:pPr>
+                      <a:r>
+                        <a:rPr lang="en-US" sz="1200" b="0" i="0" u="none" strike="noStrike" cap="none" dirty="0">
+                          <a:solidFill>
+                            <a:schemeClr val="tx1"/>
+                          </a:solidFill>
+                          <a:effectLst/>
+                          <a:latin typeface="+mn-lt"/>
+                          <a:ea typeface="+mn-ea"/>
+                          <a:cs typeface="+mn-cs"/>
+                          <a:sym typeface="Arial"/>
+                        </a:rPr>
+                        <a:t>Explore Freemium options for generating revenues (e.g., local chapters)</a:t>
+                      </a:r>
+                      <a:endParaRPr lang="en-US" sz="1200" b="0" dirty="0">
+                        <a:solidFill>
+                          <a:schemeClr val="tx1"/>
+                        </a:solidFill>
+                      </a:endParaRPr>
                     </a:p>
                   </a:txBody>
                   <a:tcPr>
@@ -19645,8 +20158,8 @@
                         <a:buClr>
                           <a:srgbClr val="000000"/>
                         </a:buClr>
-                        <a:buFont typeface="Wingdings" pitchFamily="2" charset="2"/>
-                        <a:buChar char="q"/>
+                        <a:buFont typeface="Arial" panose="020B0604020202020204" pitchFamily="34" charset="0"/>
+                        <a:buChar char="•"/>
                         <a:tabLst/>
                       </a:pPr>
                       <a:r>
@@ -19654,9 +20167,975 @@
                           <a:solidFill>
                             <a:schemeClr val="tx1"/>
                           </a:solidFill>
-                          <a:highlight>
-                            <a:srgbClr val="FFFF00"/>
-                          </a:highlight>
+                          <a:latin typeface="+mn-lt"/>
+                          <a:ea typeface="+mn-ea"/>
+                          <a:cs typeface="+mn-cs"/>
+                          <a:sym typeface="Arial"/>
+                        </a:rPr>
+                        <a:t>Identify Leader for Professional Network Service</a:t>
+                      </a:r>
+                    </a:p>
+                    <a:p>
+                      <a:pPr marL="171450" marR="0" lvl="2" indent="-171450" algn="l" rtl="0">
+                        <a:lnSpc>
+                          <a:spcPct val="100000"/>
+                        </a:lnSpc>
+                        <a:spcBef>
+                          <a:spcPts val="0"/>
+                        </a:spcBef>
+                        <a:spcAft>
+                          <a:spcPts val="0"/>
+                        </a:spcAft>
+                        <a:buClr>
+                          <a:srgbClr val="000000"/>
+                        </a:buClr>
+                        <a:buFont typeface="Arial" panose="020B0604020202020204" pitchFamily="34" charset="0"/>
+                        <a:buChar char="•"/>
+                        <a:tabLst/>
+                      </a:pPr>
+                      <a:r>
+                        <a:rPr lang="en-US" sz="1200" b="0" i="0" u="none" strike="noStrike" cap="none" dirty="0">
+                          <a:solidFill>
+                            <a:schemeClr val="tx1"/>
+                          </a:solidFill>
+                          <a:latin typeface="+mn-lt"/>
+                          <a:ea typeface="+mn-ea"/>
+                          <a:cs typeface="+mn-cs"/>
+                          <a:sym typeface="Arial"/>
+                        </a:rPr>
+                        <a:t>Run campaigns to grow the number of Subscribers to 300 and then to 1,000</a:t>
+                      </a:r>
+                    </a:p>
+                    <a:p>
+                      <a:pPr marL="171450" marR="0" lvl="2" indent="-171450" algn="l" rtl="0">
+                        <a:lnSpc>
+                          <a:spcPct val="100000"/>
+                        </a:lnSpc>
+                        <a:spcBef>
+                          <a:spcPts val="0"/>
+                        </a:spcBef>
+                        <a:spcAft>
+                          <a:spcPts val="0"/>
+                        </a:spcAft>
+                        <a:buClr>
+                          <a:srgbClr val="000000"/>
+                        </a:buClr>
+                        <a:buFont typeface="Arial" panose="020B0604020202020204" pitchFamily="34" charset="0"/>
+                        <a:buChar char="•"/>
+                        <a:tabLst/>
+                      </a:pPr>
+                      <a:r>
+                        <a:rPr lang="en-US" sz="1200" b="0" i="0" u="none" strike="noStrike" cap="none" dirty="0">
+                          <a:solidFill>
+                            <a:schemeClr val="tx1"/>
+                          </a:solidFill>
+                          <a:latin typeface="+mn-lt"/>
+                          <a:ea typeface="+mn-ea"/>
+                          <a:cs typeface="+mn-cs"/>
+                          <a:sym typeface="Arial"/>
+                        </a:rPr>
+                        <a:t>Run MVP for collaboration platform</a:t>
+                      </a:r>
+                    </a:p>
+                    <a:p>
+                      <a:pPr marL="171450" marR="0" lvl="2" indent="-171450" algn="l" rtl="0">
+                        <a:lnSpc>
+                          <a:spcPct val="100000"/>
+                        </a:lnSpc>
+                        <a:spcBef>
+                          <a:spcPts val="0"/>
+                        </a:spcBef>
+                        <a:spcAft>
+                          <a:spcPts val="0"/>
+                        </a:spcAft>
+                        <a:buClr>
+                          <a:srgbClr val="000000"/>
+                        </a:buClr>
+                        <a:buFont typeface="Arial" panose="020B0604020202020204" pitchFamily="34" charset="0"/>
+                        <a:buChar char="•"/>
+                        <a:tabLst/>
+                      </a:pPr>
+                      <a:r>
+                        <a:rPr lang="en-US" sz="1200" b="0" i="0" u="none" strike="noStrike" cap="none" dirty="0">
+                          <a:solidFill>
+                            <a:schemeClr val="tx1"/>
+                          </a:solidFill>
+                          <a:latin typeface="+mn-lt"/>
+                          <a:ea typeface="+mn-ea"/>
+                          <a:cs typeface="+mn-cs"/>
+                          <a:sym typeface="Arial"/>
+                        </a:rPr>
+                        <a:t>Run MVPs for Freemium options</a:t>
+                      </a:r>
+                    </a:p>
+                  </a:txBody>
+                  <a:tcPr>
+                    <a:lnL w="12700" cmpd="sng">
+                      <a:noFill/>
+                    </a:lnL>
+                    <a:lnR w="12700" cap="flat" cmpd="sng" algn="ctr">
+                      <a:noFill/>
+                      <a:prstDash val="solid"/>
+                      <a:round/>
+                      <a:headEnd type="none" w="med" len="med"/>
+                      <a:tailEnd type="none" w="med" len="med"/>
+                    </a:lnR>
+                    <a:lnT w="12700" cap="flat" cmpd="sng" algn="ctr">
+                      <a:solidFill>
+                        <a:schemeClr val="tx1"/>
+                      </a:solidFill>
+                      <a:prstDash val="solid"/>
+                      <a:round/>
+                      <a:headEnd type="none" w="med" len="med"/>
+                      <a:tailEnd type="none" w="med" len="med"/>
+                    </a:lnT>
+                    <a:lnB w="12700" cap="flat" cmpd="sng" algn="ctr">
+                      <a:solidFill>
+                        <a:schemeClr val="tx1"/>
+                      </a:solidFill>
+                      <a:prstDash val="solid"/>
+                      <a:round/>
+                      <a:headEnd type="none" w="med" len="med"/>
+                      <a:tailEnd type="none" w="med" len="med"/>
+                    </a:lnB>
+                    <a:lnTlToBr w="12700" cmpd="sng">
+                      <a:noFill/>
+                      <a:prstDash val="solid"/>
+                    </a:lnTlToBr>
+                    <a:lnBlToTr w="12700" cmpd="sng">
+                      <a:noFill/>
+                      <a:prstDash val="solid"/>
+                    </a:lnBlToTr>
+                  </a:tcPr>
+                </a:tc>
+                <a:extLst>
+                  <a:ext uri="{0D108BD9-81ED-4DB2-BD59-A6C34878D82A}">
+                    <a16:rowId xmlns:a16="http://schemas.microsoft.com/office/drawing/2014/main" val="872717509"/>
+                  </a:ext>
+                </a:extLst>
+              </a:tr>
+              <a:tr h="1128631">
+                <a:tc>
+                  <a:txBody>
+                    <a:bodyPr/>
+                    <a:lstStyle/>
+                    <a:p>
+                      <a:r>
+                        <a:rPr lang="en-US" sz="2000" b="1" dirty="0"/>
+                        <a:t>Open Knowledge Sharing</a:t>
+                      </a:r>
+                    </a:p>
+                  </a:txBody>
+                  <a:tcPr>
+                    <a:lnL w="12700" cmpd="sng">
+                      <a:noFill/>
+                    </a:lnL>
+                    <a:lnR w="12700" cmpd="sng">
+                      <a:noFill/>
+                    </a:lnR>
+                    <a:lnT w="12700" cap="flat" cmpd="sng" algn="ctr">
+                      <a:solidFill>
+                        <a:schemeClr val="tx1"/>
+                      </a:solidFill>
+                      <a:prstDash val="solid"/>
+                      <a:round/>
+                      <a:headEnd type="none" w="med" len="med"/>
+                      <a:tailEnd type="none" w="med" len="med"/>
+                    </a:lnT>
+                    <a:lnB w="12700" cap="flat" cmpd="sng" algn="ctr">
+                      <a:solidFill>
+                        <a:schemeClr val="tx1"/>
+                      </a:solidFill>
+                      <a:prstDash val="solid"/>
+                      <a:round/>
+                      <a:headEnd type="none" w="med" len="med"/>
+                      <a:tailEnd type="none" w="med" len="med"/>
+                    </a:lnB>
+                    <a:lnTlToBr w="12700" cmpd="sng">
+                      <a:noFill/>
+                      <a:prstDash val="solid"/>
+                    </a:lnTlToBr>
+                    <a:lnBlToTr w="12700" cmpd="sng">
+                      <a:noFill/>
+                      <a:prstDash val="solid"/>
+                    </a:lnBlToTr>
+                  </a:tcPr>
+                </a:tc>
+                <a:tc>
+                  <a:txBody>
+                    <a:bodyPr/>
+                    <a:lstStyle/>
+                    <a:p>
+                      <a:pPr marL="171450" lvl="2" indent="-171450">
+                        <a:buFont typeface="Arial" panose="020B0604020202020204" pitchFamily="34" charset="0"/>
+                        <a:buChar char="•"/>
+                        <a:tabLst/>
+                      </a:pPr>
+                      <a:r>
+                        <a:rPr lang="en-US" sz="1200" b="0" i="0" u="none" strike="noStrike" cap="none" dirty="0">
+                          <a:solidFill>
+                            <a:schemeClr val="tx1"/>
+                          </a:solidFill>
+                          <a:effectLst/>
+                          <a:latin typeface="+mn-lt"/>
+                          <a:ea typeface="+mn-ea"/>
+                          <a:cs typeface="+mn-cs"/>
+                          <a:sym typeface="Arial"/>
+                        </a:rPr>
+                        <a:t>Learn from ASUG and PMI leaders how they developed and curate their BOKs</a:t>
+                      </a:r>
+                    </a:p>
+                    <a:p>
+                      <a:pPr marL="171450" lvl="2" indent="-171450">
+                        <a:buFont typeface="Arial" panose="020B0604020202020204" pitchFamily="34" charset="0"/>
+                        <a:buChar char="•"/>
+                        <a:tabLst/>
+                      </a:pPr>
+                      <a:r>
+                        <a:rPr lang="en-US" sz="1200" b="0" i="0" u="none" strike="noStrike" cap="none" dirty="0">
+                          <a:solidFill>
+                            <a:schemeClr val="tx1"/>
+                          </a:solidFill>
+                          <a:effectLst/>
+                          <a:latin typeface="+mn-lt"/>
+                          <a:ea typeface="+mn-ea"/>
+                          <a:cs typeface="+mn-cs"/>
+                          <a:sym typeface="Arial"/>
+                        </a:rPr>
+                        <a:t>Explore platforms for publishing and curating the AccelRR8 Framework and AccelRR8 Body of Knowledge (e.g., Github)</a:t>
+                      </a:r>
+                    </a:p>
+                    <a:p>
+                      <a:pPr marL="171450" lvl="2" indent="-171450">
+                        <a:buFont typeface="Arial" panose="020B0604020202020204" pitchFamily="34" charset="0"/>
+                        <a:buChar char="•"/>
+                        <a:tabLst/>
+                      </a:pPr>
+                      <a:r>
+                        <a:rPr lang="en-US" sz="1200" b="0" i="0" u="none" strike="noStrike" cap="none" dirty="0">
+                          <a:solidFill>
+                            <a:schemeClr val="tx1"/>
+                          </a:solidFill>
+                          <a:effectLst/>
+                          <a:latin typeface="+mn-lt"/>
+                          <a:ea typeface="+mn-ea"/>
+                          <a:cs typeface="+mn-cs"/>
+                          <a:sym typeface="Arial"/>
+                        </a:rPr>
+                        <a:t>Identify advisory board leaders for various topics</a:t>
+                      </a:r>
+                    </a:p>
+                    <a:p>
+                      <a:pPr marL="171450" lvl="2" indent="-171450">
+                        <a:buFont typeface="Arial" panose="020B0604020202020204" pitchFamily="34" charset="0"/>
+                        <a:buChar char="•"/>
+                        <a:tabLst/>
+                      </a:pPr>
+                      <a:r>
+                        <a:rPr lang="en-US" sz="1200" b="0" i="0" u="none" strike="noStrike" cap="none" dirty="0">
+                          <a:solidFill>
+                            <a:schemeClr val="tx1"/>
+                          </a:solidFill>
+                          <a:effectLst/>
+                          <a:latin typeface="+mn-lt"/>
+                          <a:ea typeface="+mn-ea"/>
+                          <a:cs typeface="+mn-cs"/>
+                          <a:sym typeface="Arial"/>
+                        </a:rPr>
+                        <a:t>Explore ways to enhance our credibility with Tech Services leaders, e.g., influencer endorsements and webinars</a:t>
+                      </a:r>
+                    </a:p>
+                    <a:p>
+                      <a:pPr marL="171450" lvl="2" indent="-171450">
+                        <a:buFont typeface="Arial" panose="020B0604020202020204" pitchFamily="34" charset="0"/>
+                        <a:buChar char="•"/>
+                        <a:tabLst/>
+                      </a:pPr>
+                      <a:r>
+                        <a:rPr lang="en-US" sz="1200" b="0" i="0" u="none" strike="noStrike" cap="none" dirty="0">
+                          <a:solidFill>
+                            <a:schemeClr val="tx1"/>
+                          </a:solidFill>
+                          <a:effectLst/>
+                          <a:latin typeface="+mn-lt"/>
+                          <a:ea typeface="+mn-ea"/>
+                          <a:cs typeface="+mn-cs"/>
+                          <a:sym typeface="Arial"/>
+                        </a:rPr>
+                        <a:t>Explore Freemium options for generating revenues (e.g., contributors)</a:t>
+                      </a:r>
+                      <a:endParaRPr lang="en-US" sz="1200" b="0" dirty="0">
+                        <a:solidFill>
+                          <a:schemeClr val="tx1"/>
+                        </a:solidFill>
+                      </a:endParaRPr>
+                    </a:p>
+                  </a:txBody>
+                  <a:tcPr>
+                    <a:lnL w="12700" cmpd="sng">
+                      <a:noFill/>
+                    </a:lnL>
+                    <a:lnR w="12700" cmpd="sng">
+                      <a:noFill/>
+                    </a:lnR>
+                    <a:lnT w="12700" cap="flat" cmpd="sng" algn="ctr">
+                      <a:solidFill>
+                        <a:schemeClr val="tx1"/>
+                      </a:solidFill>
+                      <a:prstDash val="solid"/>
+                      <a:round/>
+                      <a:headEnd type="none" w="med" len="med"/>
+                      <a:tailEnd type="none" w="med" len="med"/>
+                    </a:lnT>
+                    <a:lnB w="12700" cap="flat" cmpd="sng" algn="ctr">
+                      <a:solidFill>
+                        <a:schemeClr val="tx1"/>
+                      </a:solidFill>
+                      <a:prstDash val="solid"/>
+                      <a:round/>
+                      <a:headEnd type="none" w="med" len="med"/>
+                      <a:tailEnd type="none" w="med" len="med"/>
+                    </a:lnB>
+                    <a:lnTlToBr w="12700" cmpd="sng">
+                      <a:noFill/>
+                      <a:prstDash val="solid"/>
+                    </a:lnTlToBr>
+                    <a:lnBlToTr w="12700" cmpd="sng">
+                      <a:noFill/>
+                      <a:prstDash val="solid"/>
+                    </a:lnBlToTr>
+                  </a:tcPr>
+                </a:tc>
+                <a:tc>
+                  <a:txBody>
+                    <a:bodyPr/>
+                    <a:lstStyle/>
+                    <a:p>
+                      <a:pPr marL="171450" marR="0" lvl="2" indent="-171450" algn="l" rtl="0">
+                        <a:lnSpc>
+                          <a:spcPct val="100000"/>
+                        </a:lnSpc>
+                        <a:spcBef>
+                          <a:spcPts val="0"/>
+                        </a:spcBef>
+                        <a:spcAft>
+                          <a:spcPts val="0"/>
+                        </a:spcAft>
+                        <a:buClr>
+                          <a:srgbClr val="000000"/>
+                        </a:buClr>
+                        <a:buFont typeface="Arial" panose="020B0604020202020204" pitchFamily="34" charset="0"/>
+                        <a:buChar char="•"/>
+                        <a:tabLst/>
+                      </a:pPr>
+                      <a:r>
+                        <a:rPr lang="en-US" sz="1200" b="0" i="0" u="none" strike="noStrike" cap="none" dirty="0">
+                          <a:solidFill>
+                            <a:schemeClr val="tx1"/>
+                          </a:solidFill>
+                          <a:latin typeface="+mn-lt"/>
+                          <a:ea typeface="+mn-ea"/>
+                          <a:cs typeface="+mn-cs"/>
+                          <a:sym typeface="Arial"/>
+                        </a:rPr>
+                        <a:t>Identify Leader for Open Knowledge Sharing Service</a:t>
+                      </a:r>
+                    </a:p>
+                    <a:p>
+                      <a:pPr marL="171450" marR="0" lvl="2" indent="-171450" algn="l" rtl="0">
+                        <a:lnSpc>
+                          <a:spcPct val="100000"/>
+                        </a:lnSpc>
+                        <a:spcBef>
+                          <a:spcPts val="0"/>
+                        </a:spcBef>
+                        <a:spcAft>
+                          <a:spcPts val="0"/>
+                        </a:spcAft>
+                        <a:buClr>
+                          <a:srgbClr val="000000"/>
+                        </a:buClr>
+                        <a:buFont typeface="Arial" panose="020B0604020202020204" pitchFamily="34" charset="0"/>
+                        <a:buChar char="•"/>
+                        <a:tabLst/>
+                      </a:pPr>
+                      <a:r>
+                        <a:rPr lang="en-US" sz="1200" b="0" i="0" u="none" strike="noStrike" cap="none" dirty="0">
+                          <a:solidFill>
+                            <a:schemeClr val="tx1"/>
+                          </a:solidFill>
+                          <a:latin typeface="+mn-lt"/>
+                          <a:ea typeface="+mn-ea"/>
+                          <a:cs typeface="+mn-cs"/>
+                          <a:sym typeface="Arial"/>
+                        </a:rPr>
+                        <a:t>Publish the AccelRR8 Framework v2 on KM platform with help from Advisory board</a:t>
+                      </a:r>
+                    </a:p>
+                    <a:p>
+                      <a:pPr marL="171450" marR="0" lvl="2" indent="-171450" algn="l" rtl="0">
+                        <a:lnSpc>
+                          <a:spcPct val="100000"/>
+                        </a:lnSpc>
+                        <a:spcBef>
+                          <a:spcPts val="0"/>
+                        </a:spcBef>
+                        <a:spcAft>
+                          <a:spcPts val="0"/>
+                        </a:spcAft>
+                        <a:buClr>
+                          <a:srgbClr val="000000"/>
+                        </a:buClr>
+                        <a:buFont typeface="Arial" panose="020B0604020202020204" pitchFamily="34" charset="0"/>
+                        <a:buChar char="•"/>
+                        <a:tabLst/>
+                      </a:pPr>
+                      <a:r>
+                        <a:rPr lang="en-US" sz="1200" b="0" i="0" u="none" strike="noStrike" cap="none" dirty="0">
+                          <a:solidFill>
+                            <a:schemeClr val="tx1"/>
+                          </a:solidFill>
+                          <a:latin typeface="+mn-lt"/>
+                          <a:ea typeface="+mn-ea"/>
+                          <a:cs typeface="+mn-cs"/>
+                          <a:sym typeface="Arial"/>
+                        </a:rPr>
+                        <a:t>Run MVPs for webinars with influencers</a:t>
+                      </a:r>
+                    </a:p>
+                    <a:p>
+                      <a:pPr marL="171450" marR="0" lvl="2" indent="-171450" algn="l" rtl="0">
+                        <a:lnSpc>
+                          <a:spcPct val="100000"/>
+                        </a:lnSpc>
+                        <a:spcBef>
+                          <a:spcPts val="0"/>
+                        </a:spcBef>
+                        <a:spcAft>
+                          <a:spcPts val="0"/>
+                        </a:spcAft>
+                        <a:buClr>
+                          <a:srgbClr val="000000"/>
+                        </a:buClr>
+                        <a:buFont typeface="Arial" panose="020B0604020202020204" pitchFamily="34" charset="0"/>
+                        <a:buChar char="•"/>
+                        <a:tabLst/>
+                      </a:pPr>
+                      <a:r>
+                        <a:rPr lang="en-US" sz="1200" b="0" i="0" u="none" strike="noStrike" cap="none" dirty="0">
+                          <a:solidFill>
+                            <a:schemeClr val="tx1"/>
+                          </a:solidFill>
+                          <a:latin typeface="+mn-lt"/>
+                          <a:ea typeface="+mn-ea"/>
+                          <a:cs typeface="+mn-cs"/>
+                          <a:sym typeface="Arial"/>
+                        </a:rPr>
+                        <a:t>Run MVPs for Freemium options</a:t>
+                      </a:r>
+                    </a:p>
+                  </a:txBody>
+                  <a:tcPr>
+                    <a:lnL w="12700" cmpd="sng">
+                      <a:noFill/>
+                    </a:lnL>
+                    <a:lnR w="12700" cmpd="sng">
+                      <a:noFill/>
+                    </a:lnR>
+                    <a:lnT w="12700" cap="flat" cmpd="sng" algn="ctr">
+                      <a:solidFill>
+                        <a:schemeClr val="tx1"/>
+                      </a:solidFill>
+                      <a:prstDash val="solid"/>
+                      <a:round/>
+                      <a:headEnd type="none" w="med" len="med"/>
+                      <a:tailEnd type="none" w="med" len="med"/>
+                    </a:lnT>
+                    <a:lnB w="12700" cap="flat" cmpd="sng" algn="ctr">
+                      <a:solidFill>
+                        <a:schemeClr val="tx1"/>
+                      </a:solidFill>
+                      <a:prstDash val="solid"/>
+                      <a:round/>
+                      <a:headEnd type="none" w="med" len="med"/>
+                      <a:tailEnd type="none" w="med" len="med"/>
+                    </a:lnB>
+                    <a:lnTlToBr w="12700" cmpd="sng">
+                      <a:noFill/>
+                      <a:prstDash val="solid"/>
+                    </a:lnTlToBr>
+                    <a:lnBlToTr w="12700" cmpd="sng">
+                      <a:noFill/>
+                      <a:prstDash val="solid"/>
+                    </a:lnBlToTr>
+                  </a:tcPr>
+                </a:tc>
+                <a:extLst>
+                  <a:ext uri="{0D108BD9-81ED-4DB2-BD59-A6C34878D82A}">
+                    <a16:rowId xmlns:a16="http://schemas.microsoft.com/office/drawing/2014/main" val="3089640372"/>
+                  </a:ext>
+                </a:extLst>
+              </a:tr>
+              <a:tr h="1075015">
+                <a:tc>
+                  <a:txBody>
+                    <a:bodyPr/>
+                    <a:lstStyle/>
+                    <a:p>
+                      <a:r>
+                        <a:rPr lang="en-US" sz="2000" b="1" dirty="0"/>
+                        <a:t>Industry</a:t>
+                      </a:r>
+                    </a:p>
+                    <a:p>
+                      <a:r>
+                        <a:rPr lang="en-US" sz="2000" b="1" dirty="0"/>
+                        <a:t>Innovation</a:t>
+                      </a:r>
+                    </a:p>
+                  </a:txBody>
+                  <a:tcPr>
+                    <a:lnL w="12700" cmpd="sng">
+                      <a:noFill/>
+                    </a:lnL>
+                    <a:lnR w="12700" cmpd="sng">
+                      <a:noFill/>
+                    </a:lnR>
+                    <a:lnT w="12700" cap="flat" cmpd="sng" algn="ctr">
+                      <a:solidFill>
+                        <a:schemeClr val="tx1"/>
+                      </a:solidFill>
+                      <a:prstDash val="solid"/>
+                      <a:round/>
+                      <a:headEnd type="none" w="med" len="med"/>
+                      <a:tailEnd type="none" w="med" len="med"/>
+                    </a:lnT>
+                    <a:lnB w="12700" cap="flat" cmpd="sng" algn="ctr">
+                      <a:solidFill>
+                        <a:schemeClr val="tx1"/>
+                      </a:solidFill>
+                      <a:prstDash val="solid"/>
+                      <a:round/>
+                      <a:headEnd type="none" w="med" len="med"/>
+                      <a:tailEnd type="none" w="med" len="med"/>
+                    </a:lnB>
+                    <a:lnTlToBr w="12700" cmpd="sng">
+                      <a:noFill/>
+                      <a:prstDash val="solid"/>
+                    </a:lnTlToBr>
+                    <a:lnBlToTr w="12700" cmpd="sng">
+                      <a:noFill/>
+                      <a:prstDash val="solid"/>
+                    </a:lnBlToTr>
+                  </a:tcPr>
+                </a:tc>
+                <a:tc>
+                  <a:txBody>
+                    <a:bodyPr/>
+                    <a:lstStyle/>
+                    <a:p>
+                      <a:pPr marL="171450" lvl="2" indent="-171450">
+                        <a:buFont typeface="Arial" panose="020B0604020202020204" pitchFamily="34" charset="0"/>
+                        <a:buChar char="•"/>
+                        <a:tabLst/>
+                      </a:pPr>
+                      <a:r>
+                        <a:rPr lang="en-US" sz="1200" b="0" i="0" u="none" strike="noStrike" cap="none" dirty="0">
+                          <a:solidFill>
+                            <a:schemeClr val="tx1"/>
+                          </a:solidFill>
+                          <a:effectLst/>
+                          <a:latin typeface="+mn-lt"/>
+                          <a:ea typeface="+mn-ea"/>
+                          <a:cs typeface="+mn-cs"/>
+                          <a:sym typeface="Arial"/>
+                        </a:rPr>
+                        <a:t>Learn from ASUG and PMI leaders how they generate revenues from Patron organizations</a:t>
+                      </a:r>
+                    </a:p>
+                    <a:p>
+                      <a:pPr marL="171450" lvl="2" indent="-171450">
+                        <a:buFont typeface="Arial" panose="020B0604020202020204" pitchFamily="34" charset="0"/>
+                        <a:buChar char="•"/>
+                        <a:tabLst/>
+                      </a:pPr>
+                      <a:r>
+                        <a:rPr lang="en-US" sz="1200" b="0" i="0" u="none" strike="noStrike" cap="none" dirty="0">
+                          <a:solidFill>
+                            <a:schemeClr val="tx1"/>
+                          </a:solidFill>
+                          <a:effectLst/>
+                          <a:latin typeface="+mn-lt"/>
+                          <a:ea typeface="+mn-ea"/>
+                          <a:cs typeface="+mn-cs"/>
+                          <a:sym typeface="Arial"/>
+                        </a:rPr>
+                        <a:t>Explore opportunities to learn from and help initial Patron organizations</a:t>
+                      </a:r>
+                    </a:p>
+                    <a:p>
+                      <a:pPr marL="171450" lvl="2" indent="-171450">
+                        <a:buFont typeface="Arial" panose="020B0604020202020204" pitchFamily="34" charset="0"/>
+                        <a:buChar char="•"/>
+                        <a:tabLst/>
+                      </a:pPr>
+                      <a:r>
+                        <a:rPr lang="en-US" sz="1200" b="0" i="0" u="none" strike="noStrike" cap="none" dirty="0">
+                          <a:solidFill>
+                            <a:schemeClr val="tx1"/>
+                          </a:solidFill>
+                          <a:effectLst/>
+                          <a:latin typeface="+mn-lt"/>
+                          <a:ea typeface="+mn-ea"/>
+                          <a:cs typeface="+mn-cs"/>
+                          <a:sym typeface="Arial"/>
+                        </a:rPr>
+                        <a:t>Learn from AI for Good leaders how they use technology to help humanity</a:t>
+                      </a:r>
+                    </a:p>
+                    <a:p>
+                      <a:pPr marL="171450" lvl="2" indent="-171450">
+                        <a:buFont typeface="Arial" panose="020B0604020202020204" pitchFamily="34" charset="0"/>
+                        <a:buChar char="•"/>
+                        <a:tabLst/>
+                      </a:pPr>
+                      <a:r>
+                        <a:rPr lang="en-US" sz="1200" b="0" i="0" u="none" strike="noStrike" cap="none" dirty="0">
+                          <a:solidFill>
+                            <a:schemeClr val="tx1"/>
+                          </a:solidFill>
+                          <a:effectLst/>
+                          <a:latin typeface="+mn-lt"/>
+                          <a:ea typeface="+mn-ea"/>
+                          <a:cs typeface="+mn-cs"/>
+                          <a:sym typeface="Arial"/>
+                        </a:rPr>
+                        <a:t>Explore Freemium options for generating revenues (e.g., patron organizations)</a:t>
+                      </a:r>
+                      <a:endParaRPr lang="en-US" sz="1200" b="0" dirty="0">
+                        <a:solidFill>
+                          <a:srgbClr val="00B050"/>
+                        </a:solidFill>
+                      </a:endParaRPr>
+                    </a:p>
+                  </a:txBody>
+                  <a:tcPr>
+                    <a:lnL w="12700" cmpd="sng">
+                      <a:noFill/>
+                    </a:lnL>
+                    <a:lnR w="12700" cmpd="sng">
+                      <a:noFill/>
+                    </a:lnR>
+                    <a:lnT w="12700" cap="flat" cmpd="sng" algn="ctr">
+                      <a:solidFill>
+                        <a:schemeClr val="tx1"/>
+                      </a:solidFill>
+                      <a:prstDash val="solid"/>
+                      <a:round/>
+                      <a:headEnd type="none" w="med" len="med"/>
+                      <a:tailEnd type="none" w="med" len="med"/>
+                    </a:lnT>
+                    <a:lnB w="12700" cap="flat" cmpd="sng" algn="ctr">
+                      <a:solidFill>
+                        <a:schemeClr val="tx1"/>
+                      </a:solidFill>
+                      <a:prstDash val="solid"/>
+                      <a:round/>
+                      <a:headEnd type="none" w="med" len="med"/>
+                      <a:tailEnd type="none" w="med" len="med"/>
+                    </a:lnB>
+                    <a:lnTlToBr w="12700" cmpd="sng">
+                      <a:noFill/>
+                      <a:prstDash val="solid"/>
+                    </a:lnTlToBr>
+                    <a:lnBlToTr w="12700" cmpd="sng">
+                      <a:noFill/>
+                      <a:prstDash val="solid"/>
+                    </a:lnBlToTr>
+                  </a:tcPr>
+                </a:tc>
+                <a:tc>
+                  <a:txBody>
+                    <a:bodyPr/>
+                    <a:lstStyle/>
+                    <a:p>
+                      <a:pPr marL="171450" marR="0" lvl="2" indent="-171450" algn="l" rtl="0">
+                        <a:lnSpc>
+                          <a:spcPct val="100000"/>
+                        </a:lnSpc>
+                        <a:spcBef>
+                          <a:spcPts val="0"/>
+                        </a:spcBef>
+                        <a:spcAft>
+                          <a:spcPts val="0"/>
+                        </a:spcAft>
+                        <a:buClr>
+                          <a:srgbClr val="000000"/>
+                        </a:buClr>
+                        <a:buFont typeface="Arial" panose="020B0604020202020204" pitchFamily="34" charset="0"/>
+                        <a:buChar char="•"/>
+                        <a:tabLst/>
+                      </a:pPr>
+                      <a:r>
+                        <a:rPr lang="en-US" sz="1200" b="0" i="0" u="none" strike="noStrike" cap="none" dirty="0">
+                          <a:solidFill>
+                            <a:schemeClr val="tx1"/>
+                          </a:solidFill>
+                          <a:latin typeface="+mn-lt"/>
+                          <a:ea typeface="+mn-ea"/>
+                          <a:cs typeface="+mn-cs"/>
+                          <a:sym typeface="Arial"/>
+                        </a:rPr>
+                        <a:t>Identify Leader for Industry Innovation Service</a:t>
+                      </a:r>
+                    </a:p>
+                    <a:p>
+                      <a:pPr marL="171450" marR="0" lvl="2" indent="-171450" algn="l" rtl="0">
+                        <a:lnSpc>
+                          <a:spcPct val="100000"/>
+                        </a:lnSpc>
+                        <a:spcBef>
+                          <a:spcPts val="0"/>
+                        </a:spcBef>
+                        <a:spcAft>
+                          <a:spcPts val="0"/>
+                        </a:spcAft>
+                        <a:buClr>
+                          <a:srgbClr val="000000"/>
+                        </a:buClr>
+                        <a:buFont typeface="Arial" panose="020B0604020202020204" pitchFamily="34" charset="0"/>
+                        <a:buChar char="•"/>
+                        <a:tabLst/>
+                      </a:pPr>
+                      <a:r>
+                        <a:rPr lang="en-US" sz="1200" b="0" i="0" u="none" strike="noStrike" cap="none" dirty="0">
+                          <a:solidFill>
+                            <a:schemeClr val="tx1"/>
+                          </a:solidFill>
+                          <a:latin typeface="+mn-lt"/>
+                          <a:ea typeface="+mn-ea"/>
+                          <a:cs typeface="+mn-cs"/>
+                          <a:sym typeface="Arial"/>
+                        </a:rPr>
+                        <a:t>Run MVPs for Freemium options</a:t>
+                      </a:r>
+                    </a:p>
+                  </a:txBody>
+                  <a:tcPr>
+                    <a:lnL w="12700" cmpd="sng">
+                      <a:noFill/>
+                    </a:lnL>
+                    <a:lnR w="12700" cmpd="sng">
+                      <a:noFill/>
+                    </a:lnR>
+                    <a:lnT w="12700" cap="flat" cmpd="sng" algn="ctr">
+                      <a:solidFill>
+                        <a:schemeClr val="tx1"/>
+                      </a:solidFill>
+                      <a:prstDash val="solid"/>
+                      <a:round/>
+                      <a:headEnd type="none" w="med" len="med"/>
+                      <a:tailEnd type="none" w="med" len="med"/>
+                    </a:lnT>
+                    <a:lnB w="12700" cap="flat" cmpd="sng" algn="ctr">
+                      <a:solidFill>
+                        <a:schemeClr val="tx1"/>
+                      </a:solidFill>
+                      <a:prstDash val="solid"/>
+                      <a:round/>
+                      <a:headEnd type="none" w="med" len="med"/>
+                      <a:tailEnd type="none" w="med" len="med"/>
+                    </a:lnB>
+                    <a:lnTlToBr w="12700" cmpd="sng">
+                      <a:noFill/>
+                      <a:prstDash val="solid"/>
+                    </a:lnTlToBr>
+                    <a:lnBlToTr w="12700" cmpd="sng">
+                      <a:noFill/>
+                      <a:prstDash val="solid"/>
+                    </a:lnBlToTr>
+                  </a:tcPr>
+                </a:tc>
+                <a:extLst>
+                  <a:ext uri="{0D108BD9-81ED-4DB2-BD59-A6C34878D82A}">
+                    <a16:rowId xmlns:a16="http://schemas.microsoft.com/office/drawing/2014/main" val="2047728929"/>
+                  </a:ext>
+                </a:extLst>
+              </a:tr>
+              <a:tr h="1075015">
+                <a:tc>
+                  <a:txBody>
+                    <a:bodyPr/>
+                    <a:lstStyle/>
+                    <a:p>
+                      <a:r>
+                        <a:rPr lang="en-US" sz="2000" b="1" dirty="0"/>
+                        <a:t>Services Platform</a:t>
+                      </a:r>
+                    </a:p>
+                  </a:txBody>
+                  <a:tcPr>
+                    <a:lnL w="12700" cmpd="sng">
+                      <a:noFill/>
+                    </a:lnL>
+                    <a:lnR w="12700" cmpd="sng">
+                      <a:noFill/>
+                    </a:lnR>
+                    <a:lnT w="12700" cap="flat" cmpd="sng" algn="ctr">
+                      <a:solidFill>
+                        <a:schemeClr val="tx1"/>
+                      </a:solidFill>
+                      <a:prstDash val="solid"/>
+                      <a:round/>
+                      <a:headEnd type="none" w="med" len="med"/>
+                      <a:tailEnd type="none" w="med" len="med"/>
+                    </a:lnT>
+                    <a:lnB w="12700" cap="flat" cmpd="sng" algn="ctr">
+                      <a:solidFill>
+                        <a:schemeClr val="tx1"/>
+                      </a:solidFill>
+                      <a:prstDash val="solid"/>
+                      <a:round/>
+                      <a:headEnd type="none" w="med" len="med"/>
+                      <a:tailEnd type="none" w="med" len="med"/>
+                    </a:lnB>
+                    <a:lnTlToBr w="12700" cmpd="sng">
+                      <a:noFill/>
+                      <a:prstDash val="solid"/>
+                    </a:lnTlToBr>
+                    <a:lnBlToTr w="12700" cmpd="sng">
+                      <a:noFill/>
+                      <a:prstDash val="solid"/>
+                    </a:lnBlToTr>
+                  </a:tcPr>
+                </a:tc>
+                <a:tc>
+                  <a:txBody>
+                    <a:bodyPr/>
+                    <a:lstStyle/>
+                    <a:p>
+                      <a:pPr marL="171450" lvl="2" indent="-171450">
+                        <a:buFont typeface="Arial" panose="020B0604020202020204" pitchFamily="34" charset="0"/>
+                        <a:buChar char="•"/>
+                        <a:tabLst/>
+                      </a:pPr>
+                      <a:r>
+                        <a:rPr lang="en-US" sz="1200" b="0" dirty="0">
+                          <a:solidFill>
+                            <a:schemeClr val="tx1"/>
+                          </a:solidFill>
+                        </a:rPr>
+                        <a:t>Use Lean Product Management to publish Services info on our LinkedIn page</a:t>
+                      </a:r>
+                    </a:p>
+                    <a:p>
+                      <a:pPr marL="171450" lvl="2" indent="-171450">
+                        <a:buFont typeface="Arial" panose="020B0604020202020204" pitchFamily="34" charset="0"/>
+                        <a:buChar char="•"/>
+                        <a:tabLst/>
+                      </a:pPr>
+                      <a:r>
+                        <a:rPr lang="en-US" sz="1200" b="0" dirty="0">
+                          <a:solidFill>
+                            <a:schemeClr val="tx1"/>
+                          </a:solidFill>
+                        </a:rPr>
+                        <a:t>Explore low-cost options for setting up a website (e.g., Wordpress)</a:t>
+                      </a:r>
+                    </a:p>
+                    <a:p>
+                      <a:pPr marL="171450" lvl="2" indent="-171450">
+                        <a:buFont typeface="Arial" panose="020B0604020202020204" pitchFamily="34" charset="0"/>
+                        <a:buChar char="•"/>
+                        <a:tabLst/>
+                      </a:pPr>
+                      <a:r>
+                        <a:rPr lang="en-US" sz="1200" b="0" dirty="0">
+                          <a:solidFill>
+                            <a:schemeClr val="tx1"/>
+                          </a:solidFill>
+                        </a:rPr>
+                        <a:t>Experiment with and practice using AI to help our Consortium scale</a:t>
+                      </a:r>
+                    </a:p>
+                    <a:p>
+                      <a:pPr marL="171450" lvl="2" indent="-171450">
+                        <a:buFont typeface="Arial" panose="020B0604020202020204" pitchFamily="34" charset="0"/>
+                        <a:buChar char="•"/>
+                        <a:tabLst/>
+                      </a:pPr>
+                      <a:r>
+                        <a:rPr lang="en-US" sz="1200" b="0" dirty="0">
+                          <a:solidFill>
+                            <a:schemeClr val="tx1"/>
+                          </a:solidFill>
+                        </a:rPr>
+                        <a:t>Explore ideas for raising seed money (donations and grants)</a:t>
+                      </a:r>
+                    </a:p>
+                  </a:txBody>
+                  <a:tcPr>
+                    <a:lnL w="12700" cmpd="sng">
+                      <a:noFill/>
+                    </a:lnL>
+                    <a:lnR w="12700" cmpd="sng">
+                      <a:noFill/>
+                    </a:lnR>
+                    <a:lnT w="12700" cap="flat" cmpd="sng" algn="ctr">
+                      <a:solidFill>
+                        <a:schemeClr val="tx1"/>
+                      </a:solidFill>
+                      <a:prstDash val="solid"/>
+                      <a:round/>
+                      <a:headEnd type="none" w="med" len="med"/>
+                      <a:tailEnd type="none" w="med" len="med"/>
+                    </a:lnT>
+                    <a:lnB w="12700" cap="flat" cmpd="sng" algn="ctr">
+                      <a:solidFill>
+                        <a:schemeClr val="tx1"/>
+                      </a:solidFill>
+                      <a:prstDash val="solid"/>
+                      <a:round/>
+                      <a:headEnd type="none" w="med" len="med"/>
+                      <a:tailEnd type="none" w="med" len="med"/>
+                    </a:lnB>
+                    <a:lnTlToBr w="12700" cmpd="sng">
+                      <a:noFill/>
+                      <a:prstDash val="solid"/>
+                    </a:lnTlToBr>
+                    <a:lnBlToTr w="12700" cmpd="sng">
+                      <a:noFill/>
+                      <a:prstDash val="solid"/>
+                    </a:lnBlToTr>
+                  </a:tcPr>
+                </a:tc>
+                <a:tc>
+                  <a:txBody>
+                    <a:bodyPr/>
+                    <a:lstStyle/>
+                    <a:p>
+                      <a:pPr marL="171450" marR="0" lvl="2" indent="-171450" algn="l" rtl="0">
+                        <a:lnSpc>
+                          <a:spcPct val="100000"/>
+                        </a:lnSpc>
+                        <a:spcBef>
+                          <a:spcPts val="0"/>
+                        </a:spcBef>
+                        <a:spcAft>
+                          <a:spcPts val="0"/>
+                        </a:spcAft>
+                        <a:buClr>
+                          <a:srgbClr val="000000"/>
+                        </a:buClr>
+                        <a:buFont typeface="Arial" panose="020B0604020202020204" pitchFamily="34" charset="0"/>
+                        <a:buChar char="•"/>
+                        <a:tabLst/>
+                      </a:pPr>
+                      <a:r>
+                        <a:rPr lang="en-US" sz="1200" b="0" i="0" u="none" strike="noStrike" cap="none" dirty="0">
+                          <a:solidFill>
+                            <a:schemeClr val="tx1"/>
+                          </a:solidFill>
                           <a:latin typeface="+mn-lt"/>
                           <a:ea typeface="+mn-ea"/>
                           <a:cs typeface="+mn-cs"/>
@@ -19679,8 +21158,8 @@
                         <a:buClr>
                           <a:srgbClr val="000000"/>
                         </a:buClr>
-                        <a:buFont typeface="Wingdings" pitchFamily="2" charset="2"/>
-                        <a:buChar char="q"/>
+                        <a:buFont typeface="Arial" panose="020B0604020202020204" pitchFamily="34" charset="0"/>
+                        <a:buChar char="•"/>
                         <a:tabLst/>
                       </a:pPr>
                       <a:r>
@@ -19688,9 +21167,6 @@
                           <a:solidFill>
                             <a:schemeClr val="tx1"/>
                           </a:solidFill>
-                          <a:highlight>
-                            <a:srgbClr val="FFFF00"/>
-                          </a:highlight>
                           <a:latin typeface="+mn-lt"/>
                           <a:ea typeface="+mn-ea"/>
                           <a:cs typeface="+mn-cs"/>
@@ -19704,12 +21180,8 @@
                     <a:lnL w="12700" cmpd="sng">
                       <a:noFill/>
                     </a:lnL>
-                    <a:lnR w="12700" cap="flat" cmpd="sng" algn="ctr">
-                      <a:noFill/>
-                      <a:prstDash val="solid"/>
-                      <a:round/>
-                      <a:headEnd type="none" w="med" len="med"/>
-                      <a:tailEnd type="none" w="med" len="med"/>
+                    <a:lnR w="12700" cmpd="sng">
+                      <a:noFill/>
                     </a:lnR>
                     <a:lnT w="12700" cap="flat" cmpd="sng" algn="ctr">
                       <a:solidFill>
@@ -19741,7 +21213,290 @@
                 </a:tc>
                 <a:extLst>
                   <a:ext uri="{0D108BD9-81ED-4DB2-BD59-A6C34878D82A}">
-                    <a16:rowId xmlns:a16="http://schemas.microsoft.com/office/drawing/2014/main" val="901597007"/>
+                    <a16:rowId xmlns:a16="http://schemas.microsoft.com/office/drawing/2014/main" val="3822362779"/>
+                  </a:ext>
+                </a:extLst>
+              </a:tr>
+            </a:tbl>
+          </a:graphicData>
+        </a:graphic>
+      </p:graphicFrame>
+    </p:spTree>
+    <p:extLst>
+      <p:ext uri="{BB962C8B-B14F-4D97-AF65-F5344CB8AC3E}">
+        <p14:creationId xmlns:p14="http://schemas.microsoft.com/office/powerpoint/2010/main" val="2470097404"/>
+      </p:ext>
+    </p:extLst>
+  </p:cSld>
+  <p:clrMapOvr>
+    <a:masterClrMapping/>
+  </p:clrMapOvr>
+</p:sld>
+</file>
+
+<file path=ppt/slides/slide7.xml><?xml version="1.0" encoding="utf-8"?>
+<p:sld xmlns:a="http://schemas.openxmlformats.org/drawingml/2006/main" xmlns:r="http://schemas.openxmlformats.org/officeDocument/2006/relationships" xmlns:p="http://schemas.openxmlformats.org/presentationml/2006/main">
+  <p:cSld>
+    <p:spTree>
+      <p:nvGrpSpPr>
+        <p:cNvPr id="1" name="Shape 95">
+          <a:extLst>
+            <a:ext uri="{FF2B5EF4-FFF2-40B4-BE49-F238E27FC236}">
+              <a16:creationId xmlns:a16="http://schemas.microsoft.com/office/drawing/2014/main" id="{9CF0030E-C778-6057-7F00-D64497814302}"/>
+            </a:ext>
+          </a:extLst>
+        </p:cNvPr>
+        <p:cNvGrpSpPr/>
+        <p:nvPr/>
+      </p:nvGrpSpPr>
+      <p:grpSpPr>
+        <a:xfrm>
+          <a:off x="0" y="0"/>
+          <a:ext cx="0" cy="0"/>
+          <a:chOff x="0" y="0"/>
+          <a:chExt cx="0" cy="0"/>
+        </a:xfrm>
+      </p:grpSpPr>
+      <p:sp>
+        <p:nvSpPr>
+          <p:cNvPr id="96" name="Google Shape;96;p2">
+            <a:extLst>
+              <a:ext uri="{FF2B5EF4-FFF2-40B4-BE49-F238E27FC236}">
+                <a16:creationId xmlns:a16="http://schemas.microsoft.com/office/drawing/2014/main" id="{213A3A61-4044-D39A-7839-F3AEFE0C296B}"/>
+              </a:ext>
+            </a:extLst>
+          </p:cNvPr>
+          <p:cNvSpPr txBox="1">
+            <a:spLocks noGrp="1"/>
+          </p:cNvSpPr>
+          <p:nvPr>
+            <p:ph type="title"/>
+          </p:nvPr>
+        </p:nvSpPr>
+        <p:spPr>
+          <a:prstGeom prst="rect">
+            <a:avLst/>
+          </a:prstGeom>
+          <a:noFill/>
+          <a:ln>
+            <a:noFill/>
+          </a:ln>
+        </p:spPr>
+        <p:txBody>
+          <a:bodyPr spcFirstLastPara="1" wrap="square" lIns="91425" tIns="45700" rIns="91425" bIns="45700" anchor="ctr" anchorCtr="0">
+            <a:normAutofit/>
+          </a:bodyPr>
+          <a:lstStyle/>
+          <a:p>
+            <a:pPr marL="0" lvl="0" indent="0" algn="l" rtl="0">
+              <a:lnSpc>
+                <a:spcPct val="90000"/>
+              </a:lnSpc>
+              <a:spcBef>
+                <a:spcPts val="0"/>
+              </a:spcBef>
+              <a:spcAft>
+                <a:spcPts val="0"/>
+              </a:spcAft>
+              <a:buClr>
+                <a:schemeClr val="dk1"/>
+              </a:buClr>
+              <a:buSzPts val="4400"/>
+              <a:buFont typeface="Calibri"/>
+              <a:buNone/>
+            </a:pPr>
+            <a:r>
+              <a:rPr lang="en-US" dirty="0"/>
+              <a:t>Roadmap to Launch (Horizon 1)</a:t>
+            </a:r>
+            <a:br>
+              <a:rPr lang="en-US" dirty="0"/>
+            </a:br>
+            <a:r>
+              <a:rPr lang="en-US" dirty="0"/>
+              <a:t>Status</a:t>
+            </a:r>
+            <a:endParaRPr dirty="0"/>
+          </a:p>
+        </p:txBody>
+      </p:sp>
+      <p:graphicFrame>
+        <p:nvGraphicFramePr>
+          <p:cNvPr id="5" name="Table 4">
+            <a:extLst>
+              <a:ext uri="{FF2B5EF4-FFF2-40B4-BE49-F238E27FC236}">
+                <a16:creationId xmlns:a16="http://schemas.microsoft.com/office/drawing/2014/main" id="{5855B0BF-5869-4C17-DDB9-4330FF90D640}"/>
+              </a:ext>
+            </a:extLst>
+          </p:cNvPr>
+          <p:cNvGraphicFramePr>
+            <a:graphicFrameLocks noGrp="1"/>
+          </p:cNvGraphicFramePr>
+          <p:nvPr>
+            <p:extLst>
+              <p:ext uri="{D42A27DB-BD31-4B8C-83A1-F6EECF244321}">
+                <p14:modId xmlns:p14="http://schemas.microsoft.com/office/powerpoint/2010/main" val="1979126813"/>
+              </p:ext>
+            </p:extLst>
+          </p:nvPr>
+        </p:nvGraphicFramePr>
+        <p:xfrm>
+          <a:off x="410934" y="1560399"/>
+          <a:ext cx="11370132" cy="5025887"/>
+        </p:xfrm>
+        <a:graphic>
+          <a:graphicData uri="http://schemas.openxmlformats.org/drawingml/2006/table">
+            <a:tbl>
+              <a:tblPr firstRow="1" bandRow="1">
+                <a:tableStyleId>{5940675A-B579-460E-94D1-54222C63F5DA}</a:tableStyleId>
+              </a:tblPr>
+              <a:tblGrid>
+                <a:gridCol w="2079172">
+                  <a:extLst>
+                    <a:ext uri="{9D8B030D-6E8A-4147-A177-3AD203B41FA5}">
+                      <a16:colId xmlns:a16="http://schemas.microsoft.com/office/drawing/2014/main" val="533583650"/>
+                    </a:ext>
+                  </a:extLst>
+                </a:gridCol>
+                <a:gridCol w="5856515">
+                  <a:extLst>
+                    <a:ext uri="{9D8B030D-6E8A-4147-A177-3AD203B41FA5}">
+                      <a16:colId xmlns:a16="http://schemas.microsoft.com/office/drawing/2014/main" val="766325045"/>
+                    </a:ext>
+                  </a:extLst>
+                </a:gridCol>
+                <a:gridCol w="3434445">
+                  <a:extLst>
+                    <a:ext uri="{9D8B030D-6E8A-4147-A177-3AD203B41FA5}">
+                      <a16:colId xmlns:a16="http://schemas.microsoft.com/office/drawing/2014/main" val="133755"/>
+                    </a:ext>
+                  </a:extLst>
+                </a:gridCol>
+              </a:tblGrid>
+              <a:tr h="315537">
+                <a:tc>
+                  <a:txBody>
+                    <a:bodyPr/>
+                    <a:lstStyle/>
+                    <a:p>
+                      <a:r>
+                        <a:rPr lang="en-US" sz="1400" b="1" dirty="0"/>
+                        <a:t>Service</a:t>
+                      </a:r>
+                    </a:p>
+                  </a:txBody>
+                  <a:tcPr>
+                    <a:lnL w="12700" cmpd="sng">
+                      <a:noFill/>
+                    </a:lnL>
+                    <a:lnR w="12700" cmpd="sng">
+                      <a:noFill/>
+                    </a:lnR>
+                    <a:lnT w="12700" cmpd="sng">
+                      <a:noFill/>
+                    </a:lnT>
+                    <a:lnB w="12700" cap="flat" cmpd="sng" algn="ctr">
+                      <a:solidFill>
+                        <a:schemeClr val="tx1"/>
+                      </a:solidFill>
+                      <a:prstDash val="solid"/>
+                      <a:round/>
+                      <a:headEnd type="none" w="med" len="med"/>
+                      <a:tailEnd type="none" w="med" len="med"/>
+                    </a:lnB>
+                    <a:lnTlToBr w="12700" cmpd="sng">
+                      <a:noFill/>
+                      <a:prstDash val="solid"/>
+                    </a:lnTlToBr>
+                    <a:lnBlToTr w="12700" cmpd="sng">
+                      <a:noFill/>
+                      <a:prstDash val="solid"/>
+                    </a:lnBlToTr>
+                  </a:tcPr>
+                </a:tc>
+                <a:tc>
+                  <a:txBody>
+                    <a:bodyPr/>
+                    <a:lstStyle/>
+                    <a:p>
+                      <a:r>
+                        <a:rPr lang="en-US" b="1" dirty="0"/>
+                        <a:t>Soon</a:t>
+                      </a:r>
+                    </a:p>
+                  </a:txBody>
+                  <a:tcPr>
+                    <a:lnL w="12700" cmpd="sng">
+                      <a:noFill/>
+                    </a:lnL>
+                    <a:lnR w="12700" cmpd="sng">
+                      <a:noFill/>
+                    </a:lnR>
+                    <a:lnT w="12700" cmpd="sng">
+                      <a:noFill/>
+                    </a:lnT>
+                    <a:lnB w="12700" cap="flat" cmpd="sng" algn="ctr">
+                      <a:solidFill>
+                        <a:schemeClr val="tx1"/>
+                      </a:solidFill>
+                      <a:prstDash val="solid"/>
+                      <a:round/>
+                      <a:headEnd type="none" w="med" len="med"/>
+                      <a:tailEnd type="none" w="med" len="med"/>
+                    </a:lnB>
+                    <a:lnTlToBr w="12700" cmpd="sng">
+                      <a:noFill/>
+                      <a:prstDash val="solid"/>
+                    </a:lnTlToBr>
+                    <a:lnBlToTr w="12700" cmpd="sng">
+                      <a:noFill/>
+                      <a:prstDash val="solid"/>
+                    </a:lnBlToTr>
+                  </a:tcPr>
+                </a:tc>
+                <a:tc>
+                  <a:txBody>
+                    <a:bodyPr/>
+                    <a:lstStyle/>
+                    <a:p>
+                      <a:r>
+                        <a:rPr lang="en-US" b="1" dirty="0"/>
+                        <a:t>When Feasible</a:t>
+                      </a:r>
+                    </a:p>
+                  </a:txBody>
+                  <a:tcPr>
+                    <a:lnL w="12700" cmpd="sng">
+                      <a:noFill/>
+                    </a:lnL>
+                    <a:lnR w="12700" cmpd="sng">
+                      <a:noFill/>
+                    </a:lnR>
+                    <a:lnT w="12700" cmpd="sng">
+                      <a:noFill/>
+                    </a:lnT>
+                    <a:lnB w="12700" cap="flat" cmpd="sng" algn="ctr">
+                      <a:solidFill>
+                        <a:schemeClr val="tx1"/>
+                      </a:solidFill>
+                      <a:prstDash val="solid"/>
+                      <a:round/>
+                      <a:headEnd type="none" w="med" len="med"/>
+                      <a:tailEnd type="none" w="med" len="med"/>
+                    </a:lnB>
+                    <a:lnTlToBr w="12700" cmpd="sng">
+                      <a:noFill/>
+                      <a:prstDash val="solid"/>
+                    </a:lnTlToBr>
+                    <a:lnBlToTr w="12700" cmpd="sng">
+                      <a:noFill/>
+                      <a:prstDash val="solid"/>
+                    </a:lnBlToTr>
+                  </a:tcPr>
+                </a:tc>
+                <a:extLst>
+                  <a:ext uri="{0D108BD9-81ED-4DB2-BD59-A6C34878D82A}">
+                    <a16:rowId xmlns:a16="http://schemas.microsoft.com/office/drawing/2014/main" val="1454970526"/>
                   </a:ext>
                 </a:extLst>
               </a:tr>
@@ -19812,9 +21567,6 @@
                             <a:schemeClr val="tx1"/>
                           </a:solidFill>
                           <a:effectLst/>
-                          <a:highlight>
-                            <a:srgbClr val="FFFF00"/>
-                          </a:highlight>
                           <a:latin typeface="+mn-lt"/>
                           <a:ea typeface="+mn-ea"/>
                           <a:cs typeface="+mn-cs"/>
@@ -19840,7 +21592,7 @@
                           <a:cs typeface="+mn-cs"/>
                           <a:sym typeface="Arial"/>
                         </a:rPr>
-                        <a:t>Grow the number of Collaborators to 100 via the Board of Directors</a:t>
+                        <a:t>Grow the number of Subscribers to 100 via the Board of Directors</a:t>
                       </a:r>
                     </a:p>
                     <a:p>
@@ -19855,9 +21607,6 @@
                             <a:schemeClr val="tx1"/>
                           </a:solidFill>
                           <a:effectLst/>
-                          <a:highlight>
-                            <a:srgbClr val="FFFF00"/>
-                          </a:highlight>
                           <a:latin typeface="+mn-lt"/>
                           <a:ea typeface="+mn-ea"/>
                           <a:cs typeface="+mn-cs"/>
@@ -19883,7 +21632,7 @@
                           <a:cs typeface="+mn-cs"/>
                           <a:sym typeface="Arial"/>
                         </a:rPr>
-                        <a:t>Prepare a campaign to grow the number of Collaborators to 300</a:t>
+                        <a:t>Prepare a campaign to grow the number of Subscribers to 300</a:t>
                       </a:r>
                     </a:p>
                     <a:p>
@@ -20014,7 +21763,7 @@
                           <a:cs typeface="+mn-cs"/>
                           <a:sym typeface="Arial"/>
                         </a:rPr>
-                        <a:t>Run campaigns to grow the number of Collaborators to 300 and then to 1,000</a:t>
+                        <a:t>Run campaigns to grow the number of Subscribers to 300 and then to 1,000</a:t>
                       </a:r>
                     </a:p>
                     <a:p>
@@ -20188,9 +21937,6 @@
                             <a:schemeClr val="tx1"/>
                           </a:solidFill>
                           <a:effectLst/>
-                          <a:highlight>
-                            <a:srgbClr val="FFFF00"/>
-                          </a:highlight>
                           <a:latin typeface="+mn-lt"/>
                           <a:ea typeface="+mn-ea"/>
                           <a:cs typeface="+mn-cs"/>
@@ -20211,9 +21957,6 @@
                             <a:schemeClr val="tx1"/>
                           </a:solidFill>
                           <a:effectLst/>
-                          <a:highlight>
-                            <a:srgbClr val="FFFF00"/>
-                          </a:highlight>
                           <a:latin typeface="+mn-lt"/>
                           <a:ea typeface="+mn-ea"/>
                           <a:cs typeface="+mn-cs"/>
@@ -20254,9 +21997,6 @@
                             <a:schemeClr val="tx1"/>
                           </a:solidFill>
                           <a:effectLst/>
-                          <a:highlight>
-                            <a:srgbClr val="FFFF00"/>
-                          </a:highlight>
                           <a:latin typeface="+mn-lt"/>
                           <a:ea typeface="+mn-ea"/>
                           <a:cs typeface="+mn-cs"/>
@@ -20376,7 +22116,7 @@
                           <a:srgbClr val="000000"/>
                         </a:buClr>
                         <a:buFont typeface="Wingdings" pitchFamily="2" charset="2"/>
-                        <a:buChar char="q"/>
+                        <a:buChar char="ü"/>
                         <a:tabLst/>
                       </a:pPr>
                       <a:r>
@@ -20565,15 +22305,12 @@
                             <a:schemeClr val="tx1"/>
                           </a:solidFill>
                           <a:effectLst/>
-                          <a:highlight>
-                            <a:srgbClr val="FFFF00"/>
-                          </a:highlight>
                           <a:latin typeface="+mn-lt"/>
                           <a:ea typeface="+mn-ea"/>
                           <a:cs typeface="+mn-cs"/>
                           <a:sym typeface="Arial"/>
                         </a:rPr>
-                        <a:t>Learn from ASUG and PMI leaders how they generate revenues from patron organizations</a:t>
+                        <a:t>Learn from ASUG and PMI leaders how they generate revenues from Patron organizations</a:t>
                       </a:r>
                     </a:p>
                     <a:p>
@@ -20588,15 +22325,12 @@
                             <a:schemeClr val="tx1"/>
                           </a:solidFill>
                           <a:effectLst/>
-                          <a:highlight>
-                            <a:srgbClr val="FFFF00"/>
-                          </a:highlight>
                           <a:latin typeface="+mn-lt"/>
                           <a:ea typeface="+mn-ea"/>
                           <a:cs typeface="+mn-cs"/>
                           <a:sym typeface="Arial"/>
                         </a:rPr>
-                        <a:t>Explore opportunities to learn from and help the Bender Leadership Academy</a:t>
+                        <a:t>Explore opportunities to learn from and help initial Patron organizations</a:t>
                       </a:r>
                     </a:p>
                     <a:p>
@@ -20611,9 +22345,6 @@
                             <a:schemeClr val="tx1"/>
                           </a:solidFill>
                           <a:effectLst/>
-                          <a:highlight>
-                            <a:srgbClr val="FFFF00"/>
-                          </a:highlight>
                           <a:latin typeface="+mn-lt"/>
                           <a:ea typeface="+mn-ea"/>
                           <a:cs typeface="+mn-cs"/>
@@ -20791,81 +22522,265 @@
                   </a:ext>
                 </a:extLst>
               </a:tr>
+              <a:tr h="1075015">
+                <a:tc>
+                  <a:txBody>
+                    <a:bodyPr/>
+                    <a:lstStyle/>
+                    <a:p>
+                      <a:r>
+                        <a:rPr lang="en-US" sz="2000" b="1" dirty="0"/>
+                        <a:t>Services Platform</a:t>
+                      </a:r>
+                    </a:p>
+                  </a:txBody>
+                  <a:tcPr>
+                    <a:lnL w="12700" cmpd="sng">
+                      <a:noFill/>
+                    </a:lnL>
+                    <a:lnR w="12700" cmpd="sng">
+                      <a:noFill/>
+                    </a:lnR>
+                    <a:lnT w="12700" cap="flat" cmpd="sng" algn="ctr">
+                      <a:solidFill>
+                        <a:schemeClr val="tx1"/>
+                      </a:solidFill>
+                      <a:prstDash val="solid"/>
+                      <a:round/>
+                      <a:headEnd type="none" w="med" len="med"/>
+                      <a:tailEnd type="none" w="med" len="med"/>
+                    </a:lnT>
+                    <a:lnB w="12700" cap="flat" cmpd="sng" algn="ctr">
+                      <a:solidFill>
+                        <a:schemeClr val="tx1"/>
+                      </a:solidFill>
+                      <a:prstDash val="solid"/>
+                      <a:round/>
+                      <a:headEnd type="none" w="med" len="med"/>
+                      <a:tailEnd type="none" w="med" len="med"/>
+                    </a:lnB>
+                    <a:lnTlToBr w="12700" cmpd="sng">
+                      <a:noFill/>
+                      <a:prstDash val="solid"/>
+                    </a:lnTlToBr>
+                    <a:lnBlToTr w="12700" cmpd="sng">
+                      <a:noFill/>
+                      <a:prstDash val="solid"/>
+                    </a:lnBlToTr>
+                  </a:tcPr>
+                </a:tc>
+                <a:tc>
+                  <a:txBody>
+                    <a:bodyPr/>
+                    <a:lstStyle/>
+                    <a:p>
+                      <a:pPr marL="171450" lvl="2" indent="-171450">
+                        <a:buFont typeface="Wingdings" pitchFamily="2" charset="2"/>
+                        <a:buChar char="ü"/>
+                        <a:tabLst/>
+                      </a:pPr>
+                      <a:r>
+                        <a:rPr lang="en-US" sz="1200" b="0" dirty="0">
+                          <a:solidFill>
+                            <a:schemeClr val="tx1"/>
+                          </a:solidFill>
+                        </a:rPr>
+                        <a:t>Use Lean Product Management to publish Services info on our LinkedIn page</a:t>
+                      </a:r>
+                    </a:p>
+                    <a:p>
+                      <a:pPr marL="171450" lvl="2" indent="-171450">
+                        <a:buFont typeface="Wingdings" pitchFamily="2" charset="2"/>
+                        <a:buChar char="ü"/>
+                        <a:tabLst/>
+                      </a:pPr>
+                      <a:r>
+                        <a:rPr lang="en-US" sz="1200" b="0" dirty="0">
+                          <a:solidFill>
+                            <a:schemeClr val="tx1"/>
+                          </a:solidFill>
+                        </a:rPr>
+                        <a:t>Explore low-cost options for setting up a website (e.g., Wordpress)</a:t>
+                      </a:r>
+                    </a:p>
+                    <a:p>
+                      <a:pPr marL="171450" lvl="2" indent="-171450">
+                        <a:buFont typeface="Wingdings" pitchFamily="2" charset="2"/>
+                        <a:buChar char="q"/>
+                        <a:tabLst/>
+                      </a:pPr>
+                      <a:r>
+                        <a:rPr lang="en-US" sz="1200" b="0" dirty="0">
+                          <a:solidFill>
+                            <a:schemeClr val="tx1"/>
+                          </a:solidFill>
+                        </a:rPr>
+                        <a:t>Experiment with and practice using AI to help our Consortium scale</a:t>
+                      </a:r>
+                    </a:p>
+                    <a:p>
+                      <a:pPr marL="171450" lvl="2" indent="-171450">
+                        <a:buFont typeface="Wingdings" pitchFamily="2" charset="2"/>
+                        <a:buChar char="q"/>
+                        <a:tabLst/>
+                      </a:pPr>
+                      <a:r>
+                        <a:rPr lang="en-US" sz="1200" b="0" dirty="0">
+                          <a:solidFill>
+                            <a:schemeClr val="tx1"/>
+                          </a:solidFill>
+                        </a:rPr>
+                        <a:t>Explore ideas for raising seed money (donations and grants)</a:t>
+                      </a:r>
+                    </a:p>
+                  </a:txBody>
+                  <a:tcPr>
+                    <a:lnL w="12700" cmpd="sng">
+                      <a:noFill/>
+                    </a:lnL>
+                    <a:lnR w="12700" cmpd="sng">
+                      <a:noFill/>
+                    </a:lnR>
+                    <a:lnT w="12700" cap="flat" cmpd="sng" algn="ctr">
+                      <a:solidFill>
+                        <a:schemeClr val="tx1"/>
+                      </a:solidFill>
+                      <a:prstDash val="solid"/>
+                      <a:round/>
+                      <a:headEnd type="none" w="med" len="med"/>
+                      <a:tailEnd type="none" w="med" len="med"/>
+                    </a:lnT>
+                    <a:lnB w="12700" cap="flat" cmpd="sng" algn="ctr">
+                      <a:solidFill>
+                        <a:schemeClr val="tx1"/>
+                      </a:solidFill>
+                      <a:prstDash val="solid"/>
+                      <a:round/>
+                      <a:headEnd type="none" w="med" len="med"/>
+                      <a:tailEnd type="none" w="med" len="med"/>
+                    </a:lnB>
+                    <a:lnTlToBr w="12700" cmpd="sng">
+                      <a:noFill/>
+                      <a:prstDash val="solid"/>
+                    </a:lnTlToBr>
+                    <a:lnBlToTr w="12700" cmpd="sng">
+                      <a:noFill/>
+                      <a:prstDash val="solid"/>
+                    </a:lnBlToTr>
+                  </a:tcPr>
+                </a:tc>
+                <a:tc>
+                  <a:txBody>
+                    <a:bodyPr/>
+                    <a:lstStyle/>
+                    <a:p>
+                      <a:pPr marL="171450" marR="0" lvl="2" indent="-171450" algn="l" rtl="0">
+                        <a:lnSpc>
+                          <a:spcPct val="100000"/>
+                        </a:lnSpc>
+                        <a:spcBef>
+                          <a:spcPts val="0"/>
+                        </a:spcBef>
+                        <a:spcAft>
+                          <a:spcPts val="0"/>
+                        </a:spcAft>
+                        <a:buClr>
+                          <a:srgbClr val="000000"/>
+                        </a:buClr>
+                        <a:buFont typeface="Wingdings" pitchFamily="2" charset="2"/>
+                        <a:buChar char="ü"/>
+                        <a:tabLst/>
+                      </a:pPr>
+                      <a:r>
+                        <a:rPr lang="en-US" sz="1200" b="0" i="0" u="none" strike="noStrike" cap="none" dirty="0">
+                          <a:solidFill>
+                            <a:schemeClr val="tx1"/>
+                          </a:solidFill>
+                          <a:latin typeface="+mn-lt"/>
+                          <a:ea typeface="+mn-ea"/>
+                          <a:cs typeface="+mn-cs"/>
+                          <a:sym typeface="Arial"/>
+                        </a:rPr>
+                        <a:t>Set up a website</a:t>
+                      </a:r>
+                    </a:p>
+                    <a:p>
+                      <a:pPr marL="171450" marR="0" lvl="2" indent="-171450" algn="l" rtl="0">
+                        <a:lnSpc>
+                          <a:spcPct val="100000"/>
+                        </a:lnSpc>
+                        <a:spcBef>
+                          <a:spcPts val="0"/>
+                        </a:spcBef>
+                        <a:spcAft>
+                          <a:spcPts val="0"/>
+                        </a:spcAft>
+                        <a:buClr>
+                          <a:srgbClr val="000000"/>
+                        </a:buClr>
+                        <a:buFont typeface="Wingdings" pitchFamily="2" charset="2"/>
+                        <a:buChar char="q"/>
+                        <a:tabLst/>
+                      </a:pPr>
+                      <a:r>
+                        <a:rPr lang="en-US" sz="1200" b="0" i="0" u="none" strike="noStrike" cap="none" dirty="0">
+                          <a:solidFill>
+                            <a:schemeClr val="tx1"/>
+                          </a:solidFill>
+                          <a:latin typeface="+mn-lt"/>
+                          <a:ea typeface="+mn-ea"/>
+                          <a:cs typeface="+mn-cs"/>
+                          <a:sym typeface="Arial"/>
+                        </a:rPr>
+                        <a:t>Publish learnings (e.g., how we’re using AI) in the AccelRR8 Body of Knowledge</a:t>
+                      </a:r>
+                    </a:p>
+                  </a:txBody>
+                  <a:tcPr>
+                    <a:lnL w="12700" cmpd="sng">
+                      <a:noFill/>
+                    </a:lnL>
+                    <a:lnR w="12700" cmpd="sng">
+                      <a:noFill/>
+                    </a:lnR>
+                    <a:lnT w="12700" cap="flat" cmpd="sng" algn="ctr">
+                      <a:solidFill>
+                        <a:schemeClr val="tx1"/>
+                      </a:solidFill>
+                      <a:prstDash val="solid"/>
+                      <a:round/>
+                      <a:headEnd type="none" w="med" len="med"/>
+                      <a:tailEnd type="none" w="med" len="med"/>
+                    </a:lnT>
+                    <a:lnB w="12700" cap="flat" cmpd="sng" algn="ctr">
+                      <a:solidFill>
+                        <a:schemeClr val="tx1"/>
+                      </a:solidFill>
+                      <a:prstDash val="solid"/>
+                      <a:round/>
+                      <a:headEnd type="none" w="med" len="med"/>
+                      <a:tailEnd type="none" w="med" len="med"/>
+                    </a:lnB>
+                    <a:lnTlToBr w="12700" cmpd="sng">
+                      <a:noFill/>
+                      <a:prstDash val="solid"/>
+                    </a:lnTlToBr>
+                    <a:lnBlToTr w="12700" cmpd="sng">
+                      <a:noFill/>
+                      <a:prstDash val="solid"/>
+                    </a:lnBlToTr>
+                  </a:tcPr>
+                </a:tc>
+                <a:extLst>
+                  <a:ext uri="{0D108BD9-81ED-4DB2-BD59-A6C34878D82A}">
+                    <a16:rowId xmlns:a16="http://schemas.microsoft.com/office/drawing/2014/main" val="3822362779"/>
+                  </a:ext>
+                </a:extLst>
+              </a:tr>
             </a:tbl>
           </a:graphicData>
         </a:graphic>
       </p:graphicFrame>
-      <p:sp>
-        <p:nvSpPr>
-          <p:cNvPr id="8" name="TextBox 7">
-            <a:extLst>
-              <a:ext uri="{FF2B5EF4-FFF2-40B4-BE49-F238E27FC236}">
-                <a16:creationId xmlns:a16="http://schemas.microsoft.com/office/drawing/2014/main" id="{98161617-7B83-FBD0-E788-6EDFBDE6F761}"/>
-              </a:ext>
-            </a:extLst>
-          </p:cNvPr>
-          <p:cNvSpPr txBox="1"/>
-          <p:nvPr/>
-        </p:nvSpPr>
-        <p:spPr>
-          <a:xfrm>
-            <a:off x="935019" y="211236"/>
-            <a:ext cx="4443805" cy="307777"/>
-          </a:xfrm>
-          <a:prstGeom prst="rect">
-            <a:avLst/>
-          </a:prstGeom>
-          <a:solidFill>
-            <a:schemeClr val="bg1"/>
-          </a:solidFill>
-        </p:spPr>
-        <p:txBody>
-          <a:bodyPr wrap="square">
-            <a:spAutoFit/>
-          </a:bodyPr>
-          <a:lstStyle/>
-          <a:p>
-            <a:pPr marR="0" lvl="0" algn="l" defTabSz="914400" rtl="0" eaLnBrk="1" fontAlgn="auto" latinLnBrk="0" hangingPunct="1">
-              <a:lnSpc>
-                <a:spcPct val="100000"/>
-              </a:lnSpc>
-              <a:spcBef>
-                <a:spcPts val="0"/>
-              </a:spcBef>
-              <a:spcAft>
-                <a:spcPts val="0"/>
-              </a:spcAft>
-              <a:buClr>
-                <a:srgbClr val="000000"/>
-              </a:buClr>
-              <a:buSzTx/>
-              <a:tabLst/>
-              <a:defRPr/>
-            </a:pPr>
-            <a:r>
-              <a:rPr kumimoji="0" lang="en-US" sz="1400" i="0" u="none" strike="noStrike" kern="1200" cap="none" spc="0" normalizeH="0" baseline="0" noProof="0" dirty="0">
-                <a:ln>
-                  <a:noFill/>
-                </a:ln>
-                <a:solidFill>
-                  <a:schemeClr val="tx1"/>
-                </a:solidFill>
-                <a:effectLst/>
-                <a:highlight>
-                  <a:srgbClr val="FFFF00"/>
-                </a:highlight>
-                <a:uLnTx/>
-                <a:uFillTx/>
-                <a:latin typeface="Aptos" panose="02110004020202020204"/>
-                <a:ea typeface="+mn-ea"/>
-                <a:cs typeface="Arial"/>
-                <a:sym typeface="Arial"/>
-              </a:rPr>
-              <a:t>Actions aligned to the priorities are highlighted in yellow</a:t>
-            </a:r>
-          </a:p>
-        </p:txBody>
-      </p:sp>
     </p:spTree>
     <p:extLst>
       <p:ext uri="{BB962C8B-B14F-4D97-AF65-F5344CB8AC3E}">
@@ -20879,7 +22794,7 @@
 </p:sld>
 </file>
 
-<file path=ppt/slides/slide7.xml><?xml version="1.0" encoding="utf-8"?>
+<file path=ppt/slides/slide8.xml><?xml version="1.0" encoding="utf-8"?>
 <p:sld xmlns:a="http://schemas.openxmlformats.org/drawingml/2006/main" xmlns:r="http://schemas.openxmlformats.org/officeDocument/2006/relationships" xmlns:p="http://schemas.openxmlformats.org/presentationml/2006/main">
   <p:cSld>
     <p:spTree>
@@ -21869,7 +23784,7 @@
 </p:sld>
 </file>
 
-<file path=ppt/slides/slide8.xml><?xml version="1.0" encoding="utf-8"?>
+<file path=ppt/slides/slide9.xml><?xml version="1.0" encoding="utf-8"?>
 <p:sld xmlns:a="http://schemas.openxmlformats.org/drawingml/2006/main" xmlns:r="http://schemas.openxmlformats.org/officeDocument/2006/relationships" xmlns:p="http://schemas.openxmlformats.org/presentationml/2006/main">
   <p:cSld>
     <p:spTree>
@@ -21918,174 +23833,6 @@
     <p:extLst>
       <p:ext uri="{BB962C8B-B14F-4D97-AF65-F5344CB8AC3E}">
         <p14:creationId xmlns:p14="http://schemas.microsoft.com/office/powerpoint/2010/main" val="463985386"/>
-      </p:ext>
-    </p:extLst>
-  </p:cSld>
-  <p:clrMapOvr>
-    <a:masterClrMapping/>
-  </p:clrMapOvr>
-</p:sld>
-</file>
-
-<file path=ppt/slides/slide9.xml><?xml version="1.0" encoding="utf-8"?>
-<p:sld xmlns:a="http://schemas.openxmlformats.org/drawingml/2006/main" xmlns:r="http://schemas.openxmlformats.org/officeDocument/2006/relationships" xmlns:p="http://schemas.openxmlformats.org/presentationml/2006/main">
-  <p:cSld>
-    <p:spTree>
-      <p:nvGrpSpPr>
-        <p:cNvPr id="1" name="Shape 120">
-          <a:extLst>
-            <a:ext uri="{FF2B5EF4-FFF2-40B4-BE49-F238E27FC236}">
-              <a16:creationId xmlns:a16="http://schemas.microsoft.com/office/drawing/2014/main" id="{ECDE25D5-7ABB-9ADA-350B-500231E65541}"/>
-            </a:ext>
-          </a:extLst>
-        </p:cNvPr>
-        <p:cNvGrpSpPr/>
-        <p:nvPr/>
-      </p:nvGrpSpPr>
-      <p:grpSpPr>
-        <a:xfrm>
-          <a:off x="0" y="0"/>
-          <a:ext cx="0" cy="0"/>
-          <a:chOff x="0" y="0"/>
-          <a:chExt cx="0" cy="0"/>
-        </a:xfrm>
-      </p:grpSpPr>
-      <p:sp>
-        <p:nvSpPr>
-          <p:cNvPr id="121" name="Google Shape;121;p5">
-            <a:extLst>
-              <a:ext uri="{FF2B5EF4-FFF2-40B4-BE49-F238E27FC236}">
-                <a16:creationId xmlns:a16="http://schemas.microsoft.com/office/drawing/2014/main" id="{D1FD5753-66B3-EA4B-4895-9891C1AB6723}"/>
-              </a:ext>
-            </a:extLst>
-          </p:cNvPr>
-          <p:cNvSpPr txBox="1">
-            <a:spLocks noGrp="1"/>
-          </p:cNvSpPr>
-          <p:nvPr>
-            <p:ph type="title"/>
-          </p:nvPr>
-        </p:nvSpPr>
-        <p:spPr>
-          <a:xfrm>
-            <a:off x="838199" y="365125"/>
-            <a:ext cx="8950569" cy="1325563"/>
-          </a:xfrm>
-          <a:prstGeom prst="rect">
-            <a:avLst/>
-          </a:prstGeom>
-          <a:noFill/>
-          <a:ln>
-            <a:noFill/>
-          </a:ln>
-        </p:spPr>
-        <p:txBody>
-          <a:bodyPr spcFirstLastPara="1" wrap="square" lIns="91425" tIns="45700" rIns="91425" bIns="45700" anchor="ctr" anchorCtr="0">
-            <a:normAutofit/>
-          </a:bodyPr>
-          <a:lstStyle/>
-          <a:p>
-            <a:pPr marL="0" lvl="0" indent="0" algn="l" rtl="0">
-              <a:lnSpc>
-                <a:spcPct val="90000"/>
-              </a:lnSpc>
-              <a:spcBef>
-                <a:spcPts val="0"/>
-              </a:spcBef>
-              <a:spcAft>
-                <a:spcPts val="0"/>
-              </a:spcAft>
-              <a:buClr>
-                <a:schemeClr val="dk1"/>
-              </a:buClr>
-              <a:buSzPts val="4400"/>
-              <a:buFont typeface="Calibri"/>
-              <a:buNone/>
-            </a:pPr>
-            <a:r>
-              <a:rPr lang="en-US" dirty="0"/>
-              <a:t>Portfolio Kanban Reference</a:t>
-            </a:r>
-            <a:endParaRPr dirty="0"/>
-          </a:p>
-        </p:txBody>
-      </p:sp>
-      <p:pic>
-        <p:nvPicPr>
-          <p:cNvPr id="32" name="Picture 31">
-            <a:extLst>
-              <a:ext uri="{FF2B5EF4-FFF2-40B4-BE49-F238E27FC236}">
-                <a16:creationId xmlns:a16="http://schemas.microsoft.com/office/drawing/2014/main" id="{D3616900-0C58-1E90-22AE-07E41FA90C5C}"/>
-              </a:ext>
-            </a:extLst>
-          </p:cNvPr>
-          <p:cNvPicPr>
-            <a:picLocks noChangeAspect="1"/>
-          </p:cNvPicPr>
-          <p:nvPr/>
-        </p:nvPicPr>
-        <p:blipFill>
-          <a:blip r:embed="rId3"/>
-          <a:stretch>
-            <a:fillRect/>
-          </a:stretch>
-        </p:blipFill>
-        <p:spPr>
-          <a:xfrm>
-            <a:off x="116361" y="1609391"/>
-            <a:ext cx="11959278" cy="4748877"/>
-          </a:xfrm>
-          <a:prstGeom prst="rect">
-            <a:avLst/>
-          </a:prstGeom>
-        </p:spPr>
-      </p:pic>
-      <p:sp>
-        <p:nvSpPr>
-          <p:cNvPr id="2" name="TextBox 1">
-            <a:extLst>
-              <a:ext uri="{FF2B5EF4-FFF2-40B4-BE49-F238E27FC236}">
-                <a16:creationId xmlns:a16="http://schemas.microsoft.com/office/drawing/2014/main" id="{FA549193-7BF6-72BD-7395-1DB5F0173929}"/>
-              </a:ext>
-            </a:extLst>
-          </p:cNvPr>
-          <p:cNvSpPr txBox="1"/>
-          <p:nvPr/>
-        </p:nvSpPr>
-        <p:spPr>
-          <a:xfrm>
-            <a:off x="385763" y="6050491"/>
-            <a:ext cx="5867312" cy="307777"/>
-          </a:xfrm>
-          <a:prstGeom prst="rect">
-            <a:avLst/>
-          </a:prstGeom>
-          <a:noFill/>
-        </p:spPr>
-        <p:txBody>
-          <a:bodyPr wrap="none" rtlCol="0">
-            <a:spAutoFit/>
-          </a:bodyPr>
-          <a:lstStyle/>
-          <a:p>
-            <a:r>
-              <a:rPr lang="en-US" dirty="0"/>
-              <a:t>To learn more, visit the </a:t>
-            </a:r>
-            <a:r>
-              <a:rPr lang="en-US" dirty="0">
-                <a:hlinkClick r:id="rId4"/>
-              </a:rPr>
-              <a:t>Scaled Agile Framework Portfolio Backlog article</a:t>
-            </a:r>
-            <a:endParaRPr lang="en-US" dirty="0"/>
-          </a:p>
-        </p:txBody>
-      </p:sp>
-    </p:spTree>
-    <p:extLst>
-      <p:ext uri="{BB962C8B-B14F-4D97-AF65-F5344CB8AC3E}">
-        <p14:creationId xmlns:p14="http://schemas.microsoft.com/office/powerpoint/2010/main" val="3601186110"/>
       </p:ext>
     </p:extLst>
   </p:cSld>

--- a/docs/2_Value_Creation/2a_Product/2a_Product_Management_Plan.pptx
+++ b/docs/2_Value_Creation/2a_Product/2a_Product_Management_Plan.pptx
@@ -255,7 +255,7 @@
       <p15:sldGuideLst xmlns:p15="http://schemas.microsoft.com/office/powerpoint/2012/main"/>
     </p:ext>
     <p:ext uri="GoogleSlidesCustomDataVersion2">
-      <go:slidesCustomData xmlns="" xmlns:go="http://customooxmlschemas.google.com/" xmlns:ahyp="http://schemas.microsoft.com/office/drawing/2018/hyperlinkcolor" xmlns:p15="http://schemas.microsoft.com/office/powerpoint/2012/main" xmlns:p14="http://schemas.microsoft.com/office/powerpoint/2010/main" xmlns:com="http://schemas.openxmlformats.org/drawingml/2006/compatibility" xmlns:pvml="urn:schemas-microsoft-com:office:powerpoint" xmlns:v="urn:schemas-microsoft-com:vml" xmlns:o="urn:schemas-microsoft-com:office:office" xmlns:dgm="http://schemas.openxmlformats.org/drawingml/2006/diagram" xmlns:c="http://schemas.openxmlformats.org/drawingml/2006/chart" xmlns:mv="urn:schemas-microsoft-com:mac:vml" xmlns:mc="http://schemas.openxmlformats.org/markup-compatibility/2006" r:id="rId23" roundtripDataSignature="AMtx7mhwEp+Eio5qReXqYqUwMP31HB0A8A=="/>
+      <go:slidesCustomData xmlns:mc="http://schemas.openxmlformats.org/markup-compatibility/2006" xmlns:mv="urn:schemas-microsoft-com:mac:vml" xmlns:c="http://schemas.openxmlformats.org/drawingml/2006/chart" xmlns:dgm="http://schemas.openxmlformats.org/drawingml/2006/diagram" xmlns:o="urn:schemas-microsoft-com:office:office" xmlns:v="urn:schemas-microsoft-com:vml" xmlns:pvml="urn:schemas-microsoft-com:office:powerpoint" xmlns:com="http://schemas.openxmlformats.org/drawingml/2006/compatibility" xmlns:p14="http://schemas.microsoft.com/office/powerpoint/2010/main" xmlns:p15="http://schemas.microsoft.com/office/powerpoint/2012/main" xmlns:ahyp="http://schemas.microsoft.com/office/drawing/2018/hyperlinkcolor" xmlns:go="http://customooxmlschemas.google.com/" xmlns="" r:id="rId23" roundtripDataSignature="AMtx7mhwEp+Eio5qReXqYqUwMP31HB0A8A=="/>
     </p:ext>
   </p:extLst>
 </p:presentation>
@@ -274,7 +274,7 @@
   <pc:docChgLst>
     <pc:chgData name="Rich Reba" userId="55db41ab6eb3f845" providerId="LiveId" clId="{0E19DA16-244C-5B50-BE0F-52911DD4CA7E}"/>
     <pc:docChg chg="custSel addSld delSld modSld">
-      <pc:chgData name="Rich Reba" userId="55db41ab6eb3f845" providerId="LiveId" clId="{0E19DA16-244C-5B50-BE0F-52911DD4CA7E}" dt="2026-08-09T15:53:38.015" v="264" actId="20577"/>
+      <pc:chgData name="Rich Reba" userId="55db41ab6eb3f845" providerId="LiveId" clId="{0E19DA16-244C-5B50-BE0F-52911DD4CA7E}" dt="2026-08-14T12:38:25.664" v="265" actId="20577"/>
       <pc:docMkLst>
         <pc:docMk/>
       </pc:docMkLst>
@@ -327,14 +327,6 @@
           <pc:docMk/>
           <pc:sldMk cId="401125609" sldId="409"/>
         </pc:sldMkLst>
-        <pc:spChg chg="del">
-          <ac:chgData name="Rich Reba" userId="55db41ab6eb3f845" providerId="LiveId" clId="{0E19DA16-244C-5B50-BE0F-52911DD4CA7E}" dt="2026-08-09T15:47:07.266" v="52" actId="478"/>
-          <ac:spMkLst>
-            <pc:docMk/>
-            <pc:sldMk cId="401125609" sldId="409"/>
-            <ac:spMk id="8" creationId="{98161617-7B83-FBD0-E788-6EDFBDE6F761}"/>
-          </ac:spMkLst>
-        </pc:spChg>
         <pc:spChg chg="mod">
           <ac:chgData name="Rich Reba" userId="55db41ab6eb3f845" providerId="LiveId" clId="{0E19DA16-244C-5B50-BE0F-52911DD4CA7E}" dt="2026-08-09T15:53:38.015" v="264" actId="20577"/>
           <ac:spMkLst>
@@ -351,14 +343,21 @@
             <ac:graphicFrameMk id="5" creationId="{5855B0BF-5869-4C17-DDB9-4330FF90D640}"/>
           </ac:graphicFrameMkLst>
         </pc:graphicFrameChg>
-        <pc:picChg chg="del mod">
-          <ac:chgData name="Rich Reba" userId="55db41ab6eb3f845" providerId="LiveId" clId="{0E19DA16-244C-5B50-BE0F-52911DD4CA7E}" dt="2026-08-09T15:47:07.266" v="52" actId="478"/>
-          <ac:picMkLst>
+      </pc:sldChg>
+      <pc:sldChg chg="modSp mod">
+        <pc:chgData name="Rich Reba" userId="55db41ab6eb3f845" providerId="LiveId" clId="{0E19DA16-244C-5B50-BE0F-52911DD4CA7E}" dt="2026-08-14T12:38:25.664" v="265" actId="20577"/>
+        <pc:sldMkLst>
+          <pc:docMk/>
+          <pc:sldMk cId="3955824805" sldId="418"/>
+        </pc:sldMkLst>
+        <pc:spChg chg="mod">
+          <ac:chgData name="Rich Reba" userId="55db41ab6eb3f845" providerId="LiveId" clId="{0E19DA16-244C-5B50-BE0F-52911DD4CA7E}" dt="2026-08-14T12:38:25.664" v="265" actId="20577"/>
+          <ac:spMkLst>
             <pc:docMk/>
-            <pc:sldMk cId="401125609" sldId="409"/>
-            <ac:picMk id="3" creationId="{C734C8B3-CAA6-7C3E-29FF-A014181AB53A}"/>
-          </ac:picMkLst>
-        </pc:picChg>
+            <pc:sldMk cId="3955824805" sldId="418"/>
+            <ac:spMk id="22" creationId="{278CDA1C-9746-8737-E977-E13F1843DD8E}"/>
+          </ac:spMkLst>
+        </pc:spChg>
       </pc:sldChg>
       <pc:sldChg chg="modSp add mod">
         <pc:chgData name="Rich Reba" userId="55db41ab6eb3f845" providerId="LiveId" clId="{0E19DA16-244C-5B50-BE0F-52911DD4CA7E}" dt="2026-08-09T15:51:46.495" v="223" actId="20577"/>
@@ -4036,7 +4035,7 @@
           <a:p>
             <a:fld id="{9DC09AF2-51A2-8243-A29F-680495D2BD2C}" type="datetimeFigureOut">
               <a:rPr lang="en-US" smtClean="0"/>
-              <a:t>8/9/26</a:t>
+              <a:t>8/14/26</a:t>
             </a:fld>
             <a:endParaRPr lang="en-US"/>
           </a:p>
@@ -16652,7 +16651,7 @@
                 <a:latin typeface="Calibri" panose="020F0502020204030204" pitchFamily="34" charset="0"/>
                 <a:cs typeface="Calibri" panose="020F0502020204030204" pitchFamily="34" charset="0"/>
               </a:rPr>
-              <a:t>Consortium Product Priorities</a:t>
+              <a:t>Consortium Priorities</a:t>
             </a:r>
           </a:p>
           <a:p>
